--- a/data/official/Final PPT.pptx
+++ b/data/official/Final PPT.pptx
@@ -9,19 +9,19 @@
   </p:notesMasterIdLst>
   <p:sldIdLst>
     <p:sldId id="256" r:id="rId2"/>
-    <p:sldId id="497" r:id="rId3"/>
-    <p:sldId id="499" r:id="rId4"/>
-    <p:sldId id="500" r:id="rId5"/>
-    <p:sldId id="501" r:id="rId6"/>
+    <p:sldId id="514" r:id="rId3"/>
+    <p:sldId id="515" r:id="rId4"/>
+    <p:sldId id="516" r:id="rId5"/>
+    <p:sldId id="517" r:id="rId6"/>
     <p:sldId id="512" r:id="rId7"/>
     <p:sldId id="513" r:id="rId8"/>
-    <p:sldId id="505" r:id="rId9"/>
-    <p:sldId id="503" r:id="rId10"/>
-    <p:sldId id="508" r:id="rId11"/>
-    <p:sldId id="507" r:id="rId12"/>
-    <p:sldId id="504" r:id="rId13"/>
-    <p:sldId id="502" r:id="rId14"/>
-    <p:sldId id="506" r:id="rId15"/>
+    <p:sldId id="518" r:id="rId9"/>
+    <p:sldId id="522" r:id="rId10"/>
+    <p:sldId id="524" r:id="rId11"/>
+    <p:sldId id="521" r:id="rId12"/>
+    <p:sldId id="523" r:id="rId13"/>
+    <p:sldId id="520" r:id="rId14"/>
+    <p:sldId id="519" r:id="rId15"/>
     <p:sldId id="269" r:id="rId16"/>
   </p:sldIdLst>
   <p:sldSz cx="9144000" cy="6858000" type="screen4x3"/>
@@ -140,62 +140,6 @@
 </p:presentation>
 </file>
 
-<file path=ppt/ink/ink1.xml><?xml version="1.0" encoding="utf-8"?>
-<inkml:ink xmlns:inkml="http://www.w3.org/2003/InkML">
-  <inkml:definitions>
-    <inkml:context xml:id="ctx0">
-      <inkml:inkSource xml:id="inkSrc0">
-        <inkml:traceFormat>
-          <inkml:channel name="X" type="integer" min="-2.14748E9" max="2.14748E9" units="cm"/>
-          <inkml:channel name="Y" type="integer" min="-2.14748E9" max="2.14748E9" units="cm"/>
-          <inkml:channel name="F" type="integer" max="32767" units="dev"/>
-        </inkml:traceFormat>
-        <inkml:channelProperties>
-          <inkml:channelProperty channel="X" name="resolution" value="1000" units="1/cm"/>
-          <inkml:channelProperty channel="Y" name="resolution" value="1000" units="1/cm"/>
-          <inkml:channelProperty channel="F" name="resolution" value="0" units="1/dev"/>
-        </inkml:channelProperties>
-      </inkml:inkSource>
-      <inkml:timestamp xml:id="ts0" timeString="2025-08-20T15:49:54.477"/>
-    </inkml:context>
-    <inkml:brush xml:id="br0">
-      <inkml:brushProperty name="width" value="0.35" units="cm"/>
-      <inkml:brushProperty name="height" value="0.35" units="cm"/>
-      <inkml:brushProperty name="color" value="#FFFFFF"/>
-    </inkml:brush>
-  </inkml:definitions>
-  <inkml:trace contextRef="#ctx0" brushRef="#br0">299 638 24575,'1'-13'0,"2"1"0,-1-1 0,2 1 0,0-1 0,0 1 0,1 0 0,0 0 0,1 1 0,12-18 0,-7 10 0,15-34 0,-25 51 0,-1 0 0,1 0 0,-1 1 0,1-1 0,-1 0 0,1 0 0,-1 0 0,0 0 0,0 0 0,0 0 0,-1-3 0,1 4 0,0 1 0,0-1 0,0 1 0,-1-1 0,1 1 0,0-1 0,-1 0 0,1 1 0,0-1 0,-1 1 0,1 0 0,-1-1 0,1 1 0,0-1 0,-1 1 0,0 0 0,1-1 0,-1 1 0,1 0 0,-1-1 0,1 1 0,-1 0 0,-1-1 0,0 1 0,-1 0 0,0 0 0,1 0 0,-1 1 0,0-1 0,1 1 0,-1-1 0,0 1 0,1 0 0,-1 0 0,1 0 0,-1 0 0,1 0 0,-4 3 0,-22 16 0,-46 41 0,-9 7 0,-17 16 0,87-77 0,6-10 0,7 1 0,-1 1 0,1 0 0,0 0 0,0 0 0,0-1 0,0 1 0,0 0 0,1 0 0,-1 0 0,0 0 0,0-1 0,1 1 0,-1 0 0,1 0 0,-1 0 0,1 0 0,-1 0 0,1 0 0,1-1 0,17-28 0,0 0 0,-2-1 0,-2-1 0,14-39 0,-27 67 0,-1-1 0,0 1 0,0-1 0,0 1 0,0-1 0,-1 0 0,0 1 0,0-9 0,0 11 0,-1 0 0,1 0 0,-1 1 0,0-1 0,0 0 0,1 1 0,-1-1 0,0 0 0,0 1 0,-1-1 0,1 1 0,0 0 0,0-1 0,-1 1 0,1 0 0,-1 0 0,1 0 0,-1 0 0,1 0 0,-1 0 0,0 0 0,1 0 0,-1 1 0,-2-2 0,1 2 0,0-1 0,1-1 0,-1 1 0,1 0 0,-1-1 0,1 1 0,0-1 0,0 0 0,0 0 0,0 0 0,0 0 0,0 0 0,0 0 0,1 0 0,-1-1 0,1 1 0,-3-5 0,2 3 0,0 0 0,0 0 0,-1 1 0,1 0 0,-1-1 0,-5-4 0,-15-3 0,21 11 0,1 0 0,0-1 0,0 1 0,0 0 0,-1-1 0,1 1 0,0-1 0,0 1 0,0-1 0,0 1 0,0-1 0,0 0 0,0 1 0,0-1 0,0 0 0,0 0 0,0 0 0,1 0 0,-1 0 0,0 0 0,0 0 0,1 0 0,-1 0 0,1 0 0,-1 0 0,1 0 0,0-1 0,-1 1 0,1 0 0,0 0 0,0 0 0,0-3 0,-1 0 0,0 1 0,1-1 0,0 0 0,0 0 0,0 0 0,1 1 0,-1-1 0,1 0 0,0 0 0,0 1 0,0-1 0,0 1 0,1-1 0,-1 1 0,1-1 0,0 1 0,0 0 0,0 0 0,1 0 0,-1 0 0,1 0 0,0 0 0,-1 1 0,1-1 0,0 1 0,0 0 0,1 0 0,-1 0 0,0 0 0,1 1 0,-1-1 0,1 1 0,0 0 0,-1 0 0,1 0 0,0 1 0,0-1 0,-1 1 0,1 0 0,0 0 0,0 0 0,0 0 0,-1 1 0,8 1 0,4 4 0,0 0 0,0 1 0,-1 0 0,25 17 0,13 7 0,-36-22 0,0-2 0,0 0 0,1-1 0,0-1 0,0-1 0,27 4 0,-39-7 0,0 0 0,0-1 0,0 0 0,-1 0 0,1 0 0,0-1 0,0 0 0,0 0 0,-1 0 0,1 0 0,0-1 0,-1 1 0,1-1 0,-1 0 0,0-1 0,1 1 0,-1-1 0,0 0 0,-1 0 0,1 0 0,0 0 0,-1-1 0,0 0 0,0 1 0,0-1 0,0 0 0,-1-1 0,4-5 0,2-15 0,-5 15 0,1 0 0,-1 0 0,2 0 0,7-13 0,-11 22 0,-1 0 0,1-1 0,0 1 0,0 0 0,0 0 0,-1 0 0,1 0 0,1 0 0,-1 0 0,0 0 0,0 1 0,0-1 0,0 0 0,0 1 0,1-1 0,-1 0 0,0 1 0,1 0 0,-1-1 0,0 1 0,1 0 0,-1-1 0,0 1 0,1 0 0,-1 0 0,1 0 0,-1 0 0,0 1 0,1-1 0,-1 0 0,1 1 0,-1-1 0,0 0 0,0 1 0,1 0 0,-1-1 0,0 1 0,0 0 0,2 1 0,2 3 0,-1-1 0,-1 1 0,1 0 0,-1 1 0,0-1 0,0 0 0,0 1 0,-1 0 0,1-1 0,-2 1 0,1 0 0,1 7 0,10 26 0,-9-31 0,1 0 0,0 0 0,0-1 0,1 0 0,0 0 0,1 0 0,-1 0 0,1-1 0,1-1 0,-1 1 0,1-1 0,12 7 0,-7-6 0,-1 0 0,1-1 0,0 0 0,0-1 0,0-1 0,1 0 0,24 2 0,-34-5 0,0 0 0,0 0 0,0-1 0,0 0 0,0 0 0,-1 0 0,1 0 0,0 0 0,0-1 0,-1 0 0,1 0 0,-1 0 0,5-3 0,43-41 0,-9 8 0,9 4 0,2 3 0,1 2 0,66-25 0,-98 46 0,1 2 0,0 1 0,0 0 0,0 2 0,43-1 0,26-3 0,-55 3 0,37 2 0,11-1 0,-73 0 0,-15-2 0,-21-2 0,-2 3 0,0 2 0,-1 1 0,1 1 0,0 1 0,0 1 0,0 2 0,0 0 0,1 2 0,-1 0 0,1 2 0,-41 19 0,61-24 0,-1 0 0,1-1 0,-1 1 0,0-1 0,0 0 0,0-1 0,-1 0 0,1 0 0,0 0 0,0-1 0,0 1 0,-1-2 0,1 1 0,0-1 0,0 0 0,-1 0 0,1 0 0,0-1 0,0 0 0,0 0 0,1-1 0,-1 1 0,1-1 0,-1-1 0,1 1 0,0-1 0,-7-6 0,5 4 0,0 0 0,-1 0 0,0 0 0,0 1 0,0 0 0,-1 1 0,0 0 0,1 0 0,-2 1 0,1 0 0,0 0 0,-1 1 0,1 0 0,-1 1 0,1 0 0,-16 1 0,2 1 0,1 0 0,0 2 0,0 0 0,0 1 0,-35 13 0,32-9 0,17-6 0,-1 0 0,0 1 0,1 0 0,0 1 0,0-1 0,0 2 0,0-1 0,0 1 0,1 0 0,0 1 0,0 0 0,-9 10 0,-2 9 0,1 1 0,1 0 0,1 2 0,-21 53 0,-129 245 0,132-268 0,-71 116 0,88-149 0,15-23 0,-1-1 0,1 1 0,0 0 0,0 0 0,0 0 0,0 0 0,1 0 0,-1 1 0,0-1 0,1 0 0,-1 0 0,1 0 0,0 1 0,0-1 0,0 0 0,0 3 0,1-4 0,-1-1 0,0 1 0,0 0 0,1-1 0,-1 1 0,0-1 0,1 1 0,-1-1 0,0 0 0,1 1 0,-1-1 0,1 1 0,-1-1 0,1 0 0,-1 1 0,1-1 0,-1 0 0,1 1 0,0-1 0,-1 0 0,2 1 0,21-3 0,-11-2 0,0-1 0,0 0 0,-1-1 0,0 0 0,0 0 0,0-1 0,18-17 0,61-66 0,-65 58 0,-2 0 0,-1-2 0,23-46 0,10-16 0,-16 26 0,-26 45 0,1 1 0,27-37 0,-39 58 0,1 0 0,-1 1 0,0-1 0,1 1 0,-1 0 0,1-1 0,0 1 0,0 1 0,0-1 0,0 0 0,0 1 0,0-1 0,0 1 0,1 0 0,-1 0 0,0 1 0,1-1 0,-1 0 0,0 1 0,1 0 0,-1 0 0,1 0 0,-1 0 0,0 1 0,1-1 0,-1 1 0,1 0 0,-1 0 0,0 0 0,0 0 0,0 1 0,0-1 0,0 1 0,0 0 0,0 0 0,0 0 0,0 0 0,-1 0 0,1 1 0,-1-1 0,0 1 0,0 0 0,0-1 0,0 1 0,0 0 0,-1 0 0,1 0 0,-1 1 0,0-1 0,1 0 0,0 7 0,1 35 0,-1 1 0,-8 77 0,5-120 0,0 10 0,-1 1 0,-1-1 0,0 0 0,-1 0 0,0-1 0,-1 1 0,0-1 0,-1 0 0,0 0 0,-1-1 0,-12 15 0,13-17 0,1-1 0,0 0 0,1 1 0,0 0 0,0 0 0,1 1 0,0-1 0,1 1 0,0-1 0,-2 18 0,4-27 0,0 0 0,0 0 0,0 0 0,0 1 0,0-1 0,0 0 0,0 0 0,0 0 0,0 0 0,0 0 0,0 0 0,0 0 0,0 1 0,0-1 0,0 0 0,0 0 0,0 0 0,0 0 0,0 0 0,0 0 0,0 0 0,0 0 0,0 1 0,0-1 0,0 0 0,0 0 0,0 0 0,0 0 0,0 0 0,0 0 0,0 0 0,1 0 0,-1 0 0,0 1 0,0-1 0,0 0 0,0 0 0,0 0 0,0 0 0,0 0 0,0 0 0,0 0 0,1 0 0,-1 0 0,0 0 0,0 0 0,0 0 0,0 0 0,0 0 0,0 0 0,0 0 0,1 0 0,-1 0 0,0 0 0,0 0 0,0 0 0,0 0 0,0 0 0,0 0 0,0 0 0,0 0 0,1 0 0,-1 0 0,7-9 0,7-14 0,41-109 0,31-60 0,-60 137 0,10-19 0,-31 66 0,-1 1 0,1 0 0,0 0 0,1 0 0,0 1 0,12-11 0,-18 16 0,1 0 0,0 0 0,0 1 0,-1-1 0,1 1 0,0-1 0,0 1 0,0-1 0,0 1 0,0-1 0,0 1 0,0 0 0,0 0 0,0-1 0,0 1 0,0 0 0,0 0 0,0 0 0,0 0 0,0 0 0,0 0 0,0 0 0,0 1 0,0-1 0,0 0 0,0 1 0,0-1 0,0 0 0,0 1 0,1 0 0,0 1 0,0 0 0,0 0 0,0 1 0,-1-1 0,1 0 0,-1 1 0,1-1 0,-1 1 0,0-1 0,0 1 0,1 3 0,2 9 0,0 0 0,2 31 0,-3 36 0,-15 161 0,1-81 0,14-131 0,1-27 0,1-19 0,4-49 0,-6 43 0,0-1 0,1 0 0,1 1 0,0 0 0,2 0 0,1 1 0,11-23 0,-3 18 0,1 0 0,39-44 0,-46 56 0,-6 9 0,-1-1 0,1 1 0,0-1 0,0 1 0,0 0 0,6-4 0,-9 8 0,0-1 0,0 1 0,0 0 0,0-1 0,0 1 0,0 0 0,0 0 0,0-1 0,0 1 0,0 0 0,0 0 0,0 0 0,0 0 0,0 1 0,0-1 0,0 0 0,0 0 0,0 1 0,0-1 0,0 0 0,0 1 0,0-1 0,0 1 0,0-1 0,0 1 0,-1-1 0,1 1 0,0 0 0,0 0 0,-1-1 0,1 1 0,0 0 0,-1 0 0,1 0 0,-1 0 0,1-1 0,-1 1 0,1 0 0,-1 0 0,0 0 0,1 2 0,6 19 0,0-1 0,-2 2 0,0-1 0,-1 0 0,0 43 0,-3 54 0</inkml:trace>
-</inkml:ink>
-</file>
-
-<file path=ppt/ink/ink2.xml><?xml version="1.0" encoding="utf-8"?>
-<inkml:ink xmlns:inkml="http://www.w3.org/2003/InkML">
-  <inkml:definitions>
-    <inkml:context xml:id="ctx0">
-      <inkml:inkSource xml:id="inkSrc0">
-        <inkml:traceFormat>
-          <inkml:channel name="X" type="integer" min="-2.14748E9" max="2.14748E9" units="cm"/>
-          <inkml:channel name="Y" type="integer" min="-2.14748E9" max="2.14748E9" units="cm"/>
-          <inkml:channel name="F" type="integer" max="32767" units="dev"/>
-        </inkml:traceFormat>
-        <inkml:channelProperties>
-          <inkml:channelProperty channel="X" name="resolution" value="1000" units="1/cm"/>
-          <inkml:channelProperty channel="Y" name="resolution" value="1000" units="1/cm"/>
-          <inkml:channelProperty channel="F" name="resolution" value="0" units="1/dev"/>
-        </inkml:channelProperties>
-      </inkml:inkSource>
-      <inkml:timestamp xml:id="ts0" timeString="2025-08-20T15:54:58.644"/>
-    </inkml:context>
-    <inkml:brush xml:id="br0">
-      <inkml:brushProperty name="width" value="0.35" units="cm"/>
-      <inkml:brushProperty name="height" value="0.35" units="cm"/>
-      <inkml:brushProperty name="color" value="#FFFFFF"/>
-    </inkml:brush>
-  </inkml:definitions>
-  <inkml:trace contextRef="#ctx0" brushRef="#br0">1 0 24575,'50'2'0,"58"11"0,47 1 0,-132-12 0,0 0 0,31 8 0,-30-5 0,48 4 0,-32-6 0,41 8 0,-43-5 0,57 2 0,-85-7 0,1-1 0,-1-1 0,1 0 0,-1 0 0,1-1 0,-1 0 0,0-1 0,0 0 0,0-1 0,17-8 0,-13 5 0,-1 2 0,1 0 0,1 0 0,-1 1 0,1 1 0,-1 1 0,1 0 0,0 1 0,0 0 0,26 3 0,-13 1 0,0 1 0,-1 1 0,1 2 0,45 17 0,-40-14 291,-25-8-622,0 1 0,0-1-1,0 2 1,10 4 0</inkml:trace>
-</inkml:ink>
-</file>
-
 <file path=ppt/notesMasters/notesMaster1.xml><?xml version="1.0" encoding="utf-8"?>
 <p:notesMaster xmlns:a="http://schemas.openxmlformats.org/drawingml/2006/main" xmlns:r="http://schemas.openxmlformats.org/officeDocument/2006/relationships" xmlns:p="http://schemas.openxmlformats.org/presentationml/2006/main">
   <p:cSld>
@@ -278,7 +222,7 @@
           <a:p>
             <a:fld id="{42668431-CD35-4516-818D-B41B2C4843CF}" type="datetimeFigureOut">
               <a:rPr lang="en-IN" smtClean="0"/>
-              <a:t>27-03-2026</a:t>
+              <a:t>07-04-2026</a:t>
             </a:fld>
             <a:endParaRPr lang="en-IN"/>
           </a:p>
@@ -642,7 +586,7 @@
         <p:cNvPr id="1" name="">
           <a:extLst>
             <a:ext uri="{FF2B5EF4-FFF2-40B4-BE49-F238E27FC236}">
-              <a16:creationId xmlns="" xmlns:a16="http://schemas.microsoft.com/office/drawing/2014/main" id="{F5EA6B61-674B-0ABF-F5C3-A72BF2845D1A}"/>
+              <a16:creationId xmlns:a16="http://schemas.microsoft.com/office/drawing/2014/main" id="{F5EA6B61-674B-0ABF-F5C3-A72BF2845D1A}"/>
             </a:ext>
           </a:extLst>
         </p:cNvPr>
@@ -662,7 +606,7 @@
           <p:cNvPr id="2" name="Slide Image Placeholder 1">
             <a:extLst>
               <a:ext uri="{FF2B5EF4-FFF2-40B4-BE49-F238E27FC236}">
-                <a16:creationId xmlns="" xmlns:a16="http://schemas.microsoft.com/office/drawing/2014/main" id="{F22FBED0-DE41-A040-921A-D95B51852C43}"/>
+                <a16:creationId xmlns:a16="http://schemas.microsoft.com/office/drawing/2014/main" id="{F22FBED0-DE41-A040-921A-D95B51852C43}"/>
               </a:ext>
             </a:extLst>
           </p:cNvPr>
@@ -680,7 +624,7 @@
           <p:cNvPr id="3" name="Notes Placeholder 2">
             <a:extLst>
               <a:ext uri="{FF2B5EF4-FFF2-40B4-BE49-F238E27FC236}">
-                <a16:creationId xmlns="" xmlns:a16="http://schemas.microsoft.com/office/drawing/2014/main" id="{6BB3F754-664A-ECDE-8199-65800D976329}"/>
+                <a16:creationId xmlns:a16="http://schemas.microsoft.com/office/drawing/2014/main" id="{6BB3F754-664A-ECDE-8199-65800D976329}"/>
               </a:ext>
             </a:extLst>
           </p:cNvPr>
@@ -709,7 +653,7 @@
           <p:cNvPr id="4" name="Slide Number Placeholder 3">
             <a:extLst>
               <a:ext uri="{FF2B5EF4-FFF2-40B4-BE49-F238E27FC236}">
-                <a16:creationId xmlns="" xmlns:a16="http://schemas.microsoft.com/office/drawing/2014/main" id="{BCAF3E54-5ADF-52CC-11B5-B7F7837DEE42}"/>
+                <a16:creationId xmlns:a16="http://schemas.microsoft.com/office/drawing/2014/main" id="{BCAF3E54-5ADF-52CC-11B5-B7F7837DEE42}"/>
               </a:ext>
             </a:extLst>
           </p:cNvPr>
@@ -1282,7 +1226,7 @@
         <p:cNvPr id="1" name="">
           <a:extLst>
             <a:ext uri="{FF2B5EF4-FFF2-40B4-BE49-F238E27FC236}">
-              <a16:creationId xmlns="" xmlns:a16="http://schemas.microsoft.com/office/drawing/2014/main" id="{A193BE92-2836-2377-AC03-A2DE9BD92B00}"/>
+              <a16:creationId xmlns:a16="http://schemas.microsoft.com/office/drawing/2014/main" id="{A193BE92-2836-2377-AC03-A2DE9BD92B00}"/>
             </a:ext>
           </a:extLst>
         </p:cNvPr>
@@ -1302,7 +1246,7 @@
           <p:cNvPr id="2" name="Slide Image Placeholder 1">
             <a:extLst>
               <a:ext uri="{FF2B5EF4-FFF2-40B4-BE49-F238E27FC236}">
-                <a16:creationId xmlns="" xmlns:a16="http://schemas.microsoft.com/office/drawing/2014/main" id="{49BC9794-528F-622F-43DD-4480761AC265}"/>
+                <a16:creationId xmlns:a16="http://schemas.microsoft.com/office/drawing/2014/main" id="{49BC9794-528F-622F-43DD-4480761AC265}"/>
               </a:ext>
             </a:extLst>
           </p:cNvPr>
@@ -1320,7 +1264,7 @@
           <p:cNvPr id="3" name="Notes Placeholder 2">
             <a:extLst>
               <a:ext uri="{FF2B5EF4-FFF2-40B4-BE49-F238E27FC236}">
-                <a16:creationId xmlns="" xmlns:a16="http://schemas.microsoft.com/office/drawing/2014/main" id="{030C919C-92B7-D9DB-548B-F07A4AA3A29C}"/>
+                <a16:creationId xmlns:a16="http://schemas.microsoft.com/office/drawing/2014/main" id="{030C919C-92B7-D9DB-548B-F07A4AA3A29C}"/>
               </a:ext>
             </a:extLst>
           </p:cNvPr>
@@ -1349,7 +1293,7 @@
           <p:cNvPr id="4" name="Slide Number Placeholder 3">
             <a:extLst>
               <a:ext uri="{FF2B5EF4-FFF2-40B4-BE49-F238E27FC236}">
-                <a16:creationId xmlns="" xmlns:a16="http://schemas.microsoft.com/office/drawing/2014/main" id="{13746616-91E6-EEB7-1856-D004D3BB5C8A}"/>
+                <a16:creationId xmlns:a16="http://schemas.microsoft.com/office/drawing/2014/main" id="{13746616-91E6-EEB7-1856-D004D3BB5C8A}"/>
               </a:ext>
             </a:extLst>
           </p:cNvPr>
@@ -1394,7 +1338,7 @@
         <p:cNvPr id="1" name="">
           <a:extLst>
             <a:ext uri="{FF2B5EF4-FFF2-40B4-BE49-F238E27FC236}">
-              <a16:creationId xmlns="" xmlns:a16="http://schemas.microsoft.com/office/drawing/2014/main" id="{212EE8AE-6B96-A0B7-5B01-1E66F70918F4}"/>
+              <a16:creationId xmlns:a16="http://schemas.microsoft.com/office/drawing/2014/main" id="{212EE8AE-6B96-A0B7-5B01-1E66F70918F4}"/>
             </a:ext>
           </a:extLst>
         </p:cNvPr>
@@ -1414,7 +1358,7 @@
           <p:cNvPr id="2" name="Slide Image Placeholder 1">
             <a:extLst>
               <a:ext uri="{FF2B5EF4-FFF2-40B4-BE49-F238E27FC236}">
-                <a16:creationId xmlns="" xmlns:a16="http://schemas.microsoft.com/office/drawing/2014/main" id="{196B1102-F4C9-B3F6-1EBC-67E21A0E1FA1}"/>
+                <a16:creationId xmlns:a16="http://schemas.microsoft.com/office/drawing/2014/main" id="{196B1102-F4C9-B3F6-1EBC-67E21A0E1FA1}"/>
               </a:ext>
             </a:extLst>
           </p:cNvPr>
@@ -1432,7 +1376,7 @@
           <p:cNvPr id="3" name="Notes Placeholder 2">
             <a:extLst>
               <a:ext uri="{FF2B5EF4-FFF2-40B4-BE49-F238E27FC236}">
-                <a16:creationId xmlns="" xmlns:a16="http://schemas.microsoft.com/office/drawing/2014/main" id="{48509EEB-322A-5BF0-4BAB-89D92C041C1E}"/>
+                <a16:creationId xmlns:a16="http://schemas.microsoft.com/office/drawing/2014/main" id="{48509EEB-322A-5BF0-4BAB-89D92C041C1E}"/>
               </a:ext>
             </a:extLst>
           </p:cNvPr>
@@ -1461,7 +1405,7 @@
           <p:cNvPr id="4" name="Slide Number Placeholder 3">
             <a:extLst>
               <a:ext uri="{FF2B5EF4-FFF2-40B4-BE49-F238E27FC236}">
-                <a16:creationId xmlns="" xmlns:a16="http://schemas.microsoft.com/office/drawing/2014/main" id="{160D25FF-334B-A586-E002-BDB8BEB75D2B}"/>
+                <a16:creationId xmlns:a16="http://schemas.microsoft.com/office/drawing/2014/main" id="{160D25FF-334B-A586-E002-BDB8BEB75D2B}"/>
               </a:ext>
             </a:extLst>
           </p:cNvPr>
@@ -1682,7 +1626,7 @@
         <p:cNvPr id="1" name="">
           <a:extLst>
             <a:ext uri="{FF2B5EF4-FFF2-40B4-BE49-F238E27FC236}">
-              <a16:creationId xmlns="" xmlns:a16="http://schemas.microsoft.com/office/drawing/2014/main" id="{DCAA661C-EE8E-4550-79FC-6D2DE6283726}"/>
+              <a16:creationId xmlns:a16="http://schemas.microsoft.com/office/drawing/2014/main" id="{A72ACE8C-0EE5-5AE5-AE9B-14880806E690}"/>
             </a:ext>
           </a:extLst>
         </p:cNvPr>
@@ -1702,7 +1646,7 @@
           <p:cNvPr id="2" name="Slide Image Placeholder 1">
             <a:extLst>
               <a:ext uri="{FF2B5EF4-FFF2-40B4-BE49-F238E27FC236}">
-                <a16:creationId xmlns="" xmlns:a16="http://schemas.microsoft.com/office/drawing/2014/main" id="{08A3BE65-ABC2-C31E-F7BF-5074E255AABC}"/>
+                <a16:creationId xmlns:a16="http://schemas.microsoft.com/office/drawing/2014/main" id="{6062300A-38F6-0C77-671F-D4F3A19F1789}"/>
               </a:ext>
             </a:extLst>
           </p:cNvPr>
@@ -1720,7 +1664,7 @@
           <p:cNvPr id="3" name="Notes Placeholder 2">
             <a:extLst>
               <a:ext uri="{FF2B5EF4-FFF2-40B4-BE49-F238E27FC236}">
-                <a16:creationId xmlns="" xmlns:a16="http://schemas.microsoft.com/office/drawing/2014/main" id="{E1E0FA71-42DC-F866-0B0B-A1E7E3AEB701}"/>
+                <a16:creationId xmlns:a16="http://schemas.microsoft.com/office/drawing/2014/main" id="{6ED1F04E-EEF4-9FCA-6709-A6B30B43FAA4}"/>
               </a:ext>
             </a:extLst>
           </p:cNvPr>
@@ -1749,7 +1693,7 @@
           <p:cNvPr id="4" name="Slide Number Placeholder 3">
             <a:extLst>
               <a:ext uri="{FF2B5EF4-FFF2-40B4-BE49-F238E27FC236}">
-                <a16:creationId xmlns="" xmlns:a16="http://schemas.microsoft.com/office/drawing/2014/main" id="{4A24EB81-AFC1-22F2-9431-A4C105BD9B2A}"/>
+                <a16:creationId xmlns:a16="http://schemas.microsoft.com/office/drawing/2014/main" id="{958FB6BD-2B13-1DF9-8DDC-D28A6A90EB42}"/>
               </a:ext>
             </a:extLst>
           </p:cNvPr>
@@ -1776,7 +1720,7 @@
     </p:spTree>
     <p:extLst>
       <p:ext uri="{BB962C8B-B14F-4D97-AF65-F5344CB8AC3E}">
-        <p14:creationId xmlns:p14="http://schemas.microsoft.com/office/powerpoint/2010/main" val="793938371"/>
+        <p14:creationId xmlns:p14="http://schemas.microsoft.com/office/powerpoint/2010/main" val="3010799135"/>
       </p:ext>
     </p:extLst>
   </p:cSld>
@@ -1967,7 +1911,7 @@
           <a:p>
             <a:fld id="{F4AA89A1-F17A-4D3D-AC08-D16056C16514}" type="datetimeFigureOut">
               <a:rPr lang="en-IN" smtClean="0"/>
-              <a:t>27-03-2026</a:t>
+              <a:t>07-04-2026</a:t>
             </a:fld>
             <a:endParaRPr lang="en-IN"/>
           </a:p>
@@ -2137,7 +2081,7 @@
           <a:p>
             <a:fld id="{F4AA89A1-F17A-4D3D-AC08-D16056C16514}" type="datetimeFigureOut">
               <a:rPr lang="en-IN" smtClean="0"/>
-              <a:t>27-03-2026</a:t>
+              <a:t>07-04-2026</a:t>
             </a:fld>
             <a:endParaRPr lang="en-IN"/>
           </a:p>
@@ -2317,7 +2261,7 @@
           <a:p>
             <a:fld id="{F4AA89A1-F17A-4D3D-AC08-D16056C16514}" type="datetimeFigureOut">
               <a:rPr lang="en-IN" smtClean="0"/>
-              <a:t>27-03-2026</a:t>
+              <a:t>07-04-2026</a:t>
             </a:fld>
             <a:endParaRPr lang="en-IN"/>
           </a:p>
@@ -2487,7 +2431,7 @@
           <a:p>
             <a:fld id="{F4AA89A1-F17A-4D3D-AC08-D16056C16514}" type="datetimeFigureOut">
               <a:rPr lang="en-IN" smtClean="0"/>
-              <a:t>27-03-2026</a:t>
+              <a:t>07-04-2026</a:t>
             </a:fld>
             <a:endParaRPr lang="en-IN"/>
           </a:p>
@@ -2733,7 +2677,7 @@
           <a:p>
             <a:fld id="{F4AA89A1-F17A-4D3D-AC08-D16056C16514}" type="datetimeFigureOut">
               <a:rPr lang="en-IN" smtClean="0"/>
-              <a:t>27-03-2026</a:t>
+              <a:t>07-04-2026</a:t>
             </a:fld>
             <a:endParaRPr lang="en-IN"/>
           </a:p>
@@ -3021,7 +2965,7 @@
           <a:p>
             <a:fld id="{F4AA89A1-F17A-4D3D-AC08-D16056C16514}" type="datetimeFigureOut">
               <a:rPr lang="en-IN" smtClean="0"/>
-              <a:t>27-03-2026</a:t>
+              <a:t>07-04-2026</a:t>
             </a:fld>
             <a:endParaRPr lang="en-IN"/>
           </a:p>
@@ -3443,7 +3387,7 @@
           <a:p>
             <a:fld id="{F4AA89A1-F17A-4D3D-AC08-D16056C16514}" type="datetimeFigureOut">
               <a:rPr lang="en-IN" smtClean="0"/>
-              <a:t>27-03-2026</a:t>
+              <a:t>07-04-2026</a:t>
             </a:fld>
             <a:endParaRPr lang="en-IN"/>
           </a:p>
@@ -3561,7 +3505,7 @@
           <a:p>
             <a:fld id="{F4AA89A1-F17A-4D3D-AC08-D16056C16514}" type="datetimeFigureOut">
               <a:rPr lang="en-IN" smtClean="0"/>
-              <a:t>27-03-2026</a:t>
+              <a:t>07-04-2026</a:t>
             </a:fld>
             <a:endParaRPr lang="en-IN"/>
           </a:p>
@@ -3656,7 +3600,7 @@
           <a:p>
             <a:fld id="{F4AA89A1-F17A-4D3D-AC08-D16056C16514}" type="datetimeFigureOut">
               <a:rPr lang="en-IN" smtClean="0"/>
-              <a:t>27-03-2026</a:t>
+              <a:t>07-04-2026</a:t>
             </a:fld>
             <a:endParaRPr lang="en-IN"/>
           </a:p>
@@ -3933,7 +3877,7 @@
           <a:p>
             <a:fld id="{F4AA89A1-F17A-4D3D-AC08-D16056C16514}" type="datetimeFigureOut">
               <a:rPr lang="en-IN" smtClean="0"/>
-              <a:t>27-03-2026</a:t>
+              <a:t>07-04-2026</a:t>
             </a:fld>
             <a:endParaRPr lang="en-IN"/>
           </a:p>
@@ -4186,7 +4130,7 @@
           <a:p>
             <a:fld id="{F4AA89A1-F17A-4D3D-AC08-D16056C16514}" type="datetimeFigureOut">
               <a:rPr lang="en-IN" smtClean="0"/>
-              <a:t>27-03-2026</a:t>
+              <a:t>07-04-2026</a:t>
             </a:fld>
             <a:endParaRPr lang="en-IN"/>
           </a:p>
@@ -4399,7 +4343,7 @@
           <a:p>
             <a:fld id="{F4AA89A1-F17A-4D3D-AC08-D16056C16514}" type="datetimeFigureOut">
               <a:rPr lang="en-IN" smtClean="0"/>
-              <a:t>27-03-2026</a:t>
+              <a:t>07-04-2026</a:t>
             </a:fld>
             <a:endParaRPr lang="en-IN"/>
           </a:p>
@@ -4817,7 +4761,7 @@
         <p:cNvPr id="1" name="">
           <a:extLst>
             <a:ext uri="{FF2B5EF4-FFF2-40B4-BE49-F238E27FC236}">
-              <a16:creationId xmlns="" xmlns:a16="http://schemas.microsoft.com/office/drawing/2014/main" id="{C82CBE56-1D41-7167-8FFB-A09C6DDBB472}"/>
+              <a16:creationId xmlns:a16="http://schemas.microsoft.com/office/drawing/2014/main" id="{EBD5E7EB-ED71-7BBC-DF56-E99F1ED0E8CF}"/>
             </a:ext>
           </a:extLst>
         </p:cNvPr>
@@ -4832,47 +4776,12 @@
           <a:chExt cx="0" cy="0"/>
         </a:xfrm>
       </p:grpSpPr>
-      <p:pic>
-        <p:nvPicPr>
-          <p:cNvPr id="4" name="Content Placeholder 3">
-            <a:extLst>
-              <a:ext uri="{FF2B5EF4-FFF2-40B4-BE49-F238E27FC236}">
-                <a16:creationId xmlns="" xmlns:a16="http://schemas.microsoft.com/office/drawing/2014/main" id="{AFB3A7BE-7862-048E-951C-86CFD388A532}"/>
-              </a:ext>
-            </a:extLst>
-          </p:cNvPr>
-          <p:cNvPicPr>
-            <a:picLocks noGrp="1" noChangeAspect="1"/>
-          </p:cNvPicPr>
-          <p:nvPr>
-            <p:ph idx="1"/>
-          </p:nvPr>
-        </p:nvPicPr>
-        <p:blipFill>
-          <a:blip r:embed="rId3" cstate="print">
-            <a:extLst>
-              <a:ext uri="{28A0092B-C50C-407E-A947-70E740481C1C}">
-                <a14:useLocalDpi xmlns:a14="http://schemas.microsoft.com/office/drawing/2010/main" val="0"/>
-              </a:ext>
-            </a:extLst>
-          </a:blip>
-          <a:stretch>
-            <a:fillRect/>
-          </a:stretch>
-        </p:blipFill>
-        <p:spPr>
-          <a:xfrm>
-            <a:off x="1" y="0"/>
-            <a:ext cx="9180512" cy="6885384"/>
-          </a:xfrm>
-        </p:spPr>
-      </p:pic>
       <p:sp>
         <p:nvSpPr>
           <p:cNvPr id="5" name="Rectangle 1">
             <a:extLst>
               <a:ext uri="{FF2B5EF4-FFF2-40B4-BE49-F238E27FC236}">
-                <a16:creationId xmlns="" xmlns:a16="http://schemas.microsoft.com/office/drawing/2014/main" id="{BF1F4E46-D933-954B-D887-0C743D7A6222}"/>
+                <a16:creationId xmlns:a16="http://schemas.microsoft.com/office/drawing/2014/main" id="{3626B959-665F-F5D3-A7C6-0161BCA75267}"/>
               </a:ext>
             </a:extLst>
           </p:cNvPr>
@@ -4883,8 +4792,8 @@
         </p:nvSpPr>
         <p:spPr bwMode="auto">
           <a:xfrm>
-            <a:off x="177133" y="100424"/>
-            <a:ext cx="8280920" cy="1077218"/>
+            <a:off x="177133" y="346645"/>
+            <a:ext cx="8280920" cy="584775"/>
           </a:xfrm>
           <a:prstGeom prst="rect">
             <a:avLst/>
@@ -4942,7 +4851,7 @@
                 <a:ea typeface="Times New Roman" panose="02020603050405020304" pitchFamily="18" charset="0"/>
                 <a:cs typeface="Times New Roman" panose="02020603050405020304" pitchFamily="18" charset="0"/>
               </a:rPr>
-              <a:t>Prototype/Project Flow diagram/Architecture</a:t>
+              <a:t>Technical Architecture</a:t>
             </a:r>
             <a:endParaRPr lang="en-IN" sz="3200" b="1" dirty="0">
               <a:solidFill>
@@ -4959,7 +4868,7 @@
           <p:cNvPr id="7" name="Straight Connector 6">
             <a:extLst>
               <a:ext uri="{FF2B5EF4-FFF2-40B4-BE49-F238E27FC236}">
-                <a16:creationId xmlns="" xmlns:a16="http://schemas.microsoft.com/office/drawing/2014/main" id="{DF222086-A20A-7049-0744-A17C1E596D3B}"/>
+                <a16:creationId xmlns:a16="http://schemas.microsoft.com/office/drawing/2014/main" id="{0E8022C3-A95A-36B0-DCA1-037BCB37C7F7}"/>
               </a:ext>
             </a:extLst>
           </p:cNvPr>
@@ -5000,7 +4909,7 @@
           <p:cNvPr id="9" name="Picture 8">
             <a:extLst>
               <a:ext uri="{FF2B5EF4-FFF2-40B4-BE49-F238E27FC236}">
-                <a16:creationId xmlns="" xmlns:a16="http://schemas.microsoft.com/office/drawing/2014/main" id="{3926CD72-25A6-86DC-34B2-F6A291749F32}"/>
+                <a16:creationId xmlns:a16="http://schemas.microsoft.com/office/drawing/2014/main" id="{88DB0697-2A7A-7345-38B9-CCA6B597FB40}"/>
               </a:ext>
             </a:extLst>
           </p:cNvPr>
@@ -5010,7 +4919,7 @@
           <p:nvPr/>
         </p:nvPicPr>
         <p:blipFill>
-          <a:blip r:embed="rId4" cstate="print">
+          <a:blip r:embed="rId3" cstate="print">
             <a:extLst>
               <a:ext uri="{28A0092B-C50C-407E-A947-70E740481C1C}">
                 <a14:useLocalDpi xmlns:a14="http://schemas.microsoft.com/office/drawing/2010/main" val="0"/>
@@ -5031,139 +4940,40 @@
           </a:prstGeom>
         </p:spPr>
       </p:pic>
-      <p:sp>
-        <p:nvSpPr>
-          <p:cNvPr id="6" name="TextBox 5">
+      <p:pic>
+        <p:nvPicPr>
+          <p:cNvPr id="6" name="Picture 5">
             <a:extLst>
               <a:ext uri="{FF2B5EF4-FFF2-40B4-BE49-F238E27FC236}">
-                <a16:creationId xmlns="" xmlns:a16="http://schemas.microsoft.com/office/drawing/2014/main" id="{D4D0BEBF-445B-BE7B-3FF6-A71A2B587371}"/>
+                <a16:creationId xmlns:a16="http://schemas.microsoft.com/office/drawing/2014/main" id="{9C9D6448-97F2-5678-479A-E306B7218148}"/>
               </a:ext>
             </a:extLst>
           </p:cNvPr>
-          <p:cNvSpPr txBox="1"/>
+          <p:cNvPicPr>
+            <a:picLocks noChangeAspect="1"/>
+          </p:cNvPicPr>
           <p:nvPr/>
-        </p:nvSpPr>
+        </p:nvPicPr>
+        <p:blipFill>
+          <a:blip r:embed="rId4"/>
+          <a:stretch>
+            <a:fillRect/>
+          </a:stretch>
+        </p:blipFill>
         <p:spPr>
           <a:xfrm>
-            <a:off x="179512" y="1293834"/>
-            <a:ext cx="8784976" cy="372794"/>
+            <a:off x="1169671" y="1191477"/>
+            <a:ext cx="7308304" cy="4751674"/>
           </a:xfrm>
           <a:prstGeom prst="rect">
             <a:avLst/>
           </a:prstGeom>
-          <a:noFill/>
         </p:spPr>
-        <p:txBody>
-          <a:bodyPr wrap="square">
-            <a:spAutoFit/>
-          </a:bodyPr>
-          <a:lstStyle/>
-          <a:p>
-            <a:pPr marL="0" marR="0" algn="just" fontAlgn="base">
-              <a:lnSpc>
-                <a:spcPct val="107000"/>
-              </a:lnSpc>
-              <a:spcBef>
-                <a:spcPts val="0"/>
-              </a:spcBef>
-              <a:spcAft>
-                <a:spcPts val="0"/>
-              </a:spcAft>
-            </a:pPr>
-            <a:r>
-              <a:rPr lang="en-US" sz="1800" kern="100" dirty="0">
-                <a:solidFill>
-                  <a:srgbClr val="000000"/>
-                </a:solidFill>
-                <a:effectLst/>
-                <a:latin typeface="Verdana" panose="020B0604030504040204" pitchFamily="34" charset="0"/>
-                <a:ea typeface="Times New Roman" panose="02020603050405020304" pitchFamily="18" charset="0"/>
-                <a:cs typeface="Times New Roman" panose="02020603050405020304" pitchFamily="18" charset="0"/>
-              </a:rPr>
-              <a:t> </a:t>
-            </a:r>
-            <a:endParaRPr lang="en-US" sz="2800" kern="100" dirty="0">
-              <a:effectLst/>
-              <a:latin typeface="+mj-lt"/>
-              <a:ea typeface="Calibri" panose="020F0502020204030204" pitchFamily="34" charset="0"/>
-              <a:cs typeface="Times New Roman" panose="02020603050405020304" pitchFamily="18" charset="0"/>
-            </a:endParaRPr>
-          </a:p>
-        </p:txBody>
-      </p:sp>
-      <p:sp>
-        <p:nvSpPr>
-          <p:cNvPr id="8" name="Rectangle 1">
-            <a:extLst>
-              <a:ext uri="{FF2B5EF4-FFF2-40B4-BE49-F238E27FC236}">
-                <a16:creationId xmlns="" xmlns:a16="http://schemas.microsoft.com/office/drawing/2014/main" id="{FC27A688-8646-DB1F-FAA1-AE2FA9844252}"/>
-              </a:ext>
-            </a:extLst>
-          </p:cNvPr>
-          <p:cNvSpPr>
-            <a:spLocks noChangeArrowheads="1"/>
-          </p:cNvSpPr>
-          <p:nvPr/>
-        </p:nvSpPr>
-        <p:spPr bwMode="auto">
-          <a:xfrm>
-            <a:off x="0" y="0"/>
-            <a:ext cx="9144000" cy="0"/>
-          </a:xfrm>
-          <a:prstGeom prst="rect">
-            <a:avLst/>
-          </a:prstGeom>
-          <a:noFill/>
-          <a:ln>
-            <a:noFill/>
-          </a:ln>
-          <a:effectLst/>
-          <a:extLst>
-            <a:ext uri="{909E8E84-426E-40DD-AFC4-6F175D3DCCD1}">
-              <a14:hiddenFill xmlns:a14="http://schemas.microsoft.com/office/drawing/2010/main">
-                <a:solidFill>
-                  <a:schemeClr val="accent1"/>
-                </a:solidFill>
-              </a14:hiddenFill>
-            </a:ext>
-            <a:ext uri="{91240B29-F687-4F45-9708-019B960494DF}">
-              <a14:hiddenLine xmlns:a14="http://schemas.microsoft.com/office/drawing/2010/main" w="9525">
-                <a:solidFill>
-                  <a:schemeClr val="tx1"/>
-                </a:solidFill>
-                <a:miter lim="800000"/>
-                <a:headEnd/>
-                <a:tailEnd/>
-              </a14:hiddenLine>
-            </a:ext>
-            <a:ext uri="{AF507438-7753-43E0-B8FC-AC1667EBCBE1}">
-              <a14:hiddenEffects xmlns:a14="http://schemas.microsoft.com/office/drawing/2010/main">
-                <a:effectLst>
-                  <a:outerShdw dist="35921" dir="2700000" algn="ctr" rotWithShape="0">
-                    <a:schemeClr val="bg2"/>
-                  </a:outerShdw>
-                </a:effectLst>
-              </a14:hiddenEffects>
-            </a:ext>
-          </a:extLst>
-        </p:spPr>
-        <p:txBody>
-          <a:bodyPr vert="horz" wrap="none" lIns="91440" tIns="45720" rIns="91440" bIns="45720" numCol="1" anchor="ctr" anchorCtr="0" compatLnSpc="1">
-            <a:prstTxWarp prst="textNoShape">
-              <a:avLst/>
-            </a:prstTxWarp>
-            <a:spAutoFit/>
-          </a:bodyPr>
-          <a:lstStyle/>
-          <a:p>
-            <a:endParaRPr lang="en-IN"/>
-          </a:p>
-        </p:txBody>
-      </p:sp>
+      </p:pic>
     </p:spTree>
     <p:extLst>
       <p:ext uri="{BB962C8B-B14F-4D97-AF65-F5344CB8AC3E}">
-        <p14:creationId xmlns:p14="http://schemas.microsoft.com/office/powerpoint/2010/main" val="292643029"/>
+        <p14:creationId xmlns:p14="http://schemas.microsoft.com/office/powerpoint/2010/main" val="1967723486"/>
       </p:ext>
     </p:extLst>
   </p:cSld>
@@ -5181,7 +4991,7 @@
         <p:cNvPr id="1" name="">
           <a:extLst>
             <a:ext uri="{FF2B5EF4-FFF2-40B4-BE49-F238E27FC236}">
-              <a16:creationId xmlns="" xmlns:a16="http://schemas.microsoft.com/office/drawing/2014/main" id="{BDBD42DB-FF71-D8E6-630F-399C60C5361D}"/>
+              <a16:creationId xmlns:a16="http://schemas.microsoft.com/office/drawing/2014/main" id="{BDBD42DB-FF71-D8E6-630F-399C60C5361D}"/>
             </a:ext>
           </a:extLst>
         </p:cNvPr>
@@ -5196,47 +5006,12 @@
           <a:chExt cx="0" cy="0"/>
         </a:xfrm>
       </p:grpSpPr>
-      <p:pic>
-        <p:nvPicPr>
-          <p:cNvPr id="4" name="Content Placeholder 3">
-            <a:extLst>
-              <a:ext uri="{FF2B5EF4-FFF2-40B4-BE49-F238E27FC236}">
-                <a16:creationId xmlns="" xmlns:a16="http://schemas.microsoft.com/office/drawing/2014/main" id="{52FB631E-E469-C80D-C58A-99E545F3785B}"/>
-              </a:ext>
-            </a:extLst>
-          </p:cNvPr>
-          <p:cNvPicPr>
-            <a:picLocks noGrp="1" noChangeAspect="1"/>
-          </p:cNvPicPr>
-          <p:nvPr>
-            <p:ph idx="1"/>
-          </p:nvPr>
-        </p:nvPicPr>
-        <p:blipFill>
-          <a:blip r:embed="rId3" cstate="print">
-            <a:extLst>
-              <a:ext uri="{28A0092B-C50C-407E-A947-70E740481C1C}">
-                <a14:useLocalDpi xmlns:a14="http://schemas.microsoft.com/office/drawing/2010/main" val="0"/>
-              </a:ext>
-            </a:extLst>
-          </a:blip>
-          <a:stretch>
-            <a:fillRect/>
-          </a:stretch>
-        </p:blipFill>
-        <p:spPr>
-          <a:xfrm>
-            <a:off x="1" y="0"/>
-            <a:ext cx="9180512" cy="6885384"/>
-          </a:xfrm>
-        </p:spPr>
-      </p:pic>
       <p:sp>
         <p:nvSpPr>
           <p:cNvPr id="5" name="Rectangle 1">
             <a:extLst>
               <a:ext uri="{FF2B5EF4-FFF2-40B4-BE49-F238E27FC236}">
-                <a16:creationId xmlns="" xmlns:a16="http://schemas.microsoft.com/office/drawing/2014/main" id="{3B6D9598-AD90-B9CA-8610-998CE22F1CA3}"/>
+                <a16:creationId xmlns:a16="http://schemas.microsoft.com/office/drawing/2014/main" id="{3B6D9598-AD90-B9CA-8610-998CE22F1CA3}"/>
               </a:ext>
             </a:extLst>
           </p:cNvPr>
@@ -5323,7 +5098,7 @@
           <p:cNvPr id="7" name="Straight Connector 6">
             <a:extLst>
               <a:ext uri="{FF2B5EF4-FFF2-40B4-BE49-F238E27FC236}">
-                <a16:creationId xmlns="" xmlns:a16="http://schemas.microsoft.com/office/drawing/2014/main" id="{1362D34C-9176-DD2A-8AAF-507BD46BD710}"/>
+                <a16:creationId xmlns:a16="http://schemas.microsoft.com/office/drawing/2014/main" id="{1362D34C-9176-DD2A-8AAF-507BD46BD710}"/>
               </a:ext>
             </a:extLst>
           </p:cNvPr>
@@ -5364,7 +5139,7 @@
           <p:cNvPr id="9" name="Picture 8">
             <a:extLst>
               <a:ext uri="{FF2B5EF4-FFF2-40B4-BE49-F238E27FC236}">
-                <a16:creationId xmlns="" xmlns:a16="http://schemas.microsoft.com/office/drawing/2014/main" id="{4066F8A4-300F-9AE0-4A5E-2A2D19A8A541}"/>
+                <a16:creationId xmlns:a16="http://schemas.microsoft.com/office/drawing/2014/main" id="{4066F8A4-300F-9AE0-4A5E-2A2D19A8A541}"/>
               </a:ext>
             </a:extLst>
           </p:cNvPr>
@@ -5374,7 +5149,7 @@
           <p:nvPr/>
         </p:nvPicPr>
         <p:blipFill>
-          <a:blip r:embed="rId4" cstate="print">
+          <a:blip r:embed="rId3" cstate="print">
             <a:extLst>
               <a:ext uri="{28A0092B-C50C-407E-A947-70E740481C1C}">
                 <a14:useLocalDpi xmlns:a14="http://schemas.microsoft.com/office/drawing/2010/main" val="0"/>
@@ -5400,7 +5175,7 @@
           <p:cNvPr id="6" name="TextBox 5">
             <a:extLst>
               <a:ext uri="{FF2B5EF4-FFF2-40B4-BE49-F238E27FC236}">
-                <a16:creationId xmlns="" xmlns:a16="http://schemas.microsoft.com/office/drawing/2014/main" id="{C166FAC4-E627-209B-D9A4-20EC84D69C44}"/>
+                <a16:creationId xmlns:a16="http://schemas.microsoft.com/office/drawing/2014/main" id="{C166FAC4-E627-209B-D9A4-20EC84D69C44}"/>
               </a:ext>
             </a:extLst>
           </p:cNvPr>
@@ -5455,61 +5230,40 @@
           </a:p>
         </p:txBody>
       </p:sp>
-      <mc:AlternateContent xmlns:mc="http://schemas.openxmlformats.org/markup-compatibility/2006" xmlns:p14="http://schemas.microsoft.com/office/powerpoint/2010/main">
-        <mc:Choice Requires="p14">
-          <p:contentPart p14:bwMode="auto" r:id="rId5">
-            <p14:nvContentPartPr>
-              <p14:cNvPr id="11" name="Ink 10">
-                <a:extLst>
-                  <a:ext uri="{FF2B5EF4-FFF2-40B4-BE49-F238E27FC236}">
-                    <a16:creationId xmlns="" xmlns:a16="http://schemas.microsoft.com/office/drawing/2014/main" id="{D3A55479-5820-9331-B8CC-0F9A13C7AC18}"/>
-                  </a:ext>
-                </a:extLst>
-              </p14:cNvPr>
-              <p14:cNvContentPartPr/>
-              <p14:nvPr/>
-            </p14:nvContentPartPr>
-            <p14:xfrm>
-              <a:off x="7203160" y="2489200"/>
-              <a:ext cx="484560" cy="34920"/>
-            </p14:xfrm>
-          </p:contentPart>
-        </mc:Choice>
-        <mc:Fallback xmlns="">
-          <p:pic>
-            <p:nvPicPr>
-              <p:cNvPr id="11" name="Ink 10">
-                <a:extLst>
-                  <a:ext uri="{FF2B5EF4-FFF2-40B4-BE49-F238E27FC236}">
-                    <a16:creationId xmlns:a16="http://schemas.microsoft.com/office/drawing/2014/main" id="{D3A55479-5820-9331-B8CC-0F9A13C7AC18}"/>
-                  </a:ext>
-                </a:extLst>
-              </p:cNvPr>
-              <p:cNvPicPr/>
-              <p:nvPr/>
-            </p:nvPicPr>
-            <p:blipFill>
-              <a:blip r:embed="rId7"/>
-              <a:stretch>
-                <a:fillRect/>
-              </a:stretch>
-            </p:blipFill>
-            <p:spPr>
-              <a:xfrm>
-                <a:off x="7140520" y="2426200"/>
-                <a:ext cx="610200" cy="160560"/>
-              </a:xfrm>
-              <a:prstGeom prst="rect">
-                <a:avLst/>
-              </a:prstGeom>
-            </p:spPr>
-          </p:pic>
-        </mc:Fallback>
-      </mc:AlternateContent>
+      <p:pic>
+        <p:nvPicPr>
+          <p:cNvPr id="8" name="Picture 7">
+            <a:extLst>
+              <a:ext uri="{FF2B5EF4-FFF2-40B4-BE49-F238E27FC236}">
+                <a16:creationId xmlns:a16="http://schemas.microsoft.com/office/drawing/2014/main" id="{9CD316CD-08DF-8021-EC91-E0F246A93284}"/>
+              </a:ext>
+            </a:extLst>
+          </p:cNvPr>
+          <p:cNvPicPr>
+            <a:picLocks noChangeAspect="1"/>
+          </p:cNvPicPr>
+          <p:nvPr/>
+        </p:nvPicPr>
+        <p:blipFill>
+          <a:blip r:embed="rId4"/>
+          <a:stretch>
+            <a:fillRect/>
+          </a:stretch>
+        </p:blipFill>
+        <p:spPr>
+          <a:xfrm>
+            <a:off x="468052" y="1239149"/>
+            <a:ext cx="8244408" cy="4820337"/>
+          </a:xfrm>
+          <a:prstGeom prst="rect">
+            <a:avLst/>
+          </a:prstGeom>
+        </p:spPr>
+      </p:pic>
     </p:spTree>
     <p:extLst>
       <p:ext uri="{BB962C8B-B14F-4D97-AF65-F5344CB8AC3E}">
-        <p14:creationId xmlns:p14="http://schemas.microsoft.com/office/powerpoint/2010/main" val="3449508277"/>
+        <p14:creationId xmlns:p14="http://schemas.microsoft.com/office/powerpoint/2010/main" val="3436514063"/>
       </p:ext>
     </p:extLst>
   </p:cSld>
@@ -5536,35 +5290,6 @@
           <a:chExt cx="0" cy="0"/>
         </a:xfrm>
       </p:grpSpPr>
-      <p:pic>
-        <p:nvPicPr>
-          <p:cNvPr id="4" name="Content Placeholder 3"/>
-          <p:cNvPicPr>
-            <a:picLocks noGrp="1" noChangeAspect="1"/>
-          </p:cNvPicPr>
-          <p:nvPr>
-            <p:ph idx="1"/>
-          </p:nvPr>
-        </p:nvPicPr>
-        <p:blipFill>
-          <a:blip r:embed="rId3" cstate="print">
-            <a:extLst>
-              <a:ext uri="{28A0092B-C50C-407E-A947-70E740481C1C}">
-                <a14:useLocalDpi xmlns:a14="http://schemas.microsoft.com/office/drawing/2010/main" val="0"/>
-              </a:ext>
-            </a:extLst>
-          </a:blip>
-          <a:stretch>
-            <a:fillRect/>
-          </a:stretch>
-        </p:blipFill>
-        <p:spPr>
-          <a:xfrm>
-            <a:off x="1" y="0"/>
-            <a:ext cx="9180512" cy="6885384"/>
-          </a:xfrm>
-        </p:spPr>
-      </p:pic>
       <p:sp>
         <p:nvSpPr>
           <p:cNvPr id="5" name="Rectangle 1"/>
@@ -5690,7 +5415,7 @@
           <p:nvPr/>
         </p:nvPicPr>
         <p:blipFill>
-          <a:blip r:embed="rId4" cstate="print">
+          <a:blip r:embed="rId3" cstate="print">
             <a:extLst>
               <a:ext uri="{28A0092B-C50C-407E-A947-70E740481C1C}">
                 <a14:useLocalDpi xmlns:a14="http://schemas.microsoft.com/office/drawing/2010/main" val="0"/>
@@ -5713,60 +5438,723 @@
       </p:pic>
       <p:sp>
         <p:nvSpPr>
-          <p:cNvPr id="6" name="TextBox 5">
+          <p:cNvPr id="11" name="Rectangle 2">
             <a:extLst>
               <a:ext uri="{FF2B5EF4-FFF2-40B4-BE49-F238E27FC236}">
-                <a16:creationId xmlns="" xmlns:a16="http://schemas.microsoft.com/office/drawing/2014/main" id="{AE24D516-77C6-C96A-5F77-D099623448D8}"/>
+                <a16:creationId xmlns:a16="http://schemas.microsoft.com/office/drawing/2014/main" id="{22328010-B45A-B3D1-0442-596DA766964D}"/>
               </a:ext>
             </a:extLst>
           </p:cNvPr>
-          <p:cNvSpPr txBox="1"/>
-          <p:nvPr/>
-        </p:nvSpPr>
-        <p:spPr>
+          <p:cNvSpPr>
+            <a:spLocks noGrp="1" noChangeArrowheads="1"/>
+          </p:cNvSpPr>
+          <p:nvPr>
+            <p:ph idx="1"/>
+          </p:nvPr>
+        </p:nvSpPr>
+        <p:spPr bwMode="auto">
           <a:xfrm>
-            <a:off x="179512" y="1293834"/>
-            <a:ext cx="8784976" cy="372794"/>
+            <a:off x="462372" y="1607893"/>
+            <a:ext cx="8219256" cy="4154984"/>
           </a:xfrm>
           <a:prstGeom prst="rect">
             <a:avLst/>
           </a:prstGeom>
           <a:noFill/>
+          <a:ln>
+            <a:noFill/>
+          </a:ln>
+          <a:effectLst/>
+          <a:extLst>
+            <a:ext uri="{909E8E84-426E-40DD-AFC4-6F175D3DCCD1}">
+              <a14:hiddenFill xmlns:a14="http://schemas.microsoft.com/office/drawing/2010/main">
+                <a:solidFill>
+                  <a:schemeClr val="accent1"/>
+                </a:solidFill>
+              </a14:hiddenFill>
+            </a:ext>
+            <a:ext uri="{91240B29-F687-4F45-9708-019B960494DF}">
+              <a14:hiddenLine xmlns:a14="http://schemas.microsoft.com/office/drawing/2010/main" w="9525">
+                <a:solidFill>
+                  <a:schemeClr val="tx1"/>
+                </a:solidFill>
+                <a:miter lim="800000"/>
+                <a:headEnd/>
+                <a:tailEnd/>
+              </a14:hiddenLine>
+            </a:ext>
+            <a:ext uri="{AF507438-7753-43E0-B8FC-AC1667EBCBE1}">
+              <a14:hiddenEffects xmlns:a14="http://schemas.microsoft.com/office/drawing/2010/main">
+                <a:effectLst>
+                  <a:outerShdw dist="35921" dir="2700000" algn="ctr" rotWithShape="0">
+                    <a:schemeClr val="bg2"/>
+                  </a:outerShdw>
+                </a:effectLst>
+              </a14:hiddenEffects>
+            </a:ext>
+          </a:extLst>
         </p:spPr>
         <p:txBody>
-          <a:bodyPr wrap="square">
+          <a:bodyPr vert="horz" wrap="square" lIns="91440" tIns="45720" rIns="91440" bIns="45720" numCol="1" anchor="ctr" anchorCtr="0" compatLnSpc="1">
+            <a:prstTxWarp prst="textNoShape">
+              <a:avLst/>
+            </a:prstTxWarp>
             <a:spAutoFit/>
           </a:bodyPr>
           <a:lstStyle/>
           <a:p>
-            <a:pPr marL="0" marR="0" algn="just" fontAlgn="base">
+            <a:pPr marL="0" marR="0" lvl="0" indent="0" algn="l" defTabSz="914400" rtl="0" eaLnBrk="0" fontAlgn="base" latinLnBrk="0" hangingPunct="0">
               <a:lnSpc>
-                <a:spcPct val="107000"/>
+                <a:spcPct val="100000"/>
               </a:lnSpc>
               <a:spcBef>
-                <a:spcPts val="0"/>
+                <a:spcPct val="0"/>
               </a:spcBef>
               <a:spcAft>
-                <a:spcPts val="0"/>
+                <a:spcPct val="0"/>
               </a:spcAft>
+              <a:buClrTx/>
+              <a:buSzTx/>
+              <a:buNone/>
+              <a:tabLst/>
             </a:pPr>
             <a:r>
-              <a:rPr lang="en-US" sz="1800" kern="100" dirty="0">
-                <a:solidFill>
-                  <a:srgbClr val="000000"/>
+              <a:rPr kumimoji="0" lang="en-US" altLang="en-US" sz="1800" b="1" i="0" u="none" strike="noStrike" cap="none" normalizeH="0" baseline="0" dirty="0">
+                <a:ln>
+                  <a:noFill/>
+                </a:ln>
+                <a:solidFill>
+                  <a:schemeClr val="tx1"/>
                 </a:solidFill>
                 <a:effectLst/>
                 <a:latin typeface="Verdana" panose="020B0604030504040204" pitchFamily="34" charset="0"/>
-                <a:ea typeface="Times New Roman" panose="02020603050405020304" pitchFamily="18" charset="0"/>
-                <a:cs typeface="Times New Roman" panose="02020603050405020304" pitchFamily="18" charset="0"/>
-              </a:rPr>
-              <a:t> </a:t>
-            </a:r>
-            <a:endParaRPr lang="en-US" sz="2800" kern="100" dirty="0">
+                <a:ea typeface="Verdana" panose="020B0604030504040204" pitchFamily="34" charset="0"/>
+              </a:rPr>
+              <a:t>Data Sources</a:t>
+            </a:r>
+          </a:p>
+          <a:p>
+            <a:pPr marL="0" marR="0" lvl="0" indent="0" algn="l" defTabSz="914400" rtl="0" eaLnBrk="0" fontAlgn="base" latinLnBrk="0" hangingPunct="0">
+              <a:lnSpc>
+                <a:spcPct val="100000"/>
+              </a:lnSpc>
+              <a:spcBef>
+                <a:spcPct val="0"/>
+              </a:spcBef>
+              <a:spcAft>
+                <a:spcPct val="0"/>
+              </a:spcAft>
+              <a:buClrTx/>
+              <a:buSzTx/>
+              <a:buNone/>
+              <a:tabLst/>
+            </a:pPr>
+            <a:endParaRPr kumimoji="0" lang="en-US" altLang="en-US" sz="1800" b="0" i="0" u="none" strike="noStrike" cap="none" normalizeH="0" baseline="0" dirty="0">
+              <a:ln>
+                <a:noFill/>
+              </a:ln>
+              <a:solidFill>
+                <a:schemeClr val="tx1"/>
+              </a:solidFill>
               <a:effectLst/>
-              <a:latin typeface="+mj-lt"/>
-              <a:ea typeface="Calibri" panose="020F0502020204030204" pitchFamily="34" charset="0"/>
-              <a:cs typeface="Times New Roman" panose="02020603050405020304" pitchFamily="18" charset="0"/>
+              <a:latin typeface="Verdana" panose="020B0604030504040204" pitchFamily="34" charset="0"/>
+              <a:ea typeface="Verdana" panose="020B0604030504040204" pitchFamily="34" charset="0"/>
+            </a:endParaRPr>
+          </a:p>
+          <a:p>
+            <a:pPr marL="0" marR="0" lvl="0" indent="0" algn="l" defTabSz="914400" rtl="0" eaLnBrk="0" fontAlgn="base" latinLnBrk="0" hangingPunct="0">
+              <a:lnSpc>
+                <a:spcPct val="100000"/>
+              </a:lnSpc>
+              <a:spcBef>
+                <a:spcPct val="0"/>
+              </a:spcBef>
+              <a:spcAft>
+                <a:spcPct val="0"/>
+              </a:spcAft>
+              <a:buClrTx/>
+              <a:buSzTx/>
+              <a:buNone/>
+              <a:tabLst/>
+            </a:pPr>
+            <a:r>
+              <a:rPr kumimoji="0" lang="en-US" altLang="en-US" sz="1800" b="1" i="0" u="none" strike="noStrike" cap="none" normalizeH="0" baseline="0" dirty="0">
+                <a:ln>
+                  <a:noFill/>
+                </a:ln>
+                <a:solidFill>
+                  <a:schemeClr val="tx1"/>
+                </a:solidFill>
+                <a:effectLst/>
+                <a:latin typeface="Verdana" panose="020B0604030504040204" pitchFamily="34" charset="0"/>
+                <a:ea typeface="Verdana" panose="020B0604030504040204" pitchFamily="34" charset="0"/>
+              </a:rPr>
+              <a:t>Map Data:</a:t>
+            </a:r>
+            <a:r>
+              <a:rPr kumimoji="0" lang="en-US" altLang="en-US" sz="1800" b="0" i="0" u="none" strike="noStrike" cap="none" normalizeH="0" baseline="0" dirty="0">
+                <a:ln>
+                  <a:noFill/>
+                </a:ln>
+                <a:solidFill>
+                  <a:schemeClr val="tx1"/>
+                </a:solidFill>
+                <a:effectLst/>
+                <a:latin typeface="Verdana" panose="020B0604030504040204" pitchFamily="34" charset="0"/>
+                <a:ea typeface="Verdana" panose="020B0604030504040204" pitchFamily="34" charset="0"/>
+              </a:rPr>
+              <a:t> </a:t>
+            </a:r>
+            <a:r>
+              <a:rPr kumimoji="0" lang="en-US" altLang="en-US" sz="1600" b="0" i="0" u="none" strike="noStrike" cap="none" normalizeH="0" baseline="0" dirty="0">
+                <a:ln>
+                  <a:noFill/>
+                </a:ln>
+                <a:solidFill>
+                  <a:schemeClr val="tx1"/>
+                </a:solidFill>
+                <a:effectLst/>
+                <a:latin typeface="Verdana" panose="020B0604030504040204" pitchFamily="34" charset="0"/>
+                <a:ea typeface="Verdana" panose="020B0604030504040204" pitchFamily="34" charset="0"/>
+              </a:rPr>
+              <a:t>OpenStreetMap (OSM) extracts for North India (via </a:t>
+            </a:r>
+            <a:r>
+              <a:rPr kumimoji="0" lang="en-US" altLang="en-US" sz="1600" b="0" i="0" u="none" strike="noStrike" cap="none" normalizeH="0" baseline="0" dirty="0" err="1">
+                <a:ln>
+                  <a:noFill/>
+                </a:ln>
+                <a:solidFill>
+                  <a:schemeClr val="tx1"/>
+                </a:solidFill>
+                <a:effectLst/>
+                <a:latin typeface="Verdana" panose="020B0604030504040204" pitchFamily="34" charset="0"/>
+                <a:ea typeface="Verdana" panose="020B0604030504040204" pitchFamily="34" charset="0"/>
+              </a:rPr>
+              <a:t>Geofabrik</a:t>
+            </a:r>
+            <a:r>
+              <a:rPr kumimoji="0" lang="en-US" altLang="en-US" sz="1600" b="0" i="0" u="none" strike="noStrike" cap="none" normalizeH="0" baseline="0" dirty="0">
+                <a:ln>
+                  <a:noFill/>
+                </a:ln>
+                <a:solidFill>
+                  <a:schemeClr val="tx1"/>
+                </a:solidFill>
+                <a:effectLst/>
+                <a:latin typeface="Verdana" panose="020B0604030504040204" pitchFamily="34" charset="0"/>
+                <a:ea typeface="Verdana" panose="020B0604030504040204" pitchFamily="34" charset="0"/>
+              </a:rPr>
+              <a:t>).</a:t>
+            </a:r>
+          </a:p>
+          <a:p>
+            <a:pPr marL="0" marR="0" lvl="0" indent="0" algn="l" defTabSz="914400" rtl="0" eaLnBrk="0" fontAlgn="base" latinLnBrk="0" hangingPunct="0">
+              <a:lnSpc>
+                <a:spcPct val="100000"/>
+              </a:lnSpc>
+              <a:spcBef>
+                <a:spcPct val="0"/>
+              </a:spcBef>
+              <a:spcAft>
+                <a:spcPct val="0"/>
+              </a:spcAft>
+              <a:buClrTx/>
+              <a:buSzTx/>
+              <a:buNone/>
+              <a:tabLst/>
+            </a:pPr>
+            <a:r>
+              <a:rPr kumimoji="0" lang="en-US" altLang="en-US" sz="1800" b="1" i="0" u="none" strike="noStrike" cap="none" normalizeH="0" baseline="0" dirty="0">
+                <a:ln>
+                  <a:noFill/>
+                </a:ln>
+                <a:solidFill>
+                  <a:schemeClr val="tx1"/>
+                </a:solidFill>
+                <a:effectLst/>
+                <a:latin typeface="Verdana" panose="020B0604030504040204" pitchFamily="34" charset="0"/>
+                <a:ea typeface="Verdana" panose="020B0604030504040204" pitchFamily="34" charset="0"/>
+              </a:rPr>
+              <a:t>Stop Data:</a:t>
+            </a:r>
+            <a:r>
+              <a:rPr kumimoji="0" lang="en-US" altLang="en-US" sz="1800" b="0" i="0" u="none" strike="noStrike" cap="none" normalizeH="0" baseline="0" dirty="0">
+                <a:ln>
+                  <a:noFill/>
+                </a:ln>
+                <a:solidFill>
+                  <a:schemeClr val="tx1"/>
+                </a:solidFill>
+                <a:effectLst/>
+                <a:latin typeface="Verdana" panose="020B0604030504040204" pitchFamily="34" charset="0"/>
+                <a:ea typeface="Verdana" panose="020B0604030504040204" pitchFamily="34" charset="0"/>
+              </a:rPr>
+              <a:t> </a:t>
+            </a:r>
+            <a:r>
+              <a:rPr kumimoji="0" lang="en-US" altLang="en-US" sz="1600" b="0" i="0" u="none" strike="noStrike" cap="none" normalizeH="0" baseline="0" dirty="0">
+                <a:ln>
+                  <a:noFill/>
+                </a:ln>
+                <a:solidFill>
+                  <a:schemeClr val="tx1"/>
+                </a:solidFill>
+                <a:effectLst/>
+                <a:latin typeface="Verdana" panose="020B0604030504040204" pitchFamily="34" charset="0"/>
+                <a:ea typeface="Verdana" panose="020B0604030504040204" pitchFamily="34" charset="0"/>
+              </a:rPr>
+              <a:t>Geotagged coordinates for student pickup points across Palwal, Faridabad, Noida, etc.</a:t>
+            </a:r>
+          </a:p>
+          <a:p>
+            <a:pPr marL="0" marR="0" lvl="0" indent="0" algn="l" defTabSz="914400" rtl="0" eaLnBrk="0" fontAlgn="base" latinLnBrk="0" hangingPunct="0">
+              <a:lnSpc>
+                <a:spcPct val="100000"/>
+              </a:lnSpc>
+              <a:spcBef>
+                <a:spcPct val="0"/>
+              </a:spcBef>
+              <a:spcAft>
+                <a:spcPct val="0"/>
+              </a:spcAft>
+              <a:buClrTx/>
+              <a:buSzTx/>
+              <a:buNone/>
+              <a:tabLst/>
+            </a:pPr>
+            <a:endParaRPr kumimoji="0" lang="en-US" altLang="en-US" sz="1800" b="0" i="0" u="none" strike="noStrike" cap="none" normalizeH="0" baseline="0" dirty="0">
+              <a:ln>
+                <a:noFill/>
+              </a:ln>
+              <a:solidFill>
+                <a:schemeClr val="tx1"/>
+              </a:solidFill>
+              <a:effectLst/>
+              <a:latin typeface="Verdana" panose="020B0604030504040204" pitchFamily="34" charset="0"/>
+              <a:ea typeface="Verdana" panose="020B0604030504040204" pitchFamily="34" charset="0"/>
+            </a:endParaRPr>
+          </a:p>
+          <a:p>
+            <a:pPr marL="0" marR="0" lvl="0" indent="0" algn="l" defTabSz="914400" rtl="0" eaLnBrk="0" fontAlgn="base" latinLnBrk="0" hangingPunct="0">
+              <a:lnSpc>
+                <a:spcPct val="100000"/>
+              </a:lnSpc>
+              <a:spcBef>
+                <a:spcPct val="0"/>
+              </a:spcBef>
+              <a:spcAft>
+                <a:spcPct val="0"/>
+              </a:spcAft>
+              <a:buClrTx/>
+              <a:buSzTx/>
+              <a:buNone/>
+              <a:tabLst/>
+            </a:pPr>
+            <a:endParaRPr kumimoji="0" lang="en-US" altLang="en-US" sz="1800" b="0" i="0" u="none" strike="noStrike" cap="none" normalizeH="0" baseline="0" dirty="0">
+              <a:ln>
+                <a:noFill/>
+              </a:ln>
+              <a:solidFill>
+                <a:schemeClr val="tx1"/>
+              </a:solidFill>
+              <a:effectLst/>
+              <a:latin typeface="Verdana" panose="020B0604030504040204" pitchFamily="34" charset="0"/>
+              <a:ea typeface="Verdana" panose="020B0604030504040204" pitchFamily="34" charset="0"/>
+            </a:endParaRPr>
+          </a:p>
+          <a:p>
+            <a:pPr marL="0" marR="0" lvl="0" indent="0" algn="l" defTabSz="914400" rtl="0" eaLnBrk="0" fontAlgn="base" latinLnBrk="0" hangingPunct="0">
+              <a:lnSpc>
+                <a:spcPct val="100000"/>
+              </a:lnSpc>
+              <a:spcBef>
+                <a:spcPct val="0"/>
+              </a:spcBef>
+              <a:spcAft>
+                <a:spcPct val="0"/>
+              </a:spcAft>
+              <a:buClrTx/>
+              <a:buSzTx/>
+              <a:buNone/>
+              <a:tabLst/>
+            </a:pPr>
+            <a:r>
+              <a:rPr kumimoji="0" lang="en-US" altLang="en-US" sz="1800" b="1" i="0" u="none" strike="noStrike" cap="none" normalizeH="0" baseline="0" dirty="0">
+                <a:ln>
+                  <a:noFill/>
+                </a:ln>
+                <a:solidFill>
+                  <a:schemeClr val="tx1"/>
+                </a:solidFill>
+                <a:effectLst/>
+                <a:latin typeface="Verdana" panose="020B0604030504040204" pitchFamily="34" charset="0"/>
+                <a:ea typeface="Verdana" panose="020B0604030504040204" pitchFamily="34" charset="0"/>
+              </a:rPr>
+              <a:t>Software &amp; Frameworks</a:t>
+            </a:r>
+          </a:p>
+          <a:p>
+            <a:pPr marL="0" marR="0" lvl="0" indent="0" algn="l" defTabSz="914400" rtl="0" eaLnBrk="0" fontAlgn="base" latinLnBrk="0" hangingPunct="0">
+              <a:lnSpc>
+                <a:spcPct val="100000"/>
+              </a:lnSpc>
+              <a:spcBef>
+                <a:spcPct val="0"/>
+              </a:spcBef>
+              <a:spcAft>
+                <a:spcPct val="0"/>
+              </a:spcAft>
+              <a:buClrTx/>
+              <a:buSzTx/>
+              <a:buNone/>
+              <a:tabLst/>
+            </a:pPr>
+            <a:endParaRPr kumimoji="0" lang="en-US" altLang="en-US" sz="1800" b="0" i="0" u="none" strike="noStrike" cap="none" normalizeH="0" baseline="0" dirty="0">
+              <a:ln>
+                <a:noFill/>
+              </a:ln>
+              <a:solidFill>
+                <a:schemeClr val="tx1"/>
+              </a:solidFill>
+              <a:effectLst/>
+              <a:latin typeface="Verdana" panose="020B0604030504040204" pitchFamily="34" charset="0"/>
+              <a:ea typeface="Verdana" panose="020B0604030504040204" pitchFamily="34" charset="0"/>
+            </a:endParaRPr>
+          </a:p>
+          <a:p>
+            <a:pPr marL="0" marR="0" lvl="0" indent="0" algn="l" defTabSz="914400" rtl="0" eaLnBrk="0" fontAlgn="base" latinLnBrk="0" hangingPunct="0">
+              <a:lnSpc>
+                <a:spcPct val="100000"/>
+              </a:lnSpc>
+              <a:spcBef>
+                <a:spcPct val="0"/>
+              </a:spcBef>
+              <a:spcAft>
+                <a:spcPct val="0"/>
+              </a:spcAft>
+              <a:buClrTx/>
+              <a:buSzTx/>
+              <a:buNone/>
+              <a:tabLst/>
+            </a:pPr>
+            <a:r>
+              <a:rPr kumimoji="0" lang="en-US" altLang="en-US" sz="1800" b="1" i="0" u="none" strike="noStrike" cap="none" normalizeH="0" baseline="0" dirty="0">
+                <a:ln>
+                  <a:noFill/>
+                </a:ln>
+                <a:solidFill>
+                  <a:schemeClr val="tx1"/>
+                </a:solidFill>
+                <a:effectLst/>
+                <a:latin typeface="Verdana" panose="020B0604030504040204" pitchFamily="34" charset="0"/>
+                <a:ea typeface="Verdana" panose="020B0604030504040204" pitchFamily="34" charset="0"/>
+              </a:rPr>
+              <a:t>Frontend:</a:t>
+            </a:r>
+            <a:r>
+              <a:rPr kumimoji="0" lang="en-US" altLang="en-US" sz="1800" b="0" i="0" u="none" strike="noStrike" cap="none" normalizeH="0" baseline="0" dirty="0">
+                <a:ln>
+                  <a:noFill/>
+                </a:ln>
+                <a:solidFill>
+                  <a:schemeClr val="tx1"/>
+                </a:solidFill>
+                <a:effectLst/>
+                <a:latin typeface="Verdana" panose="020B0604030504040204" pitchFamily="34" charset="0"/>
+                <a:ea typeface="Verdana" panose="020B0604030504040204" pitchFamily="34" charset="0"/>
+              </a:rPr>
+              <a:t> </a:t>
+            </a:r>
+            <a:r>
+              <a:rPr kumimoji="0" lang="en-US" altLang="en-US" sz="1600" b="0" i="0" u="none" strike="noStrike" cap="none" normalizeH="0" baseline="0" dirty="0">
+                <a:ln>
+                  <a:noFill/>
+                </a:ln>
+                <a:solidFill>
+                  <a:schemeClr val="tx1"/>
+                </a:solidFill>
+                <a:effectLst/>
+                <a:latin typeface="Verdana" panose="020B0604030504040204" pitchFamily="34" charset="0"/>
+                <a:ea typeface="Verdana" panose="020B0604030504040204" pitchFamily="34" charset="0"/>
+              </a:rPr>
+              <a:t>Next.js (React), Leaflet.js, </a:t>
+            </a:r>
+            <a:r>
+              <a:rPr kumimoji="0" lang="en-US" altLang="en-US" sz="1600" b="0" i="0" u="none" strike="noStrike" cap="none" normalizeH="0" baseline="0" dirty="0" err="1">
+                <a:ln>
+                  <a:noFill/>
+                </a:ln>
+                <a:solidFill>
+                  <a:schemeClr val="tx1"/>
+                </a:solidFill>
+                <a:effectLst/>
+                <a:latin typeface="Verdana" panose="020B0604030504040204" pitchFamily="34" charset="0"/>
+                <a:ea typeface="Verdana" panose="020B0604030504040204" pitchFamily="34" charset="0"/>
+              </a:rPr>
+              <a:t>TanStack</a:t>
+            </a:r>
+            <a:r>
+              <a:rPr kumimoji="0" lang="en-US" altLang="en-US" sz="1600" b="0" i="0" u="none" strike="noStrike" cap="none" normalizeH="0" baseline="0" dirty="0">
+                <a:ln>
+                  <a:noFill/>
+                </a:ln>
+                <a:solidFill>
+                  <a:schemeClr val="tx1"/>
+                </a:solidFill>
+                <a:effectLst/>
+                <a:latin typeface="Verdana" panose="020B0604030504040204" pitchFamily="34" charset="0"/>
+                <a:ea typeface="Verdana" panose="020B0604030504040204" pitchFamily="34" charset="0"/>
+              </a:rPr>
+              <a:t> Query, </a:t>
+            </a:r>
+            <a:r>
+              <a:rPr kumimoji="0" lang="en-US" altLang="en-US" sz="1600" b="0" i="0" u="none" strike="noStrike" cap="none" normalizeH="0" baseline="0" dirty="0" err="1">
+                <a:ln>
+                  <a:noFill/>
+                </a:ln>
+                <a:solidFill>
+                  <a:schemeClr val="tx1"/>
+                </a:solidFill>
+                <a:effectLst/>
+                <a:latin typeface="Verdana" panose="020B0604030504040204" pitchFamily="34" charset="0"/>
+                <a:ea typeface="Verdana" panose="020B0604030504040204" pitchFamily="34" charset="0"/>
+              </a:rPr>
+              <a:t>PMTiles</a:t>
+            </a:r>
+            <a:r>
+              <a:rPr kumimoji="0" lang="en-US" altLang="en-US" sz="1600" b="0" i="0" u="none" strike="noStrike" cap="none" normalizeH="0" baseline="0" dirty="0">
+                <a:ln>
+                  <a:noFill/>
+                </a:ln>
+                <a:solidFill>
+                  <a:schemeClr val="tx1"/>
+                </a:solidFill>
+                <a:effectLst/>
+                <a:latin typeface="Verdana" panose="020B0604030504040204" pitchFamily="34" charset="0"/>
+                <a:ea typeface="Verdana" panose="020B0604030504040204" pitchFamily="34" charset="0"/>
+              </a:rPr>
+              <a:t>.</a:t>
+            </a:r>
+          </a:p>
+          <a:p>
+            <a:pPr marL="0" marR="0" lvl="0" indent="0" algn="l" defTabSz="914400" rtl="0" eaLnBrk="0" fontAlgn="base" latinLnBrk="0" hangingPunct="0">
+              <a:lnSpc>
+                <a:spcPct val="100000"/>
+              </a:lnSpc>
+              <a:spcBef>
+                <a:spcPct val="0"/>
+              </a:spcBef>
+              <a:spcAft>
+                <a:spcPct val="0"/>
+              </a:spcAft>
+              <a:buClrTx/>
+              <a:buSzTx/>
+              <a:buNone/>
+              <a:tabLst/>
+            </a:pPr>
+            <a:r>
+              <a:rPr kumimoji="0" lang="en-US" altLang="en-US" sz="1800" b="1" i="0" u="none" strike="noStrike" cap="none" normalizeH="0" baseline="0" dirty="0">
+                <a:ln>
+                  <a:noFill/>
+                </a:ln>
+                <a:solidFill>
+                  <a:schemeClr val="tx1"/>
+                </a:solidFill>
+                <a:effectLst/>
+                <a:latin typeface="Verdana" panose="020B0604030504040204" pitchFamily="34" charset="0"/>
+                <a:ea typeface="Verdana" panose="020B0604030504040204" pitchFamily="34" charset="0"/>
+              </a:rPr>
+              <a:t>Backend:</a:t>
+            </a:r>
+            <a:r>
+              <a:rPr kumimoji="0" lang="en-US" altLang="en-US" sz="1800" b="0" i="0" u="none" strike="noStrike" cap="none" normalizeH="0" baseline="0" dirty="0">
+                <a:ln>
+                  <a:noFill/>
+                </a:ln>
+                <a:solidFill>
+                  <a:schemeClr val="tx1"/>
+                </a:solidFill>
+                <a:effectLst/>
+                <a:latin typeface="Verdana" panose="020B0604030504040204" pitchFamily="34" charset="0"/>
+                <a:ea typeface="Verdana" panose="020B0604030504040204" pitchFamily="34" charset="0"/>
+              </a:rPr>
+              <a:t> </a:t>
+            </a:r>
+            <a:r>
+              <a:rPr kumimoji="0" lang="en-US" altLang="en-US" sz="1600" b="0" i="0" u="none" strike="noStrike" cap="none" normalizeH="0" baseline="0" dirty="0">
+                <a:ln>
+                  <a:noFill/>
+                </a:ln>
+                <a:solidFill>
+                  <a:schemeClr val="tx1"/>
+                </a:solidFill>
+                <a:effectLst/>
+                <a:latin typeface="Verdana" panose="020B0604030504040204" pitchFamily="34" charset="0"/>
+                <a:ea typeface="Verdana" panose="020B0604030504040204" pitchFamily="34" charset="0"/>
+              </a:rPr>
+              <a:t>Python, FastAPI, Pandas, </a:t>
+            </a:r>
+            <a:r>
+              <a:rPr kumimoji="0" lang="en-US" altLang="en-US" sz="1600" b="0" i="0" u="none" strike="noStrike" cap="none" normalizeH="0" baseline="0" dirty="0" err="1">
+                <a:ln>
+                  <a:noFill/>
+                </a:ln>
+                <a:solidFill>
+                  <a:schemeClr val="tx1"/>
+                </a:solidFill>
+                <a:effectLst/>
+                <a:latin typeface="Verdana" panose="020B0604030504040204" pitchFamily="34" charset="0"/>
+                <a:ea typeface="Verdana" panose="020B0604030504040204" pitchFamily="34" charset="0"/>
+              </a:rPr>
+              <a:t>SQLAlchemy</a:t>
+            </a:r>
+            <a:r>
+              <a:rPr kumimoji="0" lang="en-US" altLang="en-US" sz="1600" b="0" i="0" u="none" strike="noStrike" cap="none" normalizeH="0" baseline="0" dirty="0">
+                <a:ln>
+                  <a:noFill/>
+                </a:ln>
+                <a:solidFill>
+                  <a:schemeClr val="tx1"/>
+                </a:solidFill>
+                <a:effectLst/>
+                <a:latin typeface="Verdana" panose="020B0604030504040204" pitchFamily="34" charset="0"/>
+                <a:ea typeface="Verdana" panose="020B0604030504040204" pitchFamily="34" charset="0"/>
+              </a:rPr>
+              <a:t>.</a:t>
+            </a:r>
+          </a:p>
+          <a:p>
+            <a:pPr marL="0" marR="0" lvl="0" indent="0" algn="l" defTabSz="914400" rtl="0" eaLnBrk="0" fontAlgn="base" latinLnBrk="0" hangingPunct="0">
+              <a:lnSpc>
+                <a:spcPct val="100000"/>
+              </a:lnSpc>
+              <a:spcBef>
+                <a:spcPct val="0"/>
+              </a:spcBef>
+              <a:spcAft>
+                <a:spcPct val="0"/>
+              </a:spcAft>
+              <a:buClrTx/>
+              <a:buSzTx/>
+              <a:buNone/>
+              <a:tabLst/>
+            </a:pPr>
+            <a:r>
+              <a:rPr kumimoji="0" lang="en-US" altLang="en-US" sz="1800" b="1" i="0" u="none" strike="noStrike" cap="none" normalizeH="0" baseline="0" dirty="0">
+                <a:ln>
+                  <a:noFill/>
+                </a:ln>
+                <a:solidFill>
+                  <a:schemeClr val="tx1"/>
+                </a:solidFill>
+                <a:effectLst/>
+                <a:latin typeface="Verdana" panose="020B0604030504040204" pitchFamily="34" charset="0"/>
+                <a:ea typeface="Verdana" panose="020B0604030504040204" pitchFamily="34" charset="0"/>
+              </a:rPr>
+              <a:t>Optimization:</a:t>
+            </a:r>
+            <a:r>
+              <a:rPr kumimoji="0" lang="en-US" altLang="en-US" sz="1800" b="0" i="0" u="none" strike="noStrike" cap="none" normalizeH="0" baseline="0" dirty="0">
+                <a:ln>
+                  <a:noFill/>
+                </a:ln>
+                <a:solidFill>
+                  <a:schemeClr val="tx1"/>
+                </a:solidFill>
+                <a:effectLst/>
+                <a:latin typeface="Verdana" panose="020B0604030504040204" pitchFamily="34" charset="0"/>
+                <a:ea typeface="Verdana" panose="020B0604030504040204" pitchFamily="34" charset="0"/>
+              </a:rPr>
+              <a:t> </a:t>
+            </a:r>
+            <a:r>
+              <a:rPr kumimoji="0" lang="en-US" altLang="en-US" sz="1600" b="0" i="0" u="none" strike="noStrike" cap="none" normalizeH="0" baseline="0" dirty="0">
+                <a:ln>
+                  <a:noFill/>
+                </a:ln>
+                <a:solidFill>
+                  <a:schemeClr val="tx1"/>
+                </a:solidFill>
+                <a:effectLst/>
+                <a:latin typeface="Verdana" panose="020B0604030504040204" pitchFamily="34" charset="0"/>
+                <a:ea typeface="Verdana" panose="020B0604030504040204" pitchFamily="34" charset="0"/>
+              </a:rPr>
+              <a:t>Google OR-Tools, OSRM (Open Source Routing Machine) with custom Lua profiles.</a:t>
+            </a:r>
+            <a:endParaRPr kumimoji="0" lang="en-US" altLang="en-US" sz="1600" b="1" i="0" u="none" strike="noStrike" cap="none" normalizeH="0" baseline="0" dirty="0">
+              <a:ln>
+                <a:noFill/>
+              </a:ln>
+              <a:solidFill>
+                <a:schemeClr val="tx1"/>
+              </a:solidFill>
+              <a:effectLst/>
+              <a:latin typeface="Verdana" panose="020B0604030504040204" pitchFamily="34" charset="0"/>
+              <a:ea typeface="Verdana" panose="020B0604030504040204" pitchFamily="34" charset="0"/>
+            </a:endParaRPr>
+          </a:p>
+          <a:p>
+            <a:pPr marL="0" marR="0" lvl="0" indent="0" algn="l" defTabSz="914400" rtl="0" eaLnBrk="0" fontAlgn="base" latinLnBrk="0" hangingPunct="0">
+              <a:lnSpc>
+                <a:spcPct val="100000"/>
+              </a:lnSpc>
+              <a:spcBef>
+                <a:spcPct val="0"/>
+              </a:spcBef>
+              <a:spcAft>
+                <a:spcPct val="0"/>
+              </a:spcAft>
+              <a:buClrTx/>
+              <a:buSzTx/>
+              <a:buNone/>
+              <a:tabLst/>
+            </a:pPr>
+            <a:r>
+              <a:rPr lang="en-US" altLang="en-US" sz="1800" b="1" dirty="0">
+                <a:latin typeface="Verdana" panose="020B0604030504040204" pitchFamily="34" charset="0"/>
+                <a:ea typeface="Verdana" panose="020B0604030504040204" pitchFamily="34" charset="0"/>
+              </a:rPr>
+              <a:t>DevOps &amp; Infrastructure:</a:t>
+            </a:r>
+            <a:r>
+              <a:rPr lang="en-US" altLang="en-US" sz="1800" dirty="0">
+                <a:latin typeface="Verdana" panose="020B0604030504040204" pitchFamily="34" charset="0"/>
+                <a:ea typeface="Verdana" panose="020B0604030504040204" pitchFamily="34" charset="0"/>
+              </a:rPr>
+              <a:t> </a:t>
+            </a:r>
+            <a:r>
+              <a:rPr lang="en-US" altLang="en-US" sz="1600" dirty="0">
+                <a:latin typeface="Verdana" panose="020B0604030504040204" pitchFamily="34" charset="0"/>
+                <a:ea typeface="Verdana" panose="020B0604030504040204" pitchFamily="34" charset="0"/>
+              </a:rPr>
+              <a:t>Docker, </a:t>
+            </a:r>
+            <a:r>
+              <a:rPr lang="en-US" altLang="en-US" sz="1600" dirty="0" err="1">
+                <a:latin typeface="Verdana" panose="020B0604030504040204" pitchFamily="34" charset="0"/>
+                <a:ea typeface="Verdana" panose="020B0604030504040204" pitchFamily="34" charset="0"/>
+              </a:rPr>
+              <a:t>Github</a:t>
+            </a:r>
+            <a:r>
+              <a:rPr lang="en-US" altLang="en-US" sz="1600" dirty="0">
+                <a:latin typeface="Verdana" panose="020B0604030504040204" pitchFamily="34" charset="0"/>
+                <a:ea typeface="Verdana" panose="020B0604030504040204" pitchFamily="34" charset="0"/>
+              </a:rPr>
+              <a:t> Actions, Nginx Reverse Proxy, PostgreSQL.</a:t>
+            </a:r>
+            <a:endParaRPr kumimoji="0" lang="en-US" altLang="en-US" sz="1600" b="1" i="0" u="none" strike="noStrike" cap="none" normalizeH="0" baseline="0" dirty="0">
+              <a:ln>
+                <a:noFill/>
+              </a:ln>
+              <a:solidFill>
+                <a:schemeClr val="tx1"/>
+              </a:solidFill>
+              <a:effectLst/>
+              <a:latin typeface="Verdana" panose="020B0604030504040204" pitchFamily="34" charset="0"/>
+              <a:ea typeface="Verdana" panose="020B0604030504040204" pitchFamily="34" charset="0"/>
             </a:endParaRPr>
           </a:p>
         </p:txBody>
@@ -5774,7 +6162,7 @@
     </p:spTree>
     <p:extLst>
       <p:ext uri="{BB962C8B-B14F-4D97-AF65-F5344CB8AC3E}">
-        <p14:creationId xmlns:p14="http://schemas.microsoft.com/office/powerpoint/2010/main" val="3449068858"/>
+        <p14:creationId xmlns:p14="http://schemas.microsoft.com/office/powerpoint/2010/main" val="2832022494"/>
       </p:ext>
     </p:extLst>
   </p:cSld>
@@ -5801,35 +6189,6 @@
           <a:chExt cx="0" cy="0"/>
         </a:xfrm>
       </p:grpSpPr>
-      <p:pic>
-        <p:nvPicPr>
-          <p:cNvPr id="4" name="Content Placeholder 3"/>
-          <p:cNvPicPr>
-            <a:picLocks noGrp="1" noChangeAspect="1"/>
-          </p:cNvPicPr>
-          <p:nvPr>
-            <p:ph idx="1"/>
-          </p:nvPr>
-        </p:nvPicPr>
-        <p:blipFill>
-          <a:blip r:embed="rId3" cstate="print">
-            <a:extLst>
-              <a:ext uri="{28A0092B-C50C-407E-A947-70E740481C1C}">
-                <a14:useLocalDpi xmlns:a14="http://schemas.microsoft.com/office/drawing/2010/main" val="0"/>
-              </a:ext>
-            </a:extLst>
-          </a:blip>
-          <a:stretch>
-            <a:fillRect/>
-          </a:stretch>
-        </p:blipFill>
-        <p:spPr>
-          <a:xfrm>
-            <a:off x="-94976" y="-13692"/>
-            <a:ext cx="9180512" cy="6885384"/>
-          </a:xfrm>
-        </p:spPr>
-      </p:pic>
       <p:sp>
         <p:nvSpPr>
           <p:cNvPr id="5" name="Rectangle 1"/>
@@ -5841,7 +6200,7 @@
         <p:spPr bwMode="auto">
           <a:xfrm>
             <a:off x="179512" y="151593"/>
-            <a:ext cx="6117380" cy="584775"/>
+            <a:ext cx="6258445" cy="584775"/>
           </a:xfrm>
           <a:prstGeom prst="rect">
             <a:avLst/>
@@ -5973,7 +6332,7 @@
           <p:nvPr/>
         </p:nvPicPr>
         <p:blipFill>
-          <a:blip r:embed="rId4" cstate="print">
+          <a:blip r:embed="rId3" cstate="print">
             <a:extLst>
               <a:ext uri="{28A0092B-C50C-407E-A947-70E740481C1C}">
                 <a14:useLocalDpi xmlns:a14="http://schemas.microsoft.com/office/drawing/2010/main" val="0"/>
@@ -5996,10 +6355,10 @@
       </p:pic>
       <p:sp>
         <p:nvSpPr>
-          <p:cNvPr id="6" name="TextBox 5">
+          <p:cNvPr id="10" name="TextBox 9">
             <a:extLst>
               <a:ext uri="{FF2B5EF4-FFF2-40B4-BE49-F238E27FC236}">
-                <a16:creationId xmlns="" xmlns:a16="http://schemas.microsoft.com/office/drawing/2014/main" id="{AE24D516-77C6-C96A-5F77-D099623448D8}"/>
+                <a16:creationId xmlns:a16="http://schemas.microsoft.com/office/drawing/2014/main" id="{1DF51E82-67B3-C722-B9D5-3C292AB52C1A}"/>
               </a:ext>
             </a:extLst>
           </p:cNvPr>
@@ -6008,8 +6367,128 @@
         </p:nvSpPr>
         <p:spPr>
           <a:xfrm>
-            <a:off x="179512" y="1293834"/>
-            <a:ext cx="8784976" cy="372794"/>
+            <a:off x="251521" y="1838725"/>
+            <a:ext cx="4176464" cy="3847207"/>
+          </a:xfrm>
+          <a:prstGeom prst="rect">
+            <a:avLst/>
+          </a:prstGeom>
+          <a:noFill/>
+        </p:spPr>
+        <p:txBody>
+          <a:bodyPr wrap="square" rtlCol="0">
+            <a:spAutoFit/>
+          </a:bodyPr>
+          <a:lstStyle/>
+          <a:p>
+            <a:pPr algn="just"/>
+            <a:r>
+              <a:rPr lang="en-US" b="1" dirty="0">
+                <a:latin typeface="Verdana" panose="020B0604030504040204" pitchFamily="34" charset="0"/>
+                <a:ea typeface="Verdana" panose="020B0604030504040204" pitchFamily="34" charset="0"/>
+              </a:rPr>
+              <a:t>Primary Use cases:</a:t>
+            </a:r>
+          </a:p>
+          <a:p>
+            <a:pPr algn="just"/>
+            <a:endParaRPr lang="en-US" dirty="0">
+              <a:latin typeface="Verdana" panose="020B0604030504040204" pitchFamily="34" charset="0"/>
+              <a:ea typeface="Verdana" panose="020B0604030504040204" pitchFamily="34" charset="0"/>
+            </a:endParaRPr>
+          </a:p>
+          <a:p>
+            <a:pPr algn="just"/>
+            <a:r>
+              <a:rPr lang="en-US" b="1" dirty="0">
+                <a:latin typeface="Verdana" panose="020B0604030504040204" pitchFamily="34" charset="0"/>
+                <a:ea typeface="Verdana" panose="020B0604030504040204" pitchFamily="34" charset="0"/>
+              </a:rPr>
+              <a:t>Semester Planning:</a:t>
+            </a:r>
+          </a:p>
+          <a:p>
+            <a:pPr algn="just"/>
+            <a:r>
+              <a:rPr lang="en-US" sz="1600" dirty="0">
+                <a:latin typeface="Verdana" panose="020B0604030504040204" pitchFamily="34" charset="0"/>
+                <a:ea typeface="Verdana" panose="020B0604030504040204" pitchFamily="34" charset="0"/>
+              </a:rPr>
+              <a:t>Generating the master route schedule at the start of every academic session.</a:t>
+            </a:r>
+          </a:p>
+          <a:p>
+            <a:pPr algn="just"/>
+            <a:endParaRPr lang="en-US" dirty="0">
+              <a:latin typeface="Verdana" panose="020B0604030504040204" pitchFamily="34" charset="0"/>
+              <a:ea typeface="Verdana" panose="020B0604030504040204" pitchFamily="34" charset="0"/>
+            </a:endParaRPr>
+          </a:p>
+          <a:p>
+            <a:pPr algn="just"/>
+            <a:r>
+              <a:rPr lang="en-US" b="1" dirty="0">
+                <a:latin typeface="Verdana" panose="020B0604030504040204" pitchFamily="34" charset="0"/>
+                <a:ea typeface="Verdana" panose="020B0604030504040204" pitchFamily="34" charset="0"/>
+              </a:rPr>
+              <a:t>Budget Optimization:</a:t>
+            </a:r>
+          </a:p>
+          <a:p>
+            <a:pPr algn="just"/>
+            <a:r>
+              <a:rPr lang="en-US" sz="1600" dirty="0">
+                <a:latin typeface="Verdana" panose="020B0604030504040204" pitchFamily="34" charset="0"/>
+                <a:ea typeface="Verdana" panose="020B0604030504040204" pitchFamily="34" charset="0"/>
+              </a:rPr>
+              <a:t>Estimating and reducing fuel budgets by optimizing route kilometers.</a:t>
+            </a:r>
+          </a:p>
+          <a:p>
+            <a:pPr algn="just"/>
+            <a:endParaRPr lang="en-US" dirty="0">
+              <a:latin typeface="Verdana" panose="020B0604030504040204" pitchFamily="34" charset="0"/>
+              <a:ea typeface="Verdana" panose="020B0604030504040204" pitchFamily="34" charset="0"/>
+            </a:endParaRPr>
+          </a:p>
+          <a:p>
+            <a:pPr algn="just"/>
+            <a:r>
+              <a:rPr lang="en-US" b="1" dirty="0">
+                <a:latin typeface="Verdana" panose="020B0604030504040204" pitchFamily="34" charset="0"/>
+                <a:ea typeface="Verdana" panose="020B0604030504040204" pitchFamily="34" charset="0"/>
+              </a:rPr>
+              <a:t>Feasibility Testing:</a:t>
+            </a:r>
+          </a:p>
+          <a:p>
+            <a:pPr algn="just"/>
+            <a:r>
+              <a:rPr lang="en-US" sz="1600" dirty="0">
+                <a:latin typeface="Verdana" panose="020B0604030504040204" pitchFamily="34" charset="0"/>
+                <a:ea typeface="Verdana" panose="020B0604030504040204" pitchFamily="34" charset="0"/>
+              </a:rPr>
+              <a:t>Checking if new routes to distant towns (e.g., Rewari) are viable within time limits.</a:t>
+            </a:r>
+          </a:p>
+        </p:txBody>
+      </p:sp>
+      <p:sp>
+        <p:nvSpPr>
+          <p:cNvPr id="13" name="TextBox 12">
+            <a:extLst>
+              <a:ext uri="{FF2B5EF4-FFF2-40B4-BE49-F238E27FC236}">
+                <a16:creationId xmlns:a16="http://schemas.microsoft.com/office/drawing/2014/main" id="{91B47245-5C2C-523B-2677-E059C6B519A1}"/>
+              </a:ext>
+            </a:extLst>
+          </p:cNvPr>
+          <p:cNvSpPr txBox="1"/>
+          <p:nvPr/>
+        </p:nvSpPr>
+        <p:spPr>
+          <a:xfrm>
+            <a:off x="4716017" y="1838725"/>
+            <a:ext cx="4176464" cy="3200876"/>
           </a:xfrm>
           <a:prstGeom prst="rect">
             <a:avLst/>
@@ -6022,42 +6501,79 @@
           </a:bodyPr>
           <a:lstStyle/>
           <a:p>
-            <a:pPr marL="0" marR="0" algn="just" fontAlgn="base">
-              <a:lnSpc>
-                <a:spcPct val="107000"/>
-              </a:lnSpc>
-              <a:spcBef>
-                <a:spcPts val="0"/>
-              </a:spcBef>
-              <a:spcAft>
-                <a:spcPts val="0"/>
-              </a:spcAft>
+            <a:pPr algn="just">
+              <a:buNone/>
             </a:pPr>
             <a:r>
-              <a:rPr lang="en-US" sz="1800" kern="100" dirty="0">
-                <a:solidFill>
-                  <a:srgbClr val="000000"/>
-                </a:solidFill>
-                <a:effectLst/>
-                <a:latin typeface="Verdana" panose="020B0604030504040204" pitchFamily="34" charset="0"/>
-                <a:ea typeface="Times New Roman" panose="02020603050405020304" pitchFamily="18" charset="0"/>
-                <a:cs typeface="Times New Roman" panose="02020603050405020304" pitchFamily="18" charset="0"/>
-              </a:rPr>
-              <a:t> </a:t>
-            </a:r>
-            <a:endParaRPr lang="en-US" sz="2800" kern="100" dirty="0">
-              <a:effectLst/>
-              <a:latin typeface="+mj-lt"/>
-              <a:ea typeface="Calibri" panose="020F0502020204030204" pitchFamily="34" charset="0"/>
-              <a:cs typeface="Times New Roman" panose="02020603050405020304" pitchFamily="18" charset="0"/>
+              <a:rPr lang="en-US" b="1" dirty="0">
+                <a:latin typeface="Verdana" panose="020B0604030504040204" pitchFamily="34" charset="0"/>
+                <a:ea typeface="Verdana" panose="020B0604030504040204" pitchFamily="34" charset="0"/>
+              </a:rPr>
+              <a:t>Scope:</a:t>
+            </a:r>
+          </a:p>
+          <a:p>
+            <a:pPr algn="just">
+              <a:buNone/>
+            </a:pPr>
+            <a:endParaRPr lang="en-US" dirty="0">
+              <a:latin typeface="Verdana" panose="020B0604030504040204" pitchFamily="34" charset="0"/>
+              <a:ea typeface="Verdana" panose="020B0604030504040204" pitchFamily="34" charset="0"/>
             </a:endParaRPr>
+          </a:p>
+          <a:p>
+            <a:pPr algn="just"/>
+            <a:r>
+              <a:rPr lang="en-US" b="1" dirty="0">
+                <a:latin typeface="Verdana" panose="020B0604030504040204" pitchFamily="34" charset="0"/>
+                <a:ea typeface="Verdana" panose="020B0604030504040204" pitchFamily="34" charset="0"/>
+              </a:rPr>
+              <a:t>Geographic:</a:t>
+            </a:r>
+          </a:p>
+          <a:p>
+            <a:pPr algn="just"/>
+            <a:r>
+              <a:rPr lang="en-US" sz="1600" dirty="0">
+                <a:latin typeface="Verdana" panose="020B0604030504040204" pitchFamily="34" charset="0"/>
+                <a:ea typeface="Verdana" panose="020B0604030504040204" pitchFamily="34" charset="0"/>
+              </a:rPr>
+              <a:t>Covers the entire K.R. Mangalam University catchment area (Sohna, Gurugram, Faridabad, Noida, Palwal, Bhiwadi).</a:t>
+            </a:r>
+          </a:p>
+          <a:p>
+            <a:pPr algn="just"/>
+            <a:endParaRPr lang="en-US" dirty="0">
+              <a:latin typeface="Verdana" panose="020B0604030504040204" pitchFamily="34" charset="0"/>
+              <a:ea typeface="Verdana" panose="020B0604030504040204" pitchFamily="34" charset="0"/>
+            </a:endParaRPr>
+          </a:p>
+          <a:p>
+            <a:pPr algn="just"/>
+            <a:r>
+              <a:rPr lang="en-US" b="1" dirty="0">
+                <a:latin typeface="Verdana" panose="020B0604030504040204" pitchFamily="34" charset="0"/>
+                <a:ea typeface="Verdana" panose="020B0604030504040204" pitchFamily="34" charset="0"/>
+              </a:rPr>
+              <a:t>Operational:</a:t>
+            </a:r>
+          </a:p>
+          <a:p>
+            <a:pPr algn="just"/>
+            <a:r>
+              <a:rPr lang="en-US" sz="1600" dirty="0">
+                <a:latin typeface="Verdana" panose="020B0604030504040204" pitchFamily="34" charset="0"/>
+                <a:ea typeface="Verdana" panose="020B0604030504040204" pitchFamily="34" charset="0"/>
+              </a:rPr>
+              <a:t>Focuses on static planning and fleet scheduling (Does not include real-time GPS tracking hardware).</a:t>
+            </a:r>
           </a:p>
         </p:txBody>
       </p:sp>
     </p:spTree>
     <p:extLst>
       <p:ext uri="{BB962C8B-B14F-4D97-AF65-F5344CB8AC3E}">
-        <p14:creationId xmlns:p14="http://schemas.microsoft.com/office/powerpoint/2010/main" val="3295812248"/>
+        <p14:creationId xmlns:p14="http://schemas.microsoft.com/office/powerpoint/2010/main" val="50636341"/>
       </p:ext>
     </p:extLst>
   </p:cSld>
@@ -6084,35 +6600,6 @@
           <a:chExt cx="0" cy="0"/>
         </a:xfrm>
       </p:grpSpPr>
-      <p:pic>
-        <p:nvPicPr>
-          <p:cNvPr id="4" name="Content Placeholder 3"/>
-          <p:cNvPicPr>
-            <a:picLocks noGrp="1" noChangeAspect="1"/>
-          </p:cNvPicPr>
-          <p:nvPr>
-            <p:ph idx="1"/>
-          </p:nvPr>
-        </p:nvPicPr>
-        <p:blipFill>
-          <a:blip r:embed="rId3" cstate="print">
-            <a:extLst>
-              <a:ext uri="{28A0092B-C50C-407E-A947-70E740481C1C}">
-                <a14:useLocalDpi xmlns:a14="http://schemas.microsoft.com/office/drawing/2010/main" val="0"/>
-              </a:ext>
-            </a:extLst>
-          </a:blip>
-          <a:stretch>
-            <a:fillRect/>
-          </a:stretch>
-        </p:blipFill>
-        <p:spPr>
-          <a:xfrm>
-            <a:off x="1" y="0"/>
-            <a:ext cx="9180512" cy="6885384"/>
-          </a:xfrm>
-        </p:spPr>
-      </p:pic>
       <p:sp>
         <p:nvSpPr>
           <p:cNvPr id="5" name="Rectangle 1"/>
@@ -6238,7 +6725,7 @@
           <p:nvPr/>
         </p:nvPicPr>
         <p:blipFill>
-          <a:blip r:embed="rId4" cstate="print">
+          <a:blip r:embed="rId3" cstate="print">
             <a:extLst>
               <a:ext uri="{28A0092B-C50C-407E-A947-70E740481C1C}">
                 <a14:useLocalDpi xmlns:a14="http://schemas.microsoft.com/office/drawing/2010/main" val="0"/>
@@ -6264,7 +6751,7 @@
           <p:cNvPr id="6" name="TextBox 5">
             <a:extLst>
               <a:ext uri="{FF2B5EF4-FFF2-40B4-BE49-F238E27FC236}">
-                <a16:creationId xmlns="" xmlns:a16="http://schemas.microsoft.com/office/drawing/2014/main" id="{AE24D516-77C6-C96A-5F77-D099623448D8}"/>
+                <a16:creationId xmlns:a16="http://schemas.microsoft.com/office/drawing/2014/main" id="{AE24D516-77C6-C96A-5F77-D099623448D8}"/>
               </a:ext>
             </a:extLst>
           </p:cNvPr>
@@ -6319,10 +6806,415 @@
           </a:p>
         </p:txBody>
       </p:sp>
+      <p:sp>
+        <p:nvSpPr>
+          <p:cNvPr id="8" name="Rectangle 1">
+            <a:extLst>
+              <a:ext uri="{FF2B5EF4-FFF2-40B4-BE49-F238E27FC236}">
+                <a16:creationId xmlns:a16="http://schemas.microsoft.com/office/drawing/2014/main" id="{E957663B-6BC8-4F3D-A957-AC5BC6E725B5}"/>
+              </a:ext>
+            </a:extLst>
+          </p:cNvPr>
+          <p:cNvSpPr>
+            <a:spLocks noGrp="1" noChangeArrowheads="1"/>
+          </p:cNvSpPr>
+          <p:nvPr>
+            <p:ph idx="1"/>
+          </p:nvPr>
+        </p:nvSpPr>
+        <p:spPr bwMode="auto">
+          <a:xfrm>
+            <a:off x="462372" y="1961835"/>
+            <a:ext cx="8219256" cy="3447098"/>
+          </a:xfrm>
+          <a:prstGeom prst="rect">
+            <a:avLst/>
+          </a:prstGeom>
+          <a:noFill/>
+          <a:ln>
+            <a:noFill/>
+          </a:ln>
+          <a:effectLst/>
+          <a:extLst>
+            <a:ext uri="{909E8E84-426E-40DD-AFC4-6F175D3DCCD1}">
+              <a14:hiddenFill xmlns:a14="http://schemas.microsoft.com/office/drawing/2010/main">
+                <a:solidFill>
+                  <a:schemeClr val="accent1"/>
+                </a:solidFill>
+              </a14:hiddenFill>
+            </a:ext>
+            <a:ext uri="{91240B29-F687-4F45-9708-019B960494DF}">
+              <a14:hiddenLine xmlns:a14="http://schemas.microsoft.com/office/drawing/2010/main" w="9525">
+                <a:solidFill>
+                  <a:schemeClr val="tx1"/>
+                </a:solidFill>
+                <a:miter lim="800000"/>
+                <a:headEnd/>
+                <a:tailEnd/>
+              </a14:hiddenLine>
+            </a:ext>
+            <a:ext uri="{AF507438-7753-43E0-B8FC-AC1667EBCBE1}">
+              <a14:hiddenEffects xmlns:a14="http://schemas.microsoft.com/office/drawing/2010/main">
+                <a:effectLst>
+                  <a:outerShdw dist="35921" dir="2700000" algn="ctr" rotWithShape="0">
+                    <a:schemeClr val="bg2"/>
+                  </a:outerShdw>
+                </a:effectLst>
+              </a14:hiddenEffects>
+            </a:ext>
+          </a:extLst>
+        </p:spPr>
+        <p:txBody>
+          <a:bodyPr vert="horz" wrap="square" lIns="91440" tIns="45720" rIns="91440" bIns="45720" numCol="1" anchor="ctr" anchorCtr="0" compatLnSpc="1">
+            <a:prstTxWarp prst="textNoShape">
+              <a:avLst/>
+            </a:prstTxWarp>
+            <a:spAutoFit/>
+          </a:bodyPr>
+          <a:lstStyle/>
+          <a:p>
+            <a:pPr marL="0" marR="0" lvl="0" indent="0" algn="l" defTabSz="914400" rtl="0" eaLnBrk="0" fontAlgn="base" latinLnBrk="0" hangingPunct="0">
+              <a:lnSpc>
+                <a:spcPct val="100000"/>
+              </a:lnSpc>
+              <a:spcBef>
+                <a:spcPct val="0"/>
+              </a:spcBef>
+              <a:spcAft>
+                <a:spcPct val="0"/>
+              </a:spcAft>
+              <a:buClrTx/>
+              <a:buSzTx/>
+              <a:buNone/>
+              <a:tabLst/>
+            </a:pPr>
+            <a:r>
+              <a:rPr kumimoji="0" lang="en-US" altLang="en-US" sz="1800" b="1" i="0" u="none" strike="noStrike" cap="none" normalizeH="0" baseline="0" dirty="0">
+                <a:ln>
+                  <a:noFill/>
+                </a:ln>
+                <a:solidFill>
+                  <a:schemeClr val="tx1"/>
+                </a:solidFill>
+                <a:effectLst/>
+                <a:latin typeface="Verdana" panose="020B0604030504040204" pitchFamily="34" charset="0"/>
+                <a:ea typeface="Verdana" panose="020B0604030504040204" pitchFamily="34" charset="0"/>
+              </a:rPr>
+              <a:t>Operational Savings:</a:t>
+            </a:r>
+            <a:endParaRPr kumimoji="0" lang="en-US" altLang="en-US" sz="1800" b="0" i="0" u="none" strike="noStrike" cap="none" normalizeH="0" baseline="0" dirty="0">
+              <a:ln>
+                <a:noFill/>
+              </a:ln>
+              <a:solidFill>
+                <a:schemeClr val="tx1"/>
+              </a:solidFill>
+              <a:effectLst/>
+              <a:latin typeface="Verdana" panose="020B0604030504040204" pitchFamily="34" charset="0"/>
+              <a:ea typeface="Verdana" panose="020B0604030504040204" pitchFamily="34" charset="0"/>
+            </a:endParaRPr>
+          </a:p>
+          <a:p>
+            <a:pPr marL="0" marR="0" lvl="0" indent="0" algn="l" defTabSz="914400" rtl="0" eaLnBrk="0" fontAlgn="base" latinLnBrk="0" hangingPunct="0">
+              <a:lnSpc>
+                <a:spcPct val="100000"/>
+              </a:lnSpc>
+              <a:spcBef>
+                <a:spcPct val="0"/>
+              </a:spcBef>
+              <a:spcAft>
+                <a:spcPct val="0"/>
+              </a:spcAft>
+              <a:buClrTx/>
+              <a:buSzTx/>
+              <a:buNone/>
+              <a:tabLst/>
+            </a:pPr>
+            <a:r>
+              <a:rPr kumimoji="0" lang="en-US" altLang="en-US" sz="1600" i="0" u="none" strike="noStrike" cap="none" normalizeH="0" baseline="0" dirty="0">
+                <a:ln>
+                  <a:noFill/>
+                </a:ln>
+                <a:solidFill>
+                  <a:schemeClr val="tx1"/>
+                </a:solidFill>
+                <a:effectLst/>
+                <a:latin typeface="Verdana" panose="020B0604030504040204" pitchFamily="34" charset="0"/>
+                <a:ea typeface="Verdana" panose="020B0604030504040204" pitchFamily="34" charset="0"/>
+              </a:rPr>
+              <a:t>100% elimination of software licensing costs.</a:t>
+            </a:r>
+          </a:p>
+          <a:p>
+            <a:pPr marL="0" marR="0" lvl="0" indent="0" algn="l" defTabSz="914400" rtl="0" eaLnBrk="0" fontAlgn="base" latinLnBrk="0" hangingPunct="0">
+              <a:lnSpc>
+                <a:spcPct val="100000"/>
+              </a:lnSpc>
+              <a:spcBef>
+                <a:spcPct val="0"/>
+              </a:spcBef>
+              <a:spcAft>
+                <a:spcPct val="0"/>
+              </a:spcAft>
+              <a:buClrTx/>
+              <a:buSzTx/>
+              <a:buNone/>
+              <a:tabLst/>
+            </a:pPr>
+            <a:r>
+              <a:rPr kumimoji="0" lang="en-US" altLang="en-US" sz="1600" i="0" u="none" strike="noStrike" cap="none" normalizeH="0" baseline="0" dirty="0">
+                <a:ln>
+                  <a:noFill/>
+                </a:ln>
+                <a:solidFill>
+                  <a:schemeClr val="tx1"/>
+                </a:solidFill>
+                <a:effectLst/>
+                <a:latin typeface="Verdana" panose="020B0604030504040204" pitchFamily="34" charset="0"/>
+                <a:ea typeface="Verdana" panose="020B0604030504040204" pitchFamily="34" charset="0"/>
+              </a:rPr>
+              <a:t>Estimated 10-15% reduction in fuel consumption due to optimized paths while maintaining 100% coverage.</a:t>
+            </a:r>
+          </a:p>
+          <a:p>
+            <a:pPr marL="0" marR="0" lvl="0" indent="0" algn="l" defTabSz="914400" rtl="0" eaLnBrk="0" fontAlgn="base" latinLnBrk="0" hangingPunct="0">
+              <a:lnSpc>
+                <a:spcPct val="100000"/>
+              </a:lnSpc>
+              <a:spcBef>
+                <a:spcPct val="0"/>
+              </a:spcBef>
+              <a:spcAft>
+                <a:spcPct val="0"/>
+              </a:spcAft>
+              <a:buClrTx/>
+              <a:buSzTx/>
+              <a:buNone/>
+              <a:tabLst/>
+            </a:pPr>
+            <a:endParaRPr kumimoji="0" lang="en-US" altLang="en-US" sz="1800" b="1" i="0" u="none" strike="noStrike" cap="none" normalizeH="0" baseline="0" dirty="0">
+              <a:ln>
+                <a:noFill/>
+              </a:ln>
+              <a:solidFill>
+                <a:schemeClr val="tx1"/>
+              </a:solidFill>
+              <a:effectLst/>
+              <a:latin typeface="Verdana" panose="020B0604030504040204" pitchFamily="34" charset="0"/>
+              <a:ea typeface="Verdana" panose="020B0604030504040204" pitchFamily="34" charset="0"/>
+            </a:endParaRPr>
+          </a:p>
+          <a:p>
+            <a:pPr marL="0" marR="0" lvl="0" indent="0" algn="l" defTabSz="914400" rtl="0" eaLnBrk="0" fontAlgn="base" latinLnBrk="0" hangingPunct="0">
+              <a:lnSpc>
+                <a:spcPct val="100000"/>
+              </a:lnSpc>
+              <a:spcBef>
+                <a:spcPct val="0"/>
+              </a:spcBef>
+              <a:spcAft>
+                <a:spcPct val="0"/>
+              </a:spcAft>
+              <a:buClrTx/>
+              <a:buSzTx/>
+              <a:buNone/>
+              <a:tabLst/>
+            </a:pPr>
+            <a:r>
+              <a:rPr kumimoji="0" lang="en-US" altLang="en-US" sz="1800" b="1" i="0" u="none" strike="noStrike" cap="none" normalizeH="0" baseline="0" dirty="0">
+                <a:ln>
+                  <a:noFill/>
+                </a:ln>
+                <a:solidFill>
+                  <a:schemeClr val="tx1"/>
+                </a:solidFill>
+                <a:effectLst/>
+                <a:latin typeface="Verdana" panose="020B0604030504040204" pitchFamily="34" charset="0"/>
+                <a:ea typeface="Verdana" panose="020B0604030504040204" pitchFamily="34" charset="0"/>
+              </a:rPr>
+              <a:t>Efficiency:</a:t>
+            </a:r>
+            <a:endParaRPr kumimoji="0" lang="en-US" altLang="en-US" sz="1800" b="0" i="0" u="none" strike="noStrike" cap="none" normalizeH="0" baseline="0" dirty="0">
+              <a:ln>
+                <a:noFill/>
+              </a:ln>
+              <a:solidFill>
+                <a:schemeClr val="tx1"/>
+              </a:solidFill>
+              <a:effectLst/>
+              <a:latin typeface="Verdana" panose="020B0604030504040204" pitchFamily="34" charset="0"/>
+              <a:ea typeface="Verdana" panose="020B0604030504040204" pitchFamily="34" charset="0"/>
+            </a:endParaRPr>
+          </a:p>
+          <a:p>
+            <a:pPr marL="0" marR="0" lvl="0" indent="0" algn="l" defTabSz="914400" rtl="0" eaLnBrk="0" fontAlgn="base" latinLnBrk="0" hangingPunct="0">
+              <a:lnSpc>
+                <a:spcPct val="100000"/>
+              </a:lnSpc>
+              <a:spcBef>
+                <a:spcPct val="0"/>
+              </a:spcBef>
+              <a:spcAft>
+                <a:spcPct val="0"/>
+              </a:spcAft>
+              <a:buClrTx/>
+              <a:buSzTx/>
+              <a:buNone/>
+              <a:tabLst/>
+            </a:pPr>
+            <a:r>
+              <a:rPr kumimoji="0" lang="en-US" altLang="en-US" sz="1600" b="0" i="0" u="none" strike="noStrike" cap="none" normalizeH="0" baseline="0" dirty="0">
+                <a:ln>
+                  <a:noFill/>
+                </a:ln>
+                <a:solidFill>
+                  <a:schemeClr val="tx1"/>
+                </a:solidFill>
+                <a:effectLst/>
+                <a:latin typeface="Verdana" panose="020B0604030504040204" pitchFamily="34" charset="0"/>
+                <a:ea typeface="Verdana" panose="020B0604030504040204" pitchFamily="34" charset="0"/>
+              </a:rPr>
+              <a:t>Reduction in manual planning time from weeks to minutes.</a:t>
+            </a:r>
+          </a:p>
+          <a:p>
+            <a:pPr marL="0" marR="0" lvl="0" indent="0" algn="l" defTabSz="914400" rtl="0" eaLnBrk="0" fontAlgn="base" latinLnBrk="0" hangingPunct="0">
+              <a:lnSpc>
+                <a:spcPct val="100000"/>
+              </a:lnSpc>
+              <a:spcBef>
+                <a:spcPct val="0"/>
+              </a:spcBef>
+              <a:spcAft>
+                <a:spcPct val="0"/>
+              </a:spcAft>
+              <a:buClrTx/>
+              <a:buSzTx/>
+              <a:buNone/>
+              <a:tabLst/>
+            </a:pPr>
+            <a:r>
+              <a:rPr kumimoji="0" lang="en-US" altLang="en-US" sz="1600" b="0" i="0" u="none" strike="noStrike" cap="none" normalizeH="0" baseline="0" dirty="0">
+                <a:ln>
+                  <a:noFill/>
+                </a:ln>
+                <a:solidFill>
+                  <a:schemeClr val="tx1"/>
+                </a:solidFill>
+                <a:effectLst/>
+                <a:latin typeface="Verdana" panose="020B0604030504040204" pitchFamily="34" charset="0"/>
+                <a:ea typeface="Verdana" panose="020B0604030504040204" pitchFamily="34" charset="0"/>
+              </a:rPr>
+              <a:t>Balanced passenger loads via dynamic split-delivery logic, preventing overcrowding on popular routes.</a:t>
+            </a:r>
+          </a:p>
+          <a:p>
+            <a:pPr marL="0" marR="0" lvl="0" indent="0" algn="l" defTabSz="914400" rtl="0" eaLnBrk="0" fontAlgn="base" latinLnBrk="0" hangingPunct="0">
+              <a:lnSpc>
+                <a:spcPct val="100000"/>
+              </a:lnSpc>
+              <a:spcBef>
+                <a:spcPct val="0"/>
+              </a:spcBef>
+              <a:spcAft>
+                <a:spcPct val="0"/>
+              </a:spcAft>
+              <a:buClrTx/>
+              <a:buSzTx/>
+              <a:buNone/>
+              <a:tabLst/>
+            </a:pPr>
+            <a:endParaRPr kumimoji="0" lang="en-US" altLang="en-US" sz="1800" b="1" i="0" u="none" strike="noStrike" cap="none" normalizeH="0" baseline="0" dirty="0">
+              <a:ln>
+                <a:noFill/>
+              </a:ln>
+              <a:solidFill>
+                <a:schemeClr val="tx1"/>
+              </a:solidFill>
+              <a:effectLst/>
+              <a:latin typeface="Verdana" panose="020B0604030504040204" pitchFamily="34" charset="0"/>
+              <a:ea typeface="Verdana" panose="020B0604030504040204" pitchFamily="34" charset="0"/>
+            </a:endParaRPr>
+          </a:p>
+          <a:p>
+            <a:pPr marL="0" marR="0" lvl="0" indent="0" algn="l" defTabSz="914400" rtl="0" eaLnBrk="0" fontAlgn="base" latinLnBrk="0" hangingPunct="0">
+              <a:lnSpc>
+                <a:spcPct val="100000"/>
+              </a:lnSpc>
+              <a:spcBef>
+                <a:spcPct val="0"/>
+              </a:spcBef>
+              <a:spcAft>
+                <a:spcPct val="0"/>
+              </a:spcAft>
+              <a:buClrTx/>
+              <a:buSzTx/>
+              <a:buNone/>
+              <a:tabLst/>
+            </a:pPr>
+            <a:r>
+              <a:rPr kumimoji="0" lang="en-US" altLang="en-US" sz="1800" b="1" i="0" u="none" strike="noStrike" cap="none" normalizeH="0" baseline="0" dirty="0">
+                <a:ln>
+                  <a:noFill/>
+                </a:ln>
+                <a:solidFill>
+                  <a:schemeClr val="tx1"/>
+                </a:solidFill>
+                <a:effectLst/>
+                <a:latin typeface="Verdana" panose="020B0604030504040204" pitchFamily="34" charset="0"/>
+                <a:ea typeface="Verdana" panose="020B0604030504040204" pitchFamily="34" charset="0"/>
+              </a:rPr>
+              <a:t>Sustainability:</a:t>
+            </a:r>
+            <a:endParaRPr kumimoji="0" lang="en-US" altLang="en-US" sz="1800" b="0" i="0" u="none" strike="noStrike" cap="none" normalizeH="0" baseline="0" dirty="0">
+              <a:ln>
+                <a:noFill/>
+              </a:ln>
+              <a:solidFill>
+                <a:schemeClr val="tx1"/>
+              </a:solidFill>
+              <a:effectLst/>
+              <a:latin typeface="Verdana" panose="020B0604030504040204" pitchFamily="34" charset="0"/>
+              <a:ea typeface="Verdana" panose="020B0604030504040204" pitchFamily="34" charset="0"/>
+            </a:endParaRPr>
+          </a:p>
+          <a:p>
+            <a:pPr marL="0" marR="0" lvl="0" indent="0" algn="l" defTabSz="914400" rtl="0" eaLnBrk="0" fontAlgn="base" latinLnBrk="0" hangingPunct="0">
+              <a:lnSpc>
+                <a:spcPct val="100000"/>
+              </a:lnSpc>
+              <a:spcBef>
+                <a:spcPct val="0"/>
+              </a:spcBef>
+              <a:spcAft>
+                <a:spcPct val="0"/>
+              </a:spcAft>
+              <a:buClrTx/>
+              <a:buSzTx/>
+              <a:buNone/>
+              <a:tabLst/>
+            </a:pPr>
+            <a:r>
+              <a:rPr kumimoji="0" lang="en-US" altLang="en-US" sz="1600" b="0" i="0" u="none" strike="noStrike" cap="none" normalizeH="0" baseline="0" dirty="0">
+                <a:ln>
+                  <a:noFill/>
+                </a:ln>
+                <a:solidFill>
+                  <a:schemeClr val="tx1"/>
+                </a:solidFill>
+                <a:effectLst/>
+                <a:latin typeface="Verdana" panose="020B0604030504040204" pitchFamily="34" charset="0"/>
+                <a:ea typeface="Verdana" panose="020B0604030504040204" pitchFamily="34" charset="0"/>
+              </a:rPr>
+              <a:t>Reduction in carbon footprint by minimizing deadhead (empty) kilometers and eliminating unnecessary U-turns and backtracking.</a:t>
+            </a:r>
+          </a:p>
+        </p:txBody>
+      </p:sp>
     </p:spTree>
     <p:extLst>
       <p:ext uri="{BB962C8B-B14F-4D97-AF65-F5344CB8AC3E}">
-        <p14:creationId xmlns:p14="http://schemas.microsoft.com/office/powerpoint/2010/main" val="256260487"/>
+        <p14:creationId xmlns:p14="http://schemas.microsoft.com/office/powerpoint/2010/main" val="2395047601"/>
       </p:ext>
     </p:extLst>
   </p:cSld>
@@ -6528,7 +7420,7 @@
         </p:nvCxnSpPr>
         <p:spPr>
           <a:xfrm>
-            <a:off x="1565174" y="2204864"/>
+            <a:off x="1520415" y="2060848"/>
             <a:ext cx="6306546" cy="0"/>
           </a:xfrm>
           <a:prstGeom prst="line">
@@ -6588,7 +7480,7 @@
         </p:nvSpPr>
         <p:spPr>
           <a:xfrm>
-            <a:off x="222061" y="2367609"/>
+            <a:off x="236440" y="2219553"/>
             <a:ext cx="8784976" cy="830997"/>
           </a:xfrm>
           <a:prstGeom prst="rect">
@@ -6606,7 +7498,7 @@
               <a:buSzPct val="25000"/>
             </a:pPr>
             <a:r>
-              <a:rPr lang="en-IN" sz="2400" b="1" dirty="0" smtClean="0">
+              <a:rPr lang="en-IN" sz="2400" b="1" dirty="0">
                 <a:solidFill>
                   <a:srgbClr val="0070C0"/>
                 </a:solidFill>
@@ -6614,18 +7506,7 @@
                 <a:cs typeface="Times New Roman" panose="02020603050405020304" pitchFamily="18" charset="0"/>
                 <a:sym typeface="Arial"/>
               </a:rPr>
-              <a:t>Final </a:t>
-            </a:r>
-            <a:r>
-              <a:rPr lang="en-IN" sz="2400" b="1" dirty="0">
-                <a:solidFill>
-                  <a:srgbClr val="0070C0"/>
-                </a:solidFill>
-                <a:ea typeface="Cambria" panose="02040503050406030204" pitchFamily="18" charset="0"/>
-                <a:cs typeface="Times New Roman" panose="02020603050405020304" pitchFamily="18" charset="0"/>
-                <a:sym typeface="Arial"/>
-              </a:rPr>
-              <a:t>Year Project Progress</a:t>
+              <a:t>Pre-Final Year Project Synopsis</a:t>
             </a:r>
           </a:p>
           <a:p>
@@ -6651,24 +7532,18 @@
           <p:cNvPr id="2" name="Table 2">
             <a:extLst>
               <a:ext uri="{FF2B5EF4-FFF2-40B4-BE49-F238E27FC236}">
-                <a16:creationId xmlns="" xmlns:a16="http://schemas.microsoft.com/office/drawing/2014/main" id="{232DFD41-0025-28B4-FE3B-A54FAEE28F42}"/>
+                <a16:creationId xmlns:a16="http://schemas.microsoft.com/office/drawing/2014/main" id="{232DFD41-0025-28B4-FE3B-A54FAEE28F42}"/>
               </a:ext>
             </a:extLst>
           </p:cNvPr>
           <p:cNvGraphicFramePr>
             <a:graphicFrameLocks noGrp="1"/>
           </p:cNvGraphicFramePr>
-          <p:nvPr>
-            <p:extLst>
-              <p:ext uri="{D42A27DB-BD31-4B8C-83A1-F6EECF244321}">
-                <p14:modId xmlns:p14="http://schemas.microsoft.com/office/powerpoint/2010/main" val="3908442984"/>
-              </p:ext>
-            </p:extLst>
-          </p:nvPr>
+          <p:nvPr/>
         </p:nvGraphicFramePr>
         <p:xfrm>
-          <a:off x="1670447" y="3505366"/>
-          <a:ext cx="6096000" cy="1097280"/>
+          <a:off x="1696134" y="3086002"/>
+          <a:ext cx="6096000" cy="2225040"/>
         </p:xfrm>
         <a:graphic>
           <a:graphicData uri="http://schemas.openxmlformats.org/drawingml/2006/table">
@@ -6680,19 +7555,19 @@
                 <a:gridCol w="3048000">
                   <a:extLst>
                     <a:ext uri="{9D8B030D-6E8A-4147-A177-3AD203B41FA5}">
-                      <a16:colId xmlns="" xmlns:a16="http://schemas.microsoft.com/office/drawing/2014/main" val="3537270469"/>
+                      <a16:colId xmlns:a16="http://schemas.microsoft.com/office/drawing/2014/main" val="3537270469"/>
                     </a:ext>
                   </a:extLst>
                 </a:gridCol>
                 <a:gridCol w="3048000">
                   <a:extLst>
                     <a:ext uri="{9D8B030D-6E8A-4147-A177-3AD203B41FA5}">
-                      <a16:colId xmlns="" xmlns:a16="http://schemas.microsoft.com/office/drawing/2014/main" val="3305024946"/>
+                      <a16:colId xmlns:a16="http://schemas.microsoft.com/office/drawing/2014/main" val="3305024946"/>
                     </a:ext>
                   </a:extLst>
                 </a:gridCol>
               </a:tblGrid>
-              <a:tr h="365760">
+              <a:tr h="370840">
                 <a:tc>
                   <a:txBody>
                     <a:bodyPr/>
@@ -6705,7 +7580,7 @@
                       </a:r>
                     </a:p>
                   </a:txBody>
-                  <a:tcPr anchor="ctr"/>
+                  <a:tcPr/>
                 </a:tc>
                 <a:tc>
                   <a:txBody>
@@ -6723,65 +7598,172 @@
                 </a:tc>
                 <a:extLst>
                   <a:ext uri="{0D108BD9-81ED-4DB2-BD59-A6C34878D82A}">
-                    <a16:rowId xmlns="" xmlns:a16="http://schemas.microsoft.com/office/drawing/2014/main" val="1765898331"/>
+                    <a16:rowId xmlns:a16="http://schemas.microsoft.com/office/drawing/2014/main" val="1765898331"/>
                   </a:ext>
                 </a:extLst>
               </a:tr>
-              <a:tr h="365760">
+              <a:tr h="370840">
                 <a:tc>
                   <a:txBody>
                     <a:bodyPr/>
                     <a:lstStyle/>
                     <a:p>
-                      <a:pPr algn="ctr"/>
-                      <a:endParaRPr lang="en-US" dirty="0"/>
+                      <a:r>
+                        <a:rPr lang="en-US" dirty="0"/>
+                        <a:t>2401830002</a:t>
+                      </a:r>
                     </a:p>
                   </a:txBody>
-                  <a:tcPr anchor="ctr"/>
+                  <a:tcPr/>
                 </a:tc>
                 <a:tc>
                   <a:txBody>
                     <a:bodyPr/>
                     <a:lstStyle/>
                     <a:p>
-                      <a:pPr algn="ctr"/>
-                      <a:endParaRPr lang="en-US" dirty="0"/>
+                      <a:r>
+                        <a:rPr lang="en-US" dirty="0"/>
+                        <a:t>Naman Katewa</a:t>
+                      </a:r>
                     </a:p>
                   </a:txBody>
-                  <a:tcPr anchor="ctr"/>
+                  <a:tcPr/>
                 </a:tc>
                 <a:extLst>
                   <a:ext uri="{0D108BD9-81ED-4DB2-BD59-A6C34878D82A}">
-                    <a16:rowId xmlns="" xmlns:a16="http://schemas.microsoft.com/office/drawing/2014/main" val="4176101868"/>
+                    <a16:rowId xmlns:a16="http://schemas.microsoft.com/office/drawing/2014/main" val="4176101868"/>
                   </a:ext>
                 </a:extLst>
               </a:tr>
-              <a:tr h="365760">
+              <a:tr h="370840">
                 <a:tc>
                   <a:txBody>
                     <a:bodyPr/>
                     <a:lstStyle/>
                     <a:p>
-                      <a:pPr algn="ctr"/>
-                      <a:endParaRPr lang="en-US" dirty="0"/>
+                      <a:r>
+                        <a:rPr lang="en-US" dirty="0"/>
+                        <a:t>2401840003</a:t>
+                      </a:r>
                     </a:p>
                   </a:txBody>
-                  <a:tcPr anchor="ctr"/>
+                  <a:tcPr/>
                 </a:tc>
                 <a:tc>
                   <a:txBody>
                     <a:bodyPr/>
                     <a:lstStyle/>
                     <a:p>
-                      <a:pPr algn="ctr"/>
-                      <a:endParaRPr lang="en-US" dirty="0"/>
+                      <a:r>
+                        <a:rPr lang="en-US" dirty="0"/>
+                        <a:t>Sneha Yadav</a:t>
+                      </a:r>
                     </a:p>
                   </a:txBody>
-                  <a:tcPr anchor="ctr"/>
+                  <a:tcPr/>
                 </a:tc>
                 <a:extLst>
                   <a:ext uri="{0D108BD9-81ED-4DB2-BD59-A6C34878D82A}">
-                    <a16:rowId xmlns="" xmlns:a16="http://schemas.microsoft.com/office/drawing/2014/main" val="1958206324"/>
+                    <a16:rowId xmlns:a16="http://schemas.microsoft.com/office/drawing/2014/main" val="1958206324"/>
+                  </a:ext>
+                </a:extLst>
+              </a:tr>
+              <a:tr h="370840">
+                <a:tc>
+                  <a:txBody>
+                    <a:bodyPr/>
+                    <a:lstStyle/>
+                    <a:p>
+                      <a:r>
+                        <a:rPr lang="en-US" dirty="0"/>
+                        <a:t>2401840006</a:t>
+                      </a:r>
+                    </a:p>
+                  </a:txBody>
+                  <a:tcPr/>
+                </a:tc>
+                <a:tc>
+                  <a:txBody>
+                    <a:bodyPr/>
+                    <a:lstStyle/>
+                    <a:p>
+                      <a:r>
+                        <a:rPr lang="en-US" dirty="0"/>
+                        <a:t>Akshaya Tanwar</a:t>
+                      </a:r>
+                    </a:p>
+                  </a:txBody>
+                  <a:tcPr/>
+                </a:tc>
+                <a:extLst>
+                  <a:ext uri="{0D108BD9-81ED-4DB2-BD59-A6C34878D82A}">
+                    <a16:rowId xmlns:a16="http://schemas.microsoft.com/office/drawing/2014/main" val="441949598"/>
+                  </a:ext>
+                </a:extLst>
+              </a:tr>
+              <a:tr h="370840">
+                <a:tc>
+                  <a:txBody>
+                    <a:bodyPr/>
+                    <a:lstStyle/>
+                    <a:p>
+                      <a:r>
+                        <a:rPr lang="en-US" dirty="0"/>
+                        <a:t>2401840008</a:t>
+                      </a:r>
+                    </a:p>
+                  </a:txBody>
+                  <a:tcPr/>
+                </a:tc>
+                <a:tc>
+                  <a:txBody>
+                    <a:bodyPr/>
+                    <a:lstStyle/>
+                    <a:p>
+                      <a:r>
+                        <a:rPr lang="en-US" dirty="0"/>
+                        <a:t>Nikita Saharan</a:t>
+                      </a:r>
+                    </a:p>
+                  </a:txBody>
+                  <a:tcPr/>
+                </a:tc>
+                <a:extLst>
+                  <a:ext uri="{0D108BD9-81ED-4DB2-BD59-A6C34878D82A}">
+                    <a16:rowId xmlns:a16="http://schemas.microsoft.com/office/drawing/2014/main" val="3043375068"/>
+                  </a:ext>
+                </a:extLst>
+              </a:tr>
+              <a:tr h="370840">
+                <a:tc>
+                  <a:txBody>
+                    <a:bodyPr/>
+                    <a:lstStyle/>
+                    <a:p>
+                      <a:r>
+                        <a:rPr lang="en-US" dirty="0"/>
+                        <a:t>2401720014</a:t>
+                      </a:r>
+                    </a:p>
+                  </a:txBody>
+                  <a:tcPr/>
+                </a:tc>
+                <a:tc>
+                  <a:txBody>
+                    <a:bodyPr/>
+                    <a:lstStyle/>
+                    <a:p>
+                      <a:r>
+                        <a:rPr lang="en-US" dirty="0"/>
+                        <a:t>Kartikeya Drall</a:t>
+                      </a:r>
+                    </a:p>
+                  </a:txBody>
+                  <a:tcPr/>
+                </a:tc>
+                <a:extLst>
+                  <a:ext uri="{0D108BD9-81ED-4DB2-BD59-A6C34878D82A}">
+                    <a16:rowId xmlns:a16="http://schemas.microsoft.com/office/drawing/2014/main" val="2943472739"/>
                   </a:ext>
                 </a:extLst>
               </a:tr>
@@ -6794,7 +7776,7 @@
           <p:cNvPr id="5" name="TextBox 4">
             <a:extLst>
               <a:ext uri="{FF2B5EF4-FFF2-40B4-BE49-F238E27FC236}">
-                <a16:creationId xmlns="" xmlns:a16="http://schemas.microsoft.com/office/drawing/2014/main" id="{3DF18845-4075-32C5-8F4A-4F40F86E837F}"/>
+                <a16:creationId xmlns:a16="http://schemas.microsoft.com/office/drawing/2014/main" id="{3DF18845-4075-32C5-8F4A-4F40F86E837F}"/>
               </a:ext>
             </a:extLst>
           </p:cNvPr>
@@ -6803,8 +7785,8 @@
         </p:nvSpPr>
         <p:spPr>
           <a:xfrm>
-            <a:off x="1414310" y="1372508"/>
-            <a:ext cx="6608273" cy="707886"/>
+            <a:off x="236441" y="1212054"/>
+            <a:ext cx="8584032" cy="707886"/>
           </a:xfrm>
           <a:prstGeom prst="rect">
             <a:avLst/>
@@ -6829,7 +7811,7 @@
                 <a:cs typeface="Times New Roman" panose="02020603050405020304" pitchFamily="18" charset="0"/>
                 <a:sym typeface="Arial"/>
               </a:rPr>
-              <a:t>Project Title</a:t>
+              <a:t>University Fleet Optimization System</a:t>
             </a:r>
           </a:p>
         </p:txBody>
@@ -6839,7 +7821,7 @@
           <p:cNvPr id="8" name="TextBox 7">
             <a:extLst>
               <a:ext uri="{FF2B5EF4-FFF2-40B4-BE49-F238E27FC236}">
-                <a16:creationId xmlns="" xmlns:a16="http://schemas.microsoft.com/office/drawing/2014/main" id="{40D4C745-33B7-0116-E20F-11A7F0DFD46F}"/>
+                <a16:creationId xmlns:a16="http://schemas.microsoft.com/office/drawing/2014/main" id="{40D4C745-33B7-0116-E20F-11A7F0DFD46F}"/>
               </a:ext>
             </a:extLst>
           </p:cNvPr>
@@ -6849,7 +7831,7 @@
         <p:spPr>
           <a:xfrm>
             <a:off x="236440" y="5733256"/>
-            <a:ext cx="8584032" cy="646331"/>
+            <a:ext cx="8584032" cy="369332"/>
           </a:xfrm>
           <a:prstGeom prst="rect">
             <a:avLst/>
@@ -6866,7 +7848,7 @@
               <a:buSzPct val="25000"/>
             </a:pPr>
             <a:r>
-              <a:rPr lang="en-IN" sz="1800" b="1" dirty="0">
+              <a:rPr lang="en-IN" b="1" dirty="0">
                 <a:solidFill>
                   <a:srgbClr val="0070C0"/>
                 </a:solidFill>
@@ -6874,13 +7856,8 @@
                 <a:cs typeface="Times New Roman" panose="02020603050405020304" pitchFamily="18" charset="0"/>
                 <a:sym typeface="Arial"/>
               </a:rPr>
-              <a:t>Industry Mentor:</a:t>
-            </a:r>
-          </a:p>
-          <a:p>
-            <a:pPr lvl="0">
-              <a:buSzPct val="25000"/>
-            </a:pPr>
+              <a:t>Faculty Mentor:</a:t>
+            </a:r>
             <a:r>
               <a:rPr lang="en-IN" sz="1800" b="1" dirty="0">
                 <a:solidFill>
@@ -6901,7 +7878,7 @@
                 <a:cs typeface="Times New Roman" panose="02020603050405020304" pitchFamily="18" charset="0"/>
                 <a:sym typeface="Arial"/>
               </a:rPr>
-              <a:t>Faculty Mentor:</a:t>
+              <a:t>Ms. Rishika Mehta</a:t>
             </a:r>
             <a:endParaRPr lang="en-IN" sz="1800" b="1" dirty="0">
               <a:solidFill>
@@ -6917,7 +7894,7 @@
     </p:spTree>
     <p:extLst>
       <p:ext uri="{BB962C8B-B14F-4D97-AF65-F5344CB8AC3E}">
-        <p14:creationId xmlns:p14="http://schemas.microsoft.com/office/powerpoint/2010/main" val="4142536426"/>
+        <p14:creationId xmlns:p14="http://schemas.microsoft.com/office/powerpoint/2010/main" val="1642274509"/>
       </p:ext>
     </p:extLst>
   </p:cSld>
@@ -6944,35 +7921,6 @@
           <a:chExt cx="0" cy="0"/>
         </a:xfrm>
       </p:grpSpPr>
-      <p:pic>
-        <p:nvPicPr>
-          <p:cNvPr id="4" name="Content Placeholder 3"/>
-          <p:cNvPicPr>
-            <a:picLocks noGrp="1" noChangeAspect="1"/>
-          </p:cNvPicPr>
-          <p:nvPr>
-            <p:ph idx="1"/>
-          </p:nvPr>
-        </p:nvPicPr>
-        <p:blipFill>
-          <a:blip r:embed="rId3" cstate="print">
-            <a:extLst>
-              <a:ext uri="{28A0092B-C50C-407E-A947-70E740481C1C}">
-                <a14:useLocalDpi xmlns:a14="http://schemas.microsoft.com/office/drawing/2010/main" val="0"/>
-              </a:ext>
-            </a:extLst>
-          </a:blip>
-          <a:stretch>
-            <a:fillRect/>
-          </a:stretch>
-        </p:blipFill>
-        <p:spPr>
-          <a:xfrm>
-            <a:off x="1" y="0"/>
-            <a:ext cx="9180512" cy="6885384"/>
-          </a:xfrm>
-        </p:spPr>
-      </p:pic>
       <p:sp>
         <p:nvSpPr>
           <p:cNvPr id="5" name="Rectangle 1"/>
@@ -7098,7 +8046,7 @@
           <p:nvPr/>
         </p:nvPicPr>
         <p:blipFill>
-          <a:blip r:embed="rId4" cstate="print">
+          <a:blip r:embed="rId3" cstate="print">
             <a:extLst>
               <a:ext uri="{28A0092B-C50C-407E-A947-70E740481C1C}">
                 <a14:useLocalDpi xmlns:a14="http://schemas.microsoft.com/office/drawing/2010/main" val="0"/>
@@ -7119,10 +8067,426 @@
           </a:prstGeom>
         </p:spPr>
       </p:pic>
+      <p:sp>
+        <p:nvSpPr>
+          <p:cNvPr id="12" name="Rectangle 3">
+            <a:extLst>
+              <a:ext uri="{FF2B5EF4-FFF2-40B4-BE49-F238E27FC236}">
+                <a16:creationId xmlns:a16="http://schemas.microsoft.com/office/drawing/2014/main" id="{C01F9148-249C-53EB-C9D8-998CE4283F51}"/>
+              </a:ext>
+            </a:extLst>
+          </p:cNvPr>
+          <p:cNvSpPr>
+            <a:spLocks noGrp="1" noChangeArrowheads="1"/>
+          </p:cNvSpPr>
+          <p:nvPr>
+            <p:ph idx="1"/>
+          </p:nvPr>
+        </p:nvSpPr>
+        <p:spPr bwMode="auto">
+          <a:xfrm>
+            <a:off x="755576" y="1386529"/>
+            <a:ext cx="7725437" cy="4678204"/>
+          </a:xfrm>
+          <a:prstGeom prst="rect">
+            <a:avLst/>
+          </a:prstGeom>
+          <a:noFill/>
+          <a:ln>
+            <a:noFill/>
+          </a:ln>
+          <a:effectLst/>
+          <a:extLst>
+            <a:ext uri="{909E8E84-426E-40DD-AFC4-6F175D3DCCD1}">
+              <a14:hiddenFill xmlns:a14="http://schemas.microsoft.com/office/drawing/2010/main">
+                <a:solidFill>
+                  <a:schemeClr val="accent1"/>
+                </a:solidFill>
+              </a14:hiddenFill>
+            </a:ext>
+            <a:ext uri="{91240B29-F687-4F45-9708-019B960494DF}">
+              <a14:hiddenLine xmlns:a14="http://schemas.microsoft.com/office/drawing/2010/main" w="9525">
+                <a:solidFill>
+                  <a:schemeClr val="tx1"/>
+                </a:solidFill>
+                <a:miter lim="800000"/>
+                <a:headEnd/>
+                <a:tailEnd/>
+              </a14:hiddenLine>
+            </a:ext>
+            <a:ext uri="{AF507438-7753-43E0-B8FC-AC1667EBCBE1}">
+              <a14:hiddenEffects xmlns:a14="http://schemas.microsoft.com/office/drawing/2010/main">
+                <a:effectLst>
+                  <a:outerShdw dist="35921" dir="2700000" algn="ctr" rotWithShape="0">
+                    <a:schemeClr val="bg2"/>
+                  </a:outerShdw>
+                </a:effectLst>
+              </a14:hiddenEffects>
+            </a:ext>
+          </a:extLst>
+        </p:spPr>
+        <p:txBody>
+          <a:bodyPr vert="horz" wrap="square" lIns="91440" tIns="45720" rIns="91440" bIns="45720" numCol="1" anchor="ctr" anchorCtr="0" compatLnSpc="1">
+            <a:prstTxWarp prst="textNoShape">
+              <a:avLst/>
+            </a:prstTxWarp>
+            <a:spAutoFit/>
+          </a:bodyPr>
+          <a:lstStyle/>
+          <a:p>
+            <a:pPr marL="0" marR="0" lvl="0" indent="0" algn="l" defTabSz="914400" rtl="0" eaLnBrk="0" fontAlgn="base" latinLnBrk="0" hangingPunct="0">
+              <a:lnSpc>
+                <a:spcPct val="100000"/>
+              </a:lnSpc>
+              <a:spcBef>
+                <a:spcPct val="0"/>
+              </a:spcBef>
+              <a:spcAft>
+                <a:spcPct val="0"/>
+              </a:spcAft>
+              <a:buClrTx/>
+              <a:buSzTx/>
+              <a:buNone/>
+              <a:tabLst/>
+            </a:pPr>
+            <a:r>
+              <a:rPr kumimoji="0" lang="en-US" altLang="en-US" sz="1800" b="1" i="0" u="none" strike="noStrike" cap="none" normalizeH="0" baseline="0" dirty="0">
+                <a:ln>
+                  <a:noFill/>
+                </a:ln>
+                <a:solidFill>
+                  <a:schemeClr val="tx1"/>
+                </a:solidFill>
+                <a:effectLst/>
+                <a:latin typeface="Verdana" panose="020B0604030504040204" pitchFamily="34" charset="0"/>
+                <a:ea typeface="Verdana" panose="020B0604030504040204" pitchFamily="34" charset="0"/>
+              </a:rPr>
+              <a:t>The Problem:</a:t>
+            </a:r>
+            <a:endParaRPr kumimoji="0" lang="en-US" altLang="en-US" sz="1800" b="0" i="0" u="none" strike="noStrike" cap="none" normalizeH="0" baseline="0" dirty="0">
+              <a:ln>
+                <a:noFill/>
+              </a:ln>
+              <a:solidFill>
+                <a:schemeClr val="tx1"/>
+              </a:solidFill>
+              <a:effectLst/>
+              <a:latin typeface="Verdana" panose="020B0604030504040204" pitchFamily="34" charset="0"/>
+              <a:ea typeface="Verdana" panose="020B0604030504040204" pitchFamily="34" charset="0"/>
+            </a:endParaRPr>
+          </a:p>
+          <a:p>
+            <a:pPr marL="0" marR="0" lvl="0" indent="0" algn="just" defTabSz="914400" rtl="0" eaLnBrk="0" fontAlgn="base" latinLnBrk="0" hangingPunct="0">
+              <a:lnSpc>
+                <a:spcPct val="100000"/>
+              </a:lnSpc>
+              <a:spcBef>
+                <a:spcPct val="0"/>
+              </a:spcBef>
+              <a:spcAft>
+                <a:spcPct val="0"/>
+              </a:spcAft>
+              <a:buClrTx/>
+              <a:buSzTx/>
+              <a:buNone/>
+              <a:tabLst/>
+            </a:pPr>
+            <a:r>
+              <a:rPr kumimoji="0" lang="en-US" altLang="en-US" sz="1600" b="0" i="0" u="none" strike="noStrike" cap="none" normalizeH="0" baseline="0" dirty="0">
+                <a:ln>
+                  <a:noFill/>
+                </a:ln>
+                <a:solidFill>
+                  <a:schemeClr val="tx1"/>
+                </a:solidFill>
+                <a:effectLst/>
+                <a:latin typeface="Verdana" panose="020B0604030504040204" pitchFamily="34" charset="0"/>
+                <a:ea typeface="Verdana" panose="020B0604030504040204" pitchFamily="34" charset="0"/>
+              </a:rPr>
+              <a:t>Managing university transportation across a massive catchment area(Sohna, Gurugram, Faridabad, Palwal, Noida, Bhiwadi) is manually intensive.</a:t>
+            </a:r>
+          </a:p>
+          <a:p>
+            <a:pPr marL="0" marR="0" lvl="0" indent="0" algn="just" defTabSz="914400" rtl="0" eaLnBrk="0" fontAlgn="base" latinLnBrk="0" hangingPunct="0">
+              <a:lnSpc>
+                <a:spcPct val="100000"/>
+              </a:lnSpc>
+              <a:spcBef>
+                <a:spcPct val="0"/>
+              </a:spcBef>
+              <a:spcAft>
+                <a:spcPct val="0"/>
+              </a:spcAft>
+              <a:buClrTx/>
+              <a:buSzTx/>
+              <a:buNone/>
+              <a:tabLst/>
+            </a:pPr>
+            <a:r>
+              <a:rPr kumimoji="0" lang="en-US" altLang="en-US" sz="1600" b="0" i="0" u="none" strike="noStrike" cap="none" normalizeH="0" baseline="0" dirty="0">
+                <a:ln>
+                  <a:noFill/>
+                </a:ln>
+                <a:solidFill>
+                  <a:schemeClr val="tx1"/>
+                </a:solidFill>
+                <a:effectLst/>
+                <a:latin typeface="Verdana" panose="020B0604030504040204" pitchFamily="34" charset="0"/>
+                <a:ea typeface="Verdana" panose="020B0604030504040204" pitchFamily="34" charset="0"/>
+              </a:rPr>
+              <a:t>Current fixed routes lead to inefficiencies, high fuel costs, and uneven student loads.</a:t>
+            </a:r>
+          </a:p>
+          <a:p>
+            <a:pPr marL="0" marR="0" lvl="0" indent="0" algn="l" defTabSz="914400" rtl="0" eaLnBrk="0" fontAlgn="base" latinLnBrk="0" hangingPunct="0">
+              <a:lnSpc>
+                <a:spcPct val="100000"/>
+              </a:lnSpc>
+              <a:spcBef>
+                <a:spcPct val="0"/>
+              </a:spcBef>
+              <a:spcAft>
+                <a:spcPct val="0"/>
+              </a:spcAft>
+              <a:buClrTx/>
+              <a:buSzTx/>
+              <a:buNone/>
+              <a:tabLst/>
+            </a:pPr>
+            <a:endParaRPr kumimoji="0" lang="en-US" altLang="en-US" sz="1800" b="1" i="0" u="none" strike="noStrike" cap="none" normalizeH="0" baseline="0" dirty="0">
+              <a:ln>
+                <a:noFill/>
+              </a:ln>
+              <a:solidFill>
+                <a:schemeClr val="tx1"/>
+              </a:solidFill>
+              <a:effectLst/>
+              <a:latin typeface="Verdana" panose="020B0604030504040204" pitchFamily="34" charset="0"/>
+              <a:ea typeface="Verdana" panose="020B0604030504040204" pitchFamily="34" charset="0"/>
+            </a:endParaRPr>
+          </a:p>
+          <a:p>
+            <a:pPr marL="0" marR="0" lvl="0" indent="0" algn="l" defTabSz="914400" rtl="0" eaLnBrk="0" fontAlgn="base" latinLnBrk="0" hangingPunct="0">
+              <a:lnSpc>
+                <a:spcPct val="100000"/>
+              </a:lnSpc>
+              <a:spcBef>
+                <a:spcPct val="0"/>
+              </a:spcBef>
+              <a:spcAft>
+                <a:spcPct val="0"/>
+              </a:spcAft>
+              <a:buClrTx/>
+              <a:buSzTx/>
+              <a:buNone/>
+              <a:tabLst/>
+            </a:pPr>
+            <a:r>
+              <a:rPr kumimoji="0" lang="en-US" altLang="en-US" sz="1800" b="1" i="0" u="none" strike="noStrike" cap="none" normalizeH="0" baseline="0" dirty="0">
+                <a:ln>
+                  <a:noFill/>
+                </a:ln>
+                <a:solidFill>
+                  <a:schemeClr val="tx1"/>
+                </a:solidFill>
+                <a:effectLst/>
+                <a:latin typeface="Verdana" panose="020B0604030504040204" pitchFamily="34" charset="0"/>
+                <a:ea typeface="Verdana" panose="020B0604030504040204" pitchFamily="34" charset="0"/>
+              </a:rPr>
+              <a:t>The Solution:</a:t>
+            </a:r>
+            <a:endParaRPr kumimoji="0" lang="en-US" altLang="en-US" sz="1800" b="0" i="0" u="none" strike="noStrike" cap="none" normalizeH="0" baseline="0" dirty="0">
+              <a:ln>
+                <a:noFill/>
+              </a:ln>
+              <a:solidFill>
+                <a:schemeClr val="tx1"/>
+              </a:solidFill>
+              <a:effectLst/>
+              <a:latin typeface="Verdana" panose="020B0604030504040204" pitchFamily="34" charset="0"/>
+              <a:ea typeface="Verdana" panose="020B0604030504040204" pitchFamily="34" charset="0"/>
+            </a:endParaRPr>
+          </a:p>
+          <a:p>
+            <a:pPr marL="0" marR="0" lvl="0" indent="0" algn="just" defTabSz="914400" rtl="0" eaLnBrk="0" fontAlgn="base" latinLnBrk="0" hangingPunct="0">
+              <a:lnSpc>
+                <a:spcPct val="100000"/>
+              </a:lnSpc>
+              <a:spcBef>
+                <a:spcPct val="0"/>
+              </a:spcBef>
+              <a:spcAft>
+                <a:spcPct val="0"/>
+              </a:spcAft>
+              <a:buClrTx/>
+              <a:buSzTx/>
+              <a:buNone/>
+              <a:tabLst/>
+            </a:pPr>
+            <a:r>
+              <a:rPr kumimoji="0" lang="en-US" altLang="en-US" sz="1600" b="0" i="0" u="none" strike="noStrike" cap="none" normalizeH="0" baseline="0" dirty="0">
+                <a:ln>
+                  <a:noFill/>
+                </a:ln>
+                <a:solidFill>
+                  <a:schemeClr val="tx1"/>
+                </a:solidFill>
+                <a:effectLst/>
+                <a:latin typeface="Verdana" panose="020B0604030504040204" pitchFamily="34" charset="0"/>
+                <a:ea typeface="Verdana" panose="020B0604030504040204" pitchFamily="34" charset="0"/>
+              </a:rPr>
+              <a:t>A "Zero-Operational Cost" fleet management system built entirely on open-source technologies.</a:t>
+            </a:r>
+          </a:p>
+          <a:p>
+            <a:pPr marL="0" marR="0" lvl="0" indent="0" algn="just" defTabSz="914400" rtl="0" eaLnBrk="0" fontAlgn="base" latinLnBrk="0" hangingPunct="0">
+              <a:lnSpc>
+                <a:spcPct val="100000"/>
+              </a:lnSpc>
+              <a:spcBef>
+                <a:spcPct val="0"/>
+              </a:spcBef>
+              <a:spcAft>
+                <a:spcPct val="0"/>
+              </a:spcAft>
+              <a:buClrTx/>
+              <a:buSzTx/>
+              <a:buNone/>
+              <a:tabLst/>
+            </a:pPr>
+            <a:r>
+              <a:rPr kumimoji="0" lang="en-US" altLang="en-US" sz="1600" b="0" i="0" u="none" strike="noStrike" cap="none" normalizeH="0" baseline="0" dirty="0">
+                <a:ln>
+                  <a:noFill/>
+                </a:ln>
+                <a:solidFill>
+                  <a:schemeClr val="tx1"/>
+                </a:solidFill>
+                <a:effectLst/>
+                <a:latin typeface="Verdana" panose="020B0604030504040204" pitchFamily="34" charset="0"/>
+                <a:ea typeface="Verdana" panose="020B0604030504040204" pitchFamily="34" charset="0"/>
+              </a:rPr>
+              <a:t>Replaces expensive commercial APIs (Google Maps) with self-hosted routing engines.</a:t>
+            </a:r>
+            <a:endParaRPr kumimoji="0" lang="en-US" altLang="en-US" sz="1800" b="1" i="0" u="none" strike="noStrike" cap="none" normalizeH="0" baseline="0" dirty="0">
+              <a:ln>
+                <a:noFill/>
+              </a:ln>
+              <a:solidFill>
+                <a:schemeClr val="tx1"/>
+              </a:solidFill>
+              <a:effectLst/>
+              <a:latin typeface="Verdana" panose="020B0604030504040204" pitchFamily="34" charset="0"/>
+              <a:ea typeface="Verdana" panose="020B0604030504040204" pitchFamily="34" charset="0"/>
+            </a:endParaRPr>
+          </a:p>
+          <a:p>
+            <a:pPr marL="0" marR="0" lvl="0" indent="0" algn="l" defTabSz="914400" rtl="0" eaLnBrk="0" fontAlgn="base" latinLnBrk="0" hangingPunct="0">
+              <a:lnSpc>
+                <a:spcPct val="100000"/>
+              </a:lnSpc>
+              <a:spcBef>
+                <a:spcPct val="0"/>
+              </a:spcBef>
+              <a:spcAft>
+                <a:spcPct val="0"/>
+              </a:spcAft>
+              <a:buClrTx/>
+              <a:buSzTx/>
+              <a:buNone/>
+              <a:tabLst/>
+            </a:pPr>
+            <a:endParaRPr kumimoji="0" lang="en-US" altLang="en-US" sz="1800" b="1" i="0" u="none" strike="noStrike" cap="none" normalizeH="0" baseline="0" dirty="0">
+              <a:ln>
+                <a:noFill/>
+              </a:ln>
+              <a:solidFill>
+                <a:schemeClr val="tx1"/>
+              </a:solidFill>
+              <a:effectLst/>
+              <a:latin typeface="Verdana" panose="020B0604030504040204" pitchFamily="34" charset="0"/>
+              <a:ea typeface="Verdana" panose="020B0604030504040204" pitchFamily="34" charset="0"/>
+            </a:endParaRPr>
+          </a:p>
+          <a:p>
+            <a:pPr marL="0" marR="0" lvl="0" indent="0" algn="l" defTabSz="914400" rtl="0" eaLnBrk="0" fontAlgn="base" latinLnBrk="0" hangingPunct="0">
+              <a:lnSpc>
+                <a:spcPct val="100000"/>
+              </a:lnSpc>
+              <a:spcBef>
+                <a:spcPct val="0"/>
+              </a:spcBef>
+              <a:spcAft>
+                <a:spcPct val="0"/>
+              </a:spcAft>
+              <a:buClrTx/>
+              <a:buSzTx/>
+              <a:buNone/>
+              <a:tabLst/>
+            </a:pPr>
+            <a:r>
+              <a:rPr kumimoji="0" lang="en-US" altLang="en-US" sz="1800" b="1" i="0" u="none" strike="noStrike" cap="none" normalizeH="0" baseline="0" dirty="0">
+                <a:ln>
+                  <a:noFill/>
+                </a:ln>
+                <a:solidFill>
+                  <a:schemeClr val="tx1"/>
+                </a:solidFill>
+                <a:effectLst/>
+                <a:latin typeface="Verdana" panose="020B0604030504040204" pitchFamily="34" charset="0"/>
+                <a:ea typeface="Verdana" panose="020B0604030504040204" pitchFamily="34" charset="0"/>
+              </a:rPr>
+              <a:t>The Goal:</a:t>
+            </a:r>
+            <a:endParaRPr kumimoji="0" lang="en-US" altLang="en-US" sz="1800" b="0" i="0" u="none" strike="noStrike" cap="none" normalizeH="0" baseline="0" dirty="0">
+              <a:ln>
+                <a:noFill/>
+              </a:ln>
+              <a:solidFill>
+                <a:schemeClr val="tx1"/>
+              </a:solidFill>
+              <a:effectLst/>
+              <a:latin typeface="Verdana" panose="020B0604030504040204" pitchFamily="34" charset="0"/>
+              <a:ea typeface="Verdana" panose="020B0604030504040204" pitchFamily="34" charset="0"/>
+            </a:endParaRPr>
+          </a:p>
+          <a:p>
+            <a:pPr marL="0" marR="0" lvl="0" indent="0" algn="just" defTabSz="914400" rtl="0" eaLnBrk="0" fontAlgn="base" latinLnBrk="0" hangingPunct="0">
+              <a:lnSpc>
+                <a:spcPct val="100000"/>
+              </a:lnSpc>
+              <a:spcBef>
+                <a:spcPct val="0"/>
+              </a:spcBef>
+              <a:spcAft>
+                <a:spcPct val="0"/>
+              </a:spcAft>
+              <a:buClrTx/>
+              <a:buSzTx/>
+              <a:buNone/>
+              <a:tabLst/>
+            </a:pPr>
+            <a:r>
+              <a:rPr kumimoji="0" lang="en-US" altLang="en-US" sz="1600" b="0" i="0" u="none" strike="noStrike" cap="none" normalizeH="0" baseline="0" dirty="0">
+                <a:ln>
+                  <a:noFill/>
+                </a:ln>
+                <a:solidFill>
+                  <a:schemeClr val="tx1"/>
+                </a:solidFill>
+                <a:effectLst/>
+                <a:latin typeface="Verdana" panose="020B0604030504040204" pitchFamily="34" charset="0"/>
+                <a:ea typeface="Verdana" panose="020B0604030504040204" pitchFamily="34" charset="0"/>
+              </a:rPr>
+              <a:t>To automate route planning using advanced Multi-Depot Capacitated Vehicle Routing Problem with Time Windows (MD-CVRPTW). Our goal is to minimize total fleet mileage while strictly enforcing bus capacities and campus arrival deadlines.</a:t>
+            </a:r>
+          </a:p>
+        </p:txBody>
+      </p:sp>
     </p:spTree>
     <p:extLst>
       <p:ext uri="{BB962C8B-B14F-4D97-AF65-F5344CB8AC3E}">
-        <p14:creationId xmlns:p14="http://schemas.microsoft.com/office/powerpoint/2010/main" val="3353784259"/>
+        <p14:creationId xmlns:p14="http://schemas.microsoft.com/office/powerpoint/2010/main" val="4171987975"/>
       </p:ext>
     </p:extLst>
   </p:cSld>
@@ -7149,35 +8513,6 @@
           <a:chExt cx="0" cy="0"/>
         </a:xfrm>
       </p:grpSpPr>
-      <p:pic>
-        <p:nvPicPr>
-          <p:cNvPr id="4" name="Content Placeholder 3"/>
-          <p:cNvPicPr>
-            <a:picLocks noGrp="1" noChangeAspect="1"/>
-          </p:cNvPicPr>
-          <p:nvPr>
-            <p:ph idx="1"/>
-          </p:nvPr>
-        </p:nvPicPr>
-        <p:blipFill>
-          <a:blip r:embed="rId3" cstate="print">
-            <a:extLst>
-              <a:ext uri="{28A0092B-C50C-407E-A947-70E740481C1C}">
-                <a14:useLocalDpi xmlns:a14="http://schemas.microsoft.com/office/drawing/2010/main" val="0"/>
-              </a:ext>
-            </a:extLst>
-          </a:blip>
-          <a:stretch>
-            <a:fillRect/>
-          </a:stretch>
-        </p:blipFill>
-        <p:spPr>
-          <a:xfrm>
-            <a:off x="1" y="0"/>
-            <a:ext cx="9180512" cy="6885384"/>
-          </a:xfrm>
-        </p:spPr>
-      </p:pic>
       <p:sp>
         <p:nvSpPr>
           <p:cNvPr id="5" name="Rectangle 1"/>
@@ -7303,7 +8638,7 @@
           <p:nvPr/>
         </p:nvPicPr>
         <p:blipFill>
-          <a:blip r:embed="rId4" cstate="print">
+          <a:blip r:embed="rId3" cstate="print">
             <a:extLst>
               <a:ext uri="{28A0092B-C50C-407E-A947-70E740481C1C}">
                 <a14:useLocalDpi xmlns:a14="http://schemas.microsoft.com/office/drawing/2010/main" val="0"/>
@@ -7329,7 +8664,7 @@
           <p:cNvPr id="6" name="TextBox 5">
             <a:extLst>
               <a:ext uri="{FF2B5EF4-FFF2-40B4-BE49-F238E27FC236}">
-                <a16:creationId xmlns="" xmlns:a16="http://schemas.microsoft.com/office/drawing/2014/main" id="{AE24D516-77C6-C96A-5F77-D099623448D8}"/>
+                <a16:creationId xmlns:a16="http://schemas.microsoft.com/office/drawing/2014/main" id="{AE24D516-77C6-C96A-5F77-D099623448D8}"/>
               </a:ext>
             </a:extLst>
           </p:cNvPr>
@@ -7384,10 +8719,487 @@
           </a:p>
         </p:txBody>
       </p:sp>
+      <p:sp>
+        <p:nvSpPr>
+          <p:cNvPr id="8" name="Rectangle 1">
+            <a:extLst>
+              <a:ext uri="{FF2B5EF4-FFF2-40B4-BE49-F238E27FC236}">
+                <a16:creationId xmlns:a16="http://schemas.microsoft.com/office/drawing/2014/main" id="{042A318E-8EC1-F7ED-9708-F25D8CC0C0EE}"/>
+              </a:ext>
+            </a:extLst>
+          </p:cNvPr>
+          <p:cNvSpPr>
+            <a:spLocks noGrp="1" noChangeArrowheads="1"/>
+          </p:cNvSpPr>
+          <p:nvPr>
+            <p:ph idx="1"/>
+          </p:nvPr>
+        </p:nvSpPr>
+        <p:spPr bwMode="auto">
+          <a:xfrm>
+            <a:off x="462372" y="1180868"/>
+            <a:ext cx="8219256" cy="5047536"/>
+          </a:xfrm>
+          <a:prstGeom prst="rect">
+            <a:avLst/>
+          </a:prstGeom>
+          <a:noFill/>
+          <a:ln>
+            <a:noFill/>
+          </a:ln>
+          <a:effectLst/>
+          <a:extLst>
+            <a:ext uri="{909E8E84-426E-40DD-AFC4-6F175D3DCCD1}">
+              <a14:hiddenFill xmlns:a14="http://schemas.microsoft.com/office/drawing/2010/main">
+                <a:solidFill>
+                  <a:schemeClr val="accent1"/>
+                </a:solidFill>
+              </a14:hiddenFill>
+            </a:ext>
+            <a:ext uri="{91240B29-F687-4F45-9708-019B960494DF}">
+              <a14:hiddenLine xmlns:a14="http://schemas.microsoft.com/office/drawing/2010/main" w="9525">
+                <a:solidFill>
+                  <a:schemeClr val="tx1"/>
+                </a:solidFill>
+                <a:miter lim="800000"/>
+                <a:headEnd/>
+                <a:tailEnd/>
+              </a14:hiddenLine>
+            </a:ext>
+            <a:ext uri="{AF507438-7753-43E0-B8FC-AC1667EBCBE1}">
+              <a14:hiddenEffects xmlns:a14="http://schemas.microsoft.com/office/drawing/2010/main">
+                <a:effectLst>
+                  <a:outerShdw dist="35921" dir="2700000" algn="ctr" rotWithShape="0">
+                    <a:schemeClr val="bg2"/>
+                  </a:outerShdw>
+                </a:effectLst>
+              </a14:hiddenEffects>
+            </a:ext>
+          </a:extLst>
+        </p:spPr>
+        <p:txBody>
+          <a:bodyPr vert="horz" wrap="square" lIns="91440" tIns="45720" rIns="91440" bIns="45720" numCol="1" anchor="ctr" anchorCtr="0" compatLnSpc="1">
+            <a:prstTxWarp prst="textNoShape">
+              <a:avLst/>
+            </a:prstTxWarp>
+            <a:spAutoFit/>
+          </a:bodyPr>
+          <a:lstStyle/>
+          <a:p>
+            <a:pPr marL="0" marR="0" lvl="0" indent="0" algn="l" defTabSz="914400" rtl="0" eaLnBrk="0" fontAlgn="base" latinLnBrk="0" hangingPunct="0">
+              <a:lnSpc>
+                <a:spcPct val="100000"/>
+              </a:lnSpc>
+              <a:spcBef>
+                <a:spcPct val="0"/>
+              </a:spcBef>
+              <a:spcAft>
+                <a:spcPct val="0"/>
+              </a:spcAft>
+              <a:buClrTx/>
+              <a:buSzTx/>
+              <a:buNone/>
+              <a:tabLst/>
+            </a:pPr>
+            <a:r>
+              <a:rPr kumimoji="0" lang="en-US" altLang="en-US" sz="1800" b="1" i="0" u="none" strike="noStrike" cap="none" normalizeH="0" baseline="0" dirty="0">
+                <a:ln>
+                  <a:noFill/>
+                </a:ln>
+                <a:solidFill>
+                  <a:schemeClr val="tx1"/>
+                </a:solidFill>
+                <a:effectLst/>
+                <a:latin typeface="Verdana" panose="020B0604030504040204" pitchFamily="34" charset="0"/>
+                <a:ea typeface="Verdana" panose="020B0604030504040204" pitchFamily="34" charset="0"/>
+              </a:rPr>
+              <a:t>Zero-Cost Architecture:</a:t>
+            </a:r>
+            <a:endParaRPr lang="en-US" altLang="en-US" sz="1800" dirty="0">
+              <a:latin typeface="Verdana" panose="020B0604030504040204" pitchFamily="34" charset="0"/>
+              <a:ea typeface="Verdana" panose="020B0604030504040204" pitchFamily="34" charset="0"/>
+            </a:endParaRPr>
+          </a:p>
+          <a:p>
+            <a:pPr marL="0" marR="0" lvl="0" indent="0" algn="l" defTabSz="914400" rtl="0" eaLnBrk="0" fontAlgn="base" latinLnBrk="0" hangingPunct="0">
+              <a:lnSpc>
+                <a:spcPct val="100000"/>
+              </a:lnSpc>
+              <a:spcBef>
+                <a:spcPct val="0"/>
+              </a:spcBef>
+              <a:spcAft>
+                <a:spcPct val="0"/>
+              </a:spcAft>
+              <a:buClrTx/>
+              <a:buSzTx/>
+              <a:buNone/>
+              <a:tabLst/>
+            </a:pPr>
+            <a:r>
+              <a:rPr kumimoji="0" lang="en-US" altLang="en-US" sz="1600" b="0" i="0" u="none" strike="noStrike" cap="none" normalizeH="0" baseline="0" dirty="0">
+                <a:ln>
+                  <a:noFill/>
+                </a:ln>
+                <a:solidFill>
+                  <a:schemeClr val="tx1"/>
+                </a:solidFill>
+                <a:effectLst/>
+                <a:latin typeface="Verdana" panose="020B0604030504040204" pitchFamily="34" charset="0"/>
+                <a:ea typeface="Verdana" panose="020B0604030504040204" pitchFamily="34" charset="0"/>
+              </a:rPr>
+              <a:t>To achieve professional routing capabilities using self-hosted OSRM and OpenStreetMap data, eliminating recurring API fees.</a:t>
+            </a:r>
+          </a:p>
+          <a:p>
+            <a:pPr marL="0" marR="0" lvl="0" indent="0" algn="l" defTabSz="914400" rtl="0" eaLnBrk="0" fontAlgn="base" latinLnBrk="0" hangingPunct="0">
+              <a:lnSpc>
+                <a:spcPct val="100000"/>
+              </a:lnSpc>
+              <a:spcBef>
+                <a:spcPct val="0"/>
+              </a:spcBef>
+              <a:spcAft>
+                <a:spcPct val="0"/>
+              </a:spcAft>
+              <a:buClrTx/>
+              <a:buSzTx/>
+              <a:buNone/>
+              <a:tabLst/>
+            </a:pPr>
+            <a:endParaRPr kumimoji="0" lang="en-US" altLang="en-US" sz="1800" b="0" i="0" u="none" strike="noStrike" cap="none" normalizeH="0" baseline="0" dirty="0">
+              <a:ln>
+                <a:noFill/>
+              </a:ln>
+              <a:solidFill>
+                <a:schemeClr val="tx1"/>
+              </a:solidFill>
+              <a:effectLst/>
+              <a:latin typeface="Verdana" panose="020B0604030504040204" pitchFamily="34" charset="0"/>
+              <a:ea typeface="Verdana" panose="020B0604030504040204" pitchFamily="34" charset="0"/>
+            </a:endParaRPr>
+          </a:p>
+          <a:p>
+            <a:pPr marL="0" marR="0" lvl="0" indent="0" algn="l" defTabSz="914400" rtl="0" eaLnBrk="0" fontAlgn="base" latinLnBrk="0" hangingPunct="0">
+              <a:lnSpc>
+                <a:spcPct val="100000"/>
+              </a:lnSpc>
+              <a:spcBef>
+                <a:spcPct val="0"/>
+              </a:spcBef>
+              <a:spcAft>
+                <a:spcPct val="0"/>
+              </a:spcAft>
+              <a:buClrTx/>
+              <a:buSzTx/>
+              <a:buNone/>
+              <a:tabLst/>
+            </a:pPr>
+            <a:r>
+              <a:rPr kumimoji="0" lang="en-US" altLang="en-US" sz="1800" b="1" i="0" u="none" strike="noStrike" cap="none" normalizeH="0" baseline="0" dirty="0">
+                <a:ln>
+                  <a:noFill/>
+                </a:ln>
+                <a:solidFill>
+                  <a:schemeClr val="tx1"/>
+                </a:solidFill>
+                <a:effectLst/>
+                <a:latin typeface="Verdana" panose="020B0604030504040204" pitchFamily="34" charset="0"/>
+                <a:ea typeface="Verdana" panose="020B0604030504040204" pitchFamily="34" charset="0"/>
+              </a:rPr>
+              <a:t>Regional Optimization:</a:t>
+            </a:r>
+            <a:endParaRPr lang="en-US" altLang="en-US" sz="1800" dirty="0">
+              <a:latin typeface="Verdana" panose="020B0604030504040204" pitchFamily="34" charset="0"/>
+              <a:ea typeface="Verdana" panose="020B0604030504040204" pitchFamily="34" charset="0"/>
+            </a:endParaRPr>
+          </a:p>
+          <a:p>
+            <a:pPr marL="0" marR="0" lvl="0" indent="0" algn="l" defTabSz="914400" rtl="0" eaLnBrk="0" fontAlgn="base" latinLnBrk="0" hangingPunct="0">
+              <a:lnSpc>
+                <a:spcPct val="100000"/>
+              </a:lnSpc>
+              <a:spcBef>
+                <a:spcPct val="0"/>
+              </a:spcBef>
+              <a:spcAft>
+                <a:spcPct val="0"/>
+              </a:spcAft>
+              <a:buClrTx/>
+              <a:buSzTx/>
+              <a:buNone/>
+              <a:tabLst/>
+            </a:pPr>
+            <a:r>
+              <a:rPr kumimoji="0" lang="en-US" altLang="en-US" sz="1600" b="0" i="0" u="none" strike="noStrike" cap="none" normalizeH="0" baseline="0" dirty="0">
+                <a:ln>
+                  <a:noFill/>
+                </a:ln>
+                <a:solidFill>
+                  <a:schemeClr val="tx1"/>
+                </a:solidFill>
+                <a:effectLst/>
+                <a:latin typeface="Verdana" panose="020B0604030504040204" pitchFamily="34" charset="0"/>
+                <a:ea typeface="Verdana" panose="020B0604030504040204" pitchFamily="34" charset="0"/>
+              </a:rPr>
+              <a:t>To effectively model the specific road networks of Haryana and Uttar Pradesh (Extended NCR) for accurate travel time predictions.</a:t>
+            </a:r>
+          </a:p>
+          <a:p>
+            <a:pPr marL="0" marR="0" lvl="0" indent="0" algn="l" defTabSz="914400" rtl="0" eaLnBrk="0" fontAlgn="base" latinLnBrk="0" hangingPunct="0">
+              <a:lnSpc>
+                <a:spcPct val="100000"/>
+              </a:lnSpc>
+              <a:spcBef>
+                <a:spcPct val="0"/>
+              </a:spcBef>
+              <a:spcAft>
+                <a:spcPct val="0"/>
+              </a:spcAft>
+              <a:buClrTx/>
+              <a:buSzTx/>
+              <a:buNone/>
+              <a:tabLst/>
+            </a:pPr>
+            <a:endParaRPr kumimoji="0" lang="en-US" altLang="en-US" sz="1800" b="0" i="0" u="none" strike="noStrike" cap="none" normalizeH="0" baseline="0" dirty="0">
+              <a:ln>
+                <a:noFill/>
+              </a:ln>
+              <a:solidFill>
+                <a:schemeClr val="tx1"/>
+              </a:solidFill>
+              <a:effectLst/>
+              <a:latin typeface="Verdana" panose="020B0604030504040204" pitchFamily="34" charset="0"/>
+              <a:ea typeface="Verdana" panose="020B0604030504040204" pitchFamily="34" charset="0"/>
+            </a:endParaRPr>
+          </a:p>
+          <a:p>
+            <a:pPr marL="0" marR="0" lvl="0" indent="0" algn="l" defTabSz="914400" rtl="0" eaLnBrk="0" fontAlgn="base" latinLnBrk="0" hangingPunct="0">
+              <a:lnSpc>
+                <a:spcPct val="100000"/>
+              </a:lnSpc>
+              <a:spcBef>
+                <a:spcPct val="0"/>
+              </a:spcBef>
+              <a:spcAft>
+                <a:spcPct val="0"/>
+              </a:spcAft>
+              <a:buClrTx/>
+              <a:buSzTx/>
+              <a:buNone/>
+              <a:tabLst/>
+            </a:pPr>
+            <a:r>
+              <a:rPr kumimoji="0" lang="en-US" altLang="en-US" sz="1800" b="1" i="0" u="none" strike="noStrike" cap="none" normalizeH="0" baseline="0" dirty="0">
+                <a:ln>
+                  <a:noFill/>
+                </a:ln>
+                <a:solidFill>
+                  <a:schemeClr val="tx1"/>
+                </a:solidFill>
+                <a:effectLst/>
+                <a:latin typeface="Verdana" panose="020B0604030504040204" pitchFamily="34" charset="0"/>
+                <a:ea typeface="Verdana" panose="020B0604030504040204" pitchFamily="34" charset="0"/>
+              </a:rPr>
+              <a:t>Algorithmic Efficiency:</a:t>
+            </a:r>
+            <a:endParaRPr lang="en-US" altLang="en-US" sz="1800" dirty="0">
+              <a:latin typeface="Verdana" panose="020B0604030504040204" pitchFamily="34" charset="0"/>
+              <a:ea typeface="Verdana" panose="020B0604030504040204" pitchFamily="34" charset="0"/>
+            </a:endParaRPr>
+          </a:p>
+          <a:p>
+            <a:pPr marL="0" marR="0" lvl="0" indent="0" algn="l" defTabSz="914400" rtl="0" eaLnBrk="0" fontAlgn="base" latinLnBrk="0" hangingPunct="0">
+              <a:lnSpc>
+                <a:spcPct val="100000"/>
+              </a:lnSpc>
+              <a:spcBef>
+                <a:spcPct val="0"/>
+              </a:spcBef>
+              <a:spcAft>
+                <a:spcPct val="0"/>
+              </a:spcAft>
+              <a:buClrTx/>
+              <a:buSzTx/>
+              <a:buNone/>
+              <a:tabLst/>
+            </a:pPr>
+            <a:r>
+              <a:rPr kumimoji="0" lang="en-US" altLang="en-US" sz="1600" i="0" u="none" strike="noStrike" cap="none" normalizeH="0" baseline="0" dirty="0">
+                <a:ln>
+                  <a:noFill/>
+                </a:ln>
+                <a:solidFill>
+                  <a:schemeClr val="tx1"/>
+                </a:solidFill>
+                <a:effectLst/>
+                <a:latin typeface="Verdana" panose="020B0604030504040204" pitchFamily="34" charset="0"/>
+                <a:ea typeface="Verdana" panose="020B0604030504040204" pitchFamily="34" charset="0"/>
+              </a:rPr>
+              <a:t>To implement the Vehicle Routing Problem (VRP) using Google OR-Tools to mathematically minimize total fleet mileage.</a:t>
+            </a:r>
+          </a:p>
+          <a:p>
+            <a:pPr marL="0" marR="0" lvl="0" indent="0" algn="l" defTabSz="914400" rtl="0" eaLnBrk="0" fontAlgn="base" latinLnBrk="0" hangingPunct="0">
+              <a:lnSpc>
+                <a:spcPct val="100000"/>
+              </a:lnSpc>
+              <a:spcBef>
+                <a:spcPct val="0"/>
+              </a:spcBef>
+              <a:spcAft>
+                <a:spcPct val="0"/>
+              </a:spcAft>
+              <a:buClrTx/>
+              <a:buSzTx/>
+              <a:buNone/>
+              <a:tabLst/>
+            </a:pPr>
+            <a:endParaRPr kumimoji="0" lang="en-US" altLang="en-US" sz="1800" b="0" i="0" u="none" strike="noStrike" cap="none" normalizeH="0" baseline="0" dirty="0">
+              <a:ln>
+                <a:noFill/>
+              </a:ln>
+              <a:solidFill>
+                <a:schemeClr val="tx1"/>
+              </a:solidFill>
+              <a:effectLst/>
+              <a:latin typeface="Verdana" panose="020B0604030504040204" pitchFamily="34" charset="0"/>
+              <a:ea typeface="Verdana" panose="020B0604030504040204" pitchFamily="34" charset="0"/>
+            </a:endParaRPr>
+          </a:p>
+          <a:p>
+            <a:pPr marL="0" marR="0" lvl="0" indent="0" algn="l" defTabSz="914400" rtl="0" eaLnBrk="0" fontAlgn="base" latinLnBrk="0" hangingPunct="0">
+              <a:lnSpc>
+                <a:spcPct val="100000"/>
+              </a:lnSpc>
+              <a:spcBef>
+                <a:spcPct val="0"/>
+              </a:spcBef>
+              <a:spcAft>
+                <a:spcPct val="0"/>
+              </a:spcAft>
+              <a:buClrTx/>
+              <a:buSzTx/>
+              <a:buNone/>
+              <a:tabLst/>
+            </a:pPr>
+            <a:r>
+              <a:rPr kumimoji="0" lang="en-US" altLang="en-US" sz="1800" b="1" i="0" u="none" strike="noStrike" cap="none" normalizeH="0" baseline="0" dirty="0">
+                <a:ln>
+                  <a:noFill/>
+                </a:ln>
+                <a:solidFill>
+                  <a:schemeClr val="tx1"/>
+                </a:solidFill>
+                <a:effectLst/>
+                <a:latin typeface="Verdana" panose="020B0604030504040204" pitchFamily="34" charset="0"/>
+                <a:ea typeface="Verdana" panose="020B0604030504040204" pitchFamily="34" charset="0"/>
+              </a:rPr>
+              <a:t>Constraint Enforcement:</a:t>
+            </a:r>
+            <a:endParaRPr lang="en-US" altLang="en-US" sz="1800" dirty="0">
+              <a:latin typeface="Verdana" panose="020B0604030504040204" pitchFamily="34" charset="0"/>
+              <a:ea typeface="Verdana" panose="020B0604030504040204" pitchFamily="34" charset="0"/>
+            </a:endParaRPr>
+          </a:p>
+          <a:p>
+            <a:pPr marL="0" marR="0" lvl="0" indent="0" algn="l" defTabSz="914400" rtl="0" eaLnBrk="0" fontAlgn="base" latinLnBrk="0" hangingPunct="0">
+              <a:lnSpc>
+                <a:spcPct val="100000"/>
+              </a:lnSpc>
+              <a:spcBef>
+                <a:spcPct val="0"/>
+              </a:spcBef>
+              <a:spcAft>
+                <a:spcPct val="0"/>
+              </a:spcAft>
+              <a:buClrTx/>
+              <a:buSzTx/>
+              <a:buNone/>
+              <a:tabLst/>
+            </a:pPr>
+            <a:r>
+              <a:rPr kumimoji="0" lang="en-US" altLang="en-US" sz="1600" i="0" u="none" strike="noStrike" cap="none" normalizeH="0" baseline="0" dirty="0">
+                <a:ln>
+                  <a:noFill/>
+                </a:ln>
+                <a:solidFill>
+                  <a:schemeClr val="tx1"/>
+                </a:solidFill>
+                <a:effectLst/>
+                <a:latin typeface="Verdana" panose="020B0604030504040204" pitchFamily="34" charset="0"/>
+                <a:ea typeface="Verdana" panose="020B0604030504040204" pitchFamily="34" charset="0"/>
+              </a:rPr>
+              <a:t>To strictly enforce service rules: Maximum 2-hour ride time and Bus Capacity limits (e.g., 50 seats).</a:t>
+            </a:r>
+          </a:p>
+          <a:p>
+            <a:pPr marL="0" marR="0" lvl="0" indent="0" algn="l" defTabSz="914400" rtl="0" eaLnBrk="0" fontAlgn="base" latinLnBrk="0" hangingPunct="0">
+              <a:lnSpc>
+                <a:spcPct val="100000"/>
+              </a:lnSpc>
+              <a:spcBef>
+                <a:spcPct val="0"/>
+              </a:spcBef>
+              <a:spcAft>
+                <a:spcPct val="0"/>
+              </a:spcAft>
+              <a:buClrTx/>
+              <a:buSzTx/>
+              <a:buNone/>
+              <a:tabLst/>
+            </a:pPr>
+            <a:endParaRPr lang="en-US" altLang="en-US" sz="1800" dirty="0">
+              <a:latin typeface="Verdana" panose="020B0604030504040204" pitchFamily="34" charset="0"/>
+              <a:ea typeface="Verdana" panose="020B0604030504040204" pitchFamily="34" charset="0"/>
+            </a:endParaRPr>
+          </a:p>
+          <a:p>
+            <a:pPr marL="0" lvl="0" indent="0" eaLnBrk="0" fontAlgn="base" hangingPunct="0">
+              <a:spcBef>
+                <a:spcPct val="0"/>
+              </a:spcBef>
+              <a:spcAft>
+                <a:spcPct val="0"/>
+              </a:spcAft>
+              <a:buNone/>
+            </a:pPr>
+            <a:r>
+              <a:rPr lang="en-US" altLang="en-US" sz="1800" b="1" dirty="0">
+                <a:latin typeface="Verdana" panose="020B0604030504040204" pitchFamily="34" charset="0"/>
+                <a:ea typeface="Verdana" panose="020B0604030504040204" pitchFamily="34" charset="0"/>
+              </a:rPr>
+              <a:t>Split-Delivery Logic:</a:t>
+            </a:r>
+            <a:endParaRPr lang="en-US" altLang="en-US" sz="1800" dirty="0">
+              <a:latin typeface="Verdana" panose="020B0604030504040204" pitchFamily="34" charset="0"/>
+              <a:ea typeface="Verdana" panose="020B0604030504040204" pitchFamily="34" charset="0"/>
+            </a:endParaRPr>
+          </a:p>
+          <a:p>
+            <a:pPr marL="0" lvl="0" indent="0" eaLnBrk="0" fontAlgn="base" hangingPunct="0">
+              <a:spcBef>
+                <a:spcPct val="0"/>
+              </a:spcBef>
+              <a:spcAft>
+                <a:spcPct val="0"/>
+              </a:spcAft>
+              <a:buNone/>
+            </a:pPr>
+            <a:r>
+              <a:rPr lang="en-US" altLang="en-US" sz="1600" dirty="0">
+                <a:latin typeface="Verdana" panose="020B0604030504040204" pitchFamily="34" charset="0"/>
+                <a:ea typeface="Verdana" panose="020B0604030504040204" pitchFamily="34" charset="0"/>
+              </a:rPr>
+              <a:t>To dynamically split high-demand stops across multiple buses to achieve 100% student coverage without exceeding individual vehicle capacities.</a:t>
+            </a:r>
+          </a:p>
+        </p:txBody>
+      </p:sp>
     </p:spTree>
     <p:extLst>
       <p:ext uri="{BB962C8B-B14F-4D97-AF65-F5344CB8AC3E}">
-        <p14:creationId xmlns:p14="http://schemas.microsoft.com/office/powerpoint/2010/main" val="1047329288"/>
+        <p14:creationId xmlns:p14="http://schemas.microsoft.com/office/powerpoint/2010/main" val="1047781753"/>
       </p:ext>
     </p:extLst>
   </p:cSld>
@@ -7414,35 +9226,6 @@
           <a:chExt cx="0" cy="0"/>
         </a:xfrm>
       </p:grpSpPr>
-      <p:pic>
-        <p:nvPicPr>
-          <p:cNvPr id="4" name="Content Placeholder 3"/>
-          <p:cNvPicPr>
-            <a:picLocks noGrp="1" noChangeAspect="1"/>
-          </p:cNvPicPr>
-          <p:nvPr>
-            <p:ph idx="1"/>
-          </p:nvPr>
-        </p:nvPicPr>
-        <p:blipFill>
-          <a:blip r:embed="rId3" cstate="print">
-            <a:extLst>
-              <a:ext uri="{28A0092B-C50C-407E-A947-70E740481C1C}">
-                <a14:useLocalDpi xmlns:a14="http://schemas.microsoft.com/office/drawing/2010/main" val="0"/>
-              </a:ext>
-            </a:extLst>
-          </a:blip>
-          <a:stretch>
-            <a:fillRect/>
-          </a:stretch>
-        </p:blipFill>
-        <p:spPr>
-          <a:xfrm>
-            <a:off x="1" y="0"/>
-            <a:ext cx="9180512" cy="6885384"/>
-          </a:xfrm>
-        </p:spPr>
-      </p:pic>
       <p:sp>
         <p:nvSpPr>
           <p:cNvPr id="5" name="Rectangle 1"/>
@@ -7568,7 +9351,7 @@
           <p:nvPr/>
         </p:nvPicPr>
         <p:blipFill>
-          <a:blip r:embed="rId4" cstate="print">
+          <a:blip r:embed="rId3" cstate="print">
             <a:extLst>
               <a:ext uri="{28A0092B-C50C-407E-A947-70E740481C1C}">
                 <a14:useLocalDpi xmlns:a14="http://schemas.microsoft.com/office/drawing/2010/main" val="0"/>
@@ -7594,7 +9377,7 @@
           <p:cNvPr id="6" name="TextBox 5">
             <a:extLst>
               <a:ext uri="{FF2B5EF4-FFF2-40B4-BE49-F238E27FC236}">
-                <a16:creationId xmlns="" xmlns:a16="http://schemas.microsoft.com/office/drawing/2014/main" id="{AE24D516-77C6-C96A-5F77-D099623448D8}"/>
+                <a16:creationId xmlns:a16="http://schemas.microsoft.com/office/drawing/2014/main" id="{AE24D516-77C6-C96A-5F77-D099623448D8}"/>
               </a:ext>
             </a:extLst>
           </p:cNvPr>
@@ -7649,10 +9432,464 @@
           </a:p>
         </p:txBody>
       </p:sp>
+      <p:sp>
+        <p:nvSpPr>
+          <p:cNvPr id="8" name="Rectangle 1">
+            <a:extLst>
+              <a:ext uri="{FF2B5EF4-FFF2-40B4-BE49-F238E27FC236}">
+                <a16:creationId xmlns:a16="http://schemas.microsoft.com/office/drawing/2014/main" id="{B6A4BB3A-848F-94E0-C61E-3C63AFDB9FA9}"/>
+              </a:ext>
+            </a:extLst>
+          </p:cNvPr>
+          <p:cNvSpPr>
+            <a:spLocks noGrp="1" noChangeArrowheads="1"/>
+          </p:cNvSpPr>
+          <p:nvPr>
+            <p:ph idx="1"/>
+          </p:nvPr>
+        </p:nvSpPr>
+        <p:spPr bwMode="auto">
+          <a:xfrm>
+            <a:off x="444624" y="1779991"/>
+            <a:ext cx="8291264" cy="3877985"/>
+          </a:xfrm>
+          <a:prstGeom prst="rect">
+            <a:avLst/>
+          </a:prstGeom>
+          <a:noFill/>
+          <a:ln>
+            <a:noFill/>
+          </a:ln>
+          <a:effectLst/>
+          <a:extLst>
+            <a:ext uri="{909E8E84-426E-40DD-AFC4-6F175D3DCCD1}">
+              <a14:hiddenFill xmlns:a14="http://schemas.microsoft.com/office/drawing/2010/main">
+                <a:solidFill>
+                  <a:schemeClr val="accent1"/>
+                </a:solidFill>
+              </a14:hiddenFill>
+            </a:ext>
+            <a:ext uri="{91240B29-F687-4F45-9708-019B960494DF}">
+              <a14:hiddenLine xmlns:a14="http://schemas.microsoft.com/office/drawing/2010/main" w="9525">
+                <a:solidFill>
+                  <a:schemeClr val="tx1"/>
+                </a:solidFill>
+                <a:miter lim="800000"/>
+                <a:headEnd/>
+                <a:tailEnd/>
+              </a14:hiddenLine>
+            </a:ext>
+            <a:ext uri="{AF507438-7753-43E0-B8FC-AC1667EBCBE1}">
+              <a14:hiddenEffects xmlns:a14="http://schemas.microsoft.com/office/drawing/2010/main">
+                <a:effectLst>
+                  <a:outerShdw dist="35921" dir="2700000" algn="ctr" rotWithShape="0">
+                    <a:schemeClr val="bg2"/>
+                  </a:outerShdw>
+                </a:effectLst>
+              </a14:hiddenEffects>
+            </a:ext>
+          </a:extLst>
+        </p:spPr>
+        <p:txBody>
+          <a:bodyPr vert="horz" wrap="square" lIns="91440" tIns="45720" rIns="91440" bIns="45720" numCol="1" anchor="ctr" anchorCtr="0" compatLnSpc="1">
+            <a:prstTxWarp prst="textNoShape">
+              <a:avLst/>
+            </a:prstTxWarp>
+            <a:spAutoFit/>
+          </a:bodyPr>
+          <a:lstStyle/>
+          <a:p>
+            <a:pPr marL="0" marR="0" lvl="0" indent="0" algn="l" defTabSz="914400" rtl="0" eaLnBrk="0" fontAlgn="base" latinLnBrk="0" hangingPunct="0">
+              <a:lnSpc>
+                <a:spcPct val="100000"/>
+              </a:lnSpc>
+              <a:spcBef>
+                <a:spcPct val="0"/>
+              </a:spcBef>
+              <a:spcAft>
+                <a:spcPct val="0"/>
+              </a:spcAft>
+              <a:buClrTx/>
+              <a:buSzTx/>
+              <a:buNone/>
+              <a:tabLst/>
+            </a:pPr>
+            <a:r>
+              <a:rPr kumimoji="0" lang="en-US" altLang="en-US" sz="1800" b="1" i="0" u="none" strike="noStrike" cap="none" normalizeH="0" baseline="0" dirty="0">
+                <a:ln>
+                  <a:noFill/>
+                </a:ln>
+                <a:solidFill>
+                  <a:schemeClr val="tx1"/>
+                </a:solidFill>
+                <a:effectLst/>
+                <a:latin typeface="Verdana" panose="020B0604030504040204" pitchFamily="34" charset="0"/>
+                <a:ea typeface="Verdana" panose="020B0604030504040204" pitchFamily="34" charset="0"/>
+              </a:rPr>
+              <a:t>No Recurring Costs:</a:t>
+            </a:r>
+            <a:r>
+              <a:rPr kumimoji="0" lang="en-US" altLang="en-US" sz="1800" b="0" i="0" u="none" strike="noStrike" cap="none" normalizeH="0" baseline="0" dirty="0">
+                <a:ln>
+                  <a:noFill/>
+                </a:ln>
+                <a:solidFill>
+                  <a:schemeClr val="tx1"/>
+                </a:solidFill>
+                <a:effectLst/>
+                <a:latin typeface="Verdana" panose="020B0604030504040204" pitchFamily="34" charset="0"/>
+                <a:ea typeface="Verdana" panose="020B0604030504040204" pitchFamily="34" charset="0"/>
+              </a:rPr>
+              <a:t> </a:t>
+            </a:r>
+          </a:p>
+          <a:p>
+            <a:pPr marL="0" marR="0" lvl="0" indent="0" algn="l" defTabSz="914400" rtl="0" eaLnBrk="0" fontAlgn="base" latinLnBrk="0" hangingPunct="0">
+              <a:lnSpc>
+                <a:spcPct val="100000"/>
+              </a:lnSpc>
+              <a:spcBef>
+                <a:spcPct val="0"/>
+              </a:spcBef>
+              <a:spcAft>
+                <a:spcPct val="0"/>
+              </a:spcAft>
+              <a:buClrTx/>
+              <a:buSzTx/>
+              <a:buNone/>
+              <a:tabLst/>
+            </a:pPr>
+            <a:r>
+              <a:rPr kumimoji="0" lang="en-US" altLang="en-US" sz="1600" b="0" i="0" u="none" strike="noStrike" cap="none" normalizeH="0" baseline="0" dirty="0">
+                <a:ln>
+                  <a:noFill/>
+                </a:ln>
+                <a:solidFill>
+                  <a:schemeClr val="tx1"/>
+                </a:solidFill>
+                <a:effectLst/>
+                <a:latin typeface="Verdana" panose="020B0604030504040204" pitchFamily="34" charset="0"/>
+                <a:ea typeface="Verdana" panose="020B0604030504040204" pitchFamily="34" charset="0"/>
+              </a:rPr>
+              <a:t>Runs entirely on local university infrastructure or free-tier cloud services.</a:t>
+            </a:r>
+          </a:p>
+          <a:p>
+            <a:pPr marL="0" marR="0" lvl="0" indent="0" algn="l" defTabSz="914400" rtl="0" eaLnBrk="0" fontAlgn="base" latinLnBrk="0" hangingPunct="0">
+              <a:lnSpc>
+                <a:spcPct val="100000"/>
+              </a:lnSpc>
+              <a:spcBef>
+                <a:spcPct val="0"/>
+              </a:spcBef>
+              <a:spcAft>
+                <a:spcPct val="0"/>
+              </a:spcAft>
+              <a:buClrTx/>
+              <a:buSzTx/>
+              <a:buNone/>
+              <a:tabLst/>
+            </a:pPr>
+            <a:endParaRPr kumimoji="0" lang="en-US" altLang="en-US" sz="1800" b="1" i="0" u="none" strike="noStrike" cap="none" normalizeH="0" baseline="0" dirty="0">
+              <a:ln>
+                <a:noFill/>
+              </a:ln>
+              <a:solidFill>
+                <a:schemeClr val="tx1"/>
+              </a:solidFill>
+              <a:effectLst/>
+              <a:latin typeface="Verdana" panose="020B0604030504040204" pitchFamily="34" charset="0"/>
+              <a:ea typeface="Verdana" panose="020B0604030504040204" pitchFamily="34" charset="0"/>
+            </a:endParaRPr>
+          </a:p>
+          <a:p>
+            <a:pPr marL="0" marR="0" lvl="0" indent="0" algn="l" defTabSz="914400" rtl="0" eaLnBrk="0" fontAlgn="base" latinLnBrk="0" hangingPunct="0">
+              <a:lnSpc>
+                <a:spcPct val="100000"/>
+              </a:lnSpc>
+              <a:spcBef>
+                <a:spcPct val="0"/>
+              </a:spcBef>
+              <a:spcAft>
+                <a:spcPct val="0"/>
+              </a:spcAft>
+              <a:buClrTx/>
+              <a:buSzTx/>
+              <a:buNone/>
+              <a:tabLst/>
+            </a:pPr>
+            <a:r>
+              <a:rPr kumimoji="0" lang="en-US" altLang="en-US" sz="1800" b="1" i="0" u="none" strike="noStrike" cap="none" normalizeH="0" baseline="0" dirty="0">
+                <a:ln>
+                  <a:noFill/>
+                </a:ln>
+                <a:solidFill>
+                  <a:schemeClr val="tx1"/>
+                </a:solidFill>
+                <a:effectLst/>
+                <a:latin typeface="Verdana" panose="020B0604030504040204" pitchFamily="34" charset="0"/>
+                <a:ea typeface="Verdana" panose="020B0604030504040204" pitchFamily="34" charset="0"/>
+              </a:rPr>
+              <a:t>Physics Aware Routing:</a:t>
+            </a:r>
+            <a:endParaRPr lang="en-US" altLang="en-US" sz="1800" dirty="0">
+              <a:latin typeface="Verdana" panose="020B0604030504040204" pitchFamily="34" charset="0"/>
+              <a:ea typeface="Verdana" panose="020B0604030504040204" pitchFamily="34" charset="0"/>
+            </a:endParaRPr>
+          </a:p>
+          <a:p>
+            <a:pPr marL="0" marR="0" lvl="0" indent="0" algn="l" defTabSz="914400" rtl="0" eaLnBrk="0" fontAlgn="base" latinLnBrk="0" hangingPunct="0">
+              <a:lnSpc>
+                <a:spcPct val="100000"/>
+              </a:lnSpc>
+              <a:spcBef>
+                <a:spcPct val="0"/>
+              </a:spcBef>
+              <a:spcAft>
+                <a:spcPct val="0"/>
+              </a:spcAft>
+              <a:buClrTx/>
+              <a:buSzTx/>
+              <a:buNone/>
+              <a:tabLst/>
+            </a:pPr>
+            <a:r>
+              <a:rPr kumimoji="0" lang="en-US" altLang="en-US" sz="1600" b="0" i="0" u="none" strike="noStrike" cap="none" normalizeH="0" baseline="0" dirty="0">
+                <a:ln>
+                  <a:noFill/>
+                </a:ln>
+                <a:solidFill>
+                  <a:schemeClr val="tx1"/>
+                </a:solidFill>
+                <a:effectLst/>
+                <a:latin typeface="Verdana" panose="020B0604030504040204" pitchFamily="34" charset="0"/>
+                <a:ea typeface="Verdana" panose="020B0604030504040204" pitchFamily="34" charset="0"/>
+              </a:rPr>
+              <a:t>Custom OSRM Lua profile calibrated for “Bus” physics-enforcing strict 40-second U-turn penalties and capping speeds to realistic urban traffic limits.</a:t>
+            </a:r>
+          </a:p>
+          <a:p>
+            <a:pPr marL="0" marR="0" lvl="0" indent="0" algn="l" defTabSz="914400" rtl="0" eaLnBrk="0" fontAlgn="base" latinLnBrk="0" hangingPunct="0">
+              <a:lnSpc>
+                <a:spcPct val="100000"/>
+              </a:lnSpc>
+              <a:spcBef>
+                <a:spcPct val="0"/>
+              </a:spcBef>
+              <a:spcAft>
+                <a:spcPct val="0"/>
+              </a:spcAft>
+              <a:buClrTx/>
+              <a:buSzTx/>
+              <a:buNone/>
+              <a:tabLst/>
+            </a:pPr>
+            <a:endParaRPr kumimoji="0" lang="en-US" altLang="en-US" sz="1800" b="1" i="0" u="none" strike="noStrike" cap="none" normalizeH="0" baseline="0" dirty="0">
+              <a:ln>
+                <a:noFill/>
+              </a:ln>
+              <a:solidFill>
+                <a:schemeClr val="tx1"/>
+              </a:solidFill>
+              <a:effectLst/>
+              <a:latin typeface="Verdana" panose="020B0604030504040204" pitchFamily="34" charset="0"/>
+              <a:ea typeface="Verdana" panose="020B0604030504040204" pitchFamily="34" charset="0"/>
+            </a:endParaRPr>
+          </a:p>
+          <a:p>
+            <a:pPr marL="0" marR="0" lvl="0" indent="0" algn="l" defTabSz="914400" rtl="0" eaLnBrk="0" fontAlgn="base" latinLnBrk="0" hangingPunct="0">
+              <a:lnSpc>
+                <a:spcPct val="100000"/>
+              </a:lnSpc>
+              <a:spcBef>
+                <a:spcPct val="0"/>
+              </a:spcBef>
+              <a:spcAft>
+                <a:spcPct val="0"/>
+              </a:spcAft>
+              <a:buClrTx/>
+              <a:buSzTx/>
+              <a:buNone/>
+              <a:tabLst/>
+            </a:pPr>
+            <a:r>
+              <a:rPr kumimoji="0" lang="en-US" altLang="en-US" sz="1800" b="1" i="0" u="none" strike="noStrike" cap="none" normalizeH="0" baseline="0" dirty="0">
+                <a:ln>
+                  <a:noFill/>
+                </a:ln>
+                <a:solidFill>
+                  <a:schemeClr val="tx1"/>
+                </a:solidFill>
+                <a:effectLst/>
+                <a:latin typeface="Verdana" panose="020B0604030504040204" pitchFamily="34" charset="0"/>
+                <a:ea typeface="Verdana" panose="020B0604030504040204" pitchFamily="34" charset="0"/>
+              </a:rPr>
+              <a:t>Strategic Comparison Mode:</a:t>
+            </a:r>
+            <a:endParaRPr lang="en-US" altLang="en-US" sz="1800" dirty="0">
+              <a:latin typeface="Verdana" panose="020B0604030504040204" pitchFamily="34" charset="0"/>
+              <a:ea typeface="Verdana" panose="020B0604030504040204" pitchFamily="34" charset="0"/>
+            </a:endParaRPr>
+          </a:p>
+          <a:p>
+            <a:pPr marL="0" marR="0" lvl="0" indent="0" algn="l" defTabSz="914400" rtl="0" eaLnBrk="0" fontAlgn="base" latinLnBrk="0" hangingPunct="0">
+              <a:lnSpc>
+                <a:spcPct val="100000"/>
+              </a:lnSpc>
+              <a:spcBef>
+                <a:spcPct val="0"/>
+              </a:spcBef>
+              <a:spcAft>
+                <a:spcPct val="0"/>
+              </a:spcAft>
+              <a:buClrTx/>
+              <a:buSzTx/>
+              <a:buNone/>
+              <a:tabLst/>
+            </a:pPr>
+            <a:r>
+              <a:rPr kumimoji="0" lang="en-US" altLang="en-US" sz="1600" b="0" i="0" u="none" strike="noStrike" cap="none" normalizeH="0" baseline="0" dirty="0">
+                <a:ln>
+                  <a:noFill/>
+                </a:ln>
+                <a:solidFill>
+                  <a:schemeClr val="tx1"/>
+                </a:solidFill>
+                <a:effectLst/>
+                <a:latin typeface="Verdana" panose="020B0604030504040204" pitchFamily="34" charset="0"/>
+                <a:ea typeface="Verdana" panose="020B0604030504040204" pitchFamily="34" charset="0"/>
+              </a:rPr>
+              <a:t>Allows admins to toggle between "Strict" plans (visit every stop) and "Suggested" plans (merge stops for efficiency).</a:t>
+            </a:r>
+          </a:p>
+          <a:p>
+            <a:pPr marL="0" marR="0" lvl="0" indent="0" algn="l" defTabSz="914400" rtl="0" eaLnBrk="0" fontAlgn="base" latinLnBrk="0" hangingPunct="0">
+              <a:lnSpc>
+                <a:spcPct val="100000"/>
+              </a:lnSpc>
+              <a:spcBef>
+                <a:spcPct val="0"/>
+              </a:spcBef>
+              <a:spcAft>
+                <a:spcPct val="0"/>
+              </a:spcAft>
+              <a:buClrTx/>
+              <a:buSzTx/>
+              <a:buNone/>
+              <a:tabLst/>
+            </a:pPr>
+            <a:endParaRPr kumimoji="0" lang="en-US" altLang="en-US" sz="1800" b="1" i="0" u="none" strike="noStrike" cap="none" normalizeH="0" baseline="0" dirty="0">
+              <a:ln>
+                <a:noFill/>
+              </a:ln>
+              <a:solidFill>
+                <a:schemeClr val="tx1"/>
+              </a:solidFill>
+              <a:effectLst/>
+              <a:latin typeface="Verdana" panose="020B0604030504040204" pitchFamily="34" charset="0"/>
+              <a:ea typeface="Verdana" panose="020B0604030504040204" pitchFamily="34" charset="0"/>
+            </a:endParaRPr>
+          </a:p>
+          <a:p>
+            <a:pPr marL="0" marR="0" lvl="0" indent="0" algn="l" defTabSz="914400" rtl="0" eaLnBrk="0" fontAlgn="base" latinLnBrk="0" hangingPunct="0">
+              <a:lnSpc>
+                <a:spcPct val="100000"/>
+              </a:lnSpc>
+              <a:spcBef>
+                <a:spcPct val="0"/>
+              </a:spcBef>
+              <a:spcAft>
+                <a:spcPct val="0"/>
+              </a:spcAft>
+              <a:buClrTx/>
+              <a:buSzTx/>
+              <a:buNone/>
+              <a:tabLst/>
+            </a:pPr>
+            <a:r>
+              <a:rPr kumimoji="0" lang="en-US" altLang="en-US" sz="1800" b="1" i="0" u="none" strike="noStrike" cap="none" normalizeH="0" baseline="0" dirty="0">
+                <a:ln>
+                  <a:noFill/>
+                </a:ln>
+                <a:solidFill>
+                  <a:schemeClr val="tx1"/>
+                </a:solidFill>
+                <a:effectLst/>
+                <a:latin typeface="Verdana" panose="020B0604030504040204" pitchFamily="34" charset="0"/>
+                <a:ea typeface="Verdana" panose="020B0604030504040204" pitchFamily="34" charset="0"/>
+              </a:rPr>
+              <a:t>High-Performance Dashboard:</a:t>
+            </a:r>
+            <a:endParaRPr lang="en-US" altLang="en-US" sz="1800" dirty="0">
+              <a:latin typeface="Verdana" panose="020B0604030504040204" pitchFamily="34" charset="0"/>
+              <a:ea typeface="Verdana" panose="020B0604030504040204" pitchFamily="34" charset="0"/>
+            </a:endParaRPr>
+          </a:p>
+          <a:p>
+            <a:pPr marL="0" marR="0" lvl="0" indent="0" algn="l" defTabSz="914400" rtl="0" eaLnBrk="0" fontAlgn="base" latinLnBrk="0" hangingPunct="0">
+              <a:lnSpc>
+                <a:spcPct val="100000"/>
+              </a:lnSpc>
+              <a:spcBef>
+                <a:spcPct val="0"/>
+              </a:spcBef>
+              <a:spcAft>
+                <a:spcPct val="0"/>
+              </a:spcAft>
+              <a:buClrTx/>
+              <a:buSzTx/>
+              <a:buNone/>
+              <a:tabLst/>
+            </a:pPr>
+            <a:r>
+              <a:rPr kumimoji="0" lang="en-US" altLang="en-US" sz="1600" b="0" i="0" u="none" strike="noStrike" cap="none" normalizeH="0" baseline="0" dirty="0">
+                <a:ln>
+                  <a:noFill/>
+                </a:ln>
+                <a:solidFill>
+                  <a:schemeClr val="tx1"/>
+                </a:solidFill>
+                <a:effectLst/>
+                <a:latin typeface="Verdana" panose="020B0604030504040204" pitchFamily="34" charset="0"/>
+                <a:ea typeface="Verdana" panose="020B0604030504040204" pitchFamily="34" charset="0"/>
+              </a:rPr>
+              <a:t>A Next.js-based admin panel utilizing </a:t>
+            </a:r>
+            <a:r>
+              <a:rPr kumimoji="0" lang="en-US" altLang="en-US" sz="1600" b="0" i="0" u="none" strike="noStrike" cap="none" normalizeH="0" baseline="0" dirty="0" err="1">
+                <a:ln>
+                  <a:noFill/>
+                </a:ln>
+                <a:solidFill>
+                  <a:schemeClr val="tx1"/>
+                </a:solidFill>
+                <a:effectLst/>
+                <a:latin typeface="Verdana" panose="020B0604030504040204" pitchFamily="34" charset="0"/>
+                <a:ea typeface="Verdana" panose="020B0604030504040204" pitchFamily="34" charset="0"/>
+              </a:rPr>
+              <a:t>PMTiles</a:t>
+            </a:r>
+            <a:r>
+              <a:rPr kumimoji="0" lang="en-US" altLang="en-US" sz="1600" b="0" i="0" u="none" strike="noStrike" cap="none" normalizeH="0" baseline="0" dirty="0">
+                <a:ln>
+                  <a:noFill/>
+                </a:ln>
+                <a:solidFill>
+                  <a:schemeClr val="tx1"/>
+                </a:solidFill>
+                <a:effectLst/>
+                <a:latin typeface="Verdana" panose="020B0604030504040204" pitchFamily="34" charset="0"/>
+                <a:ea typeface="Verdana" panose="020B0604030504040204" pitchFamily="34" charset="0"/>
+              </a:rPr>
+              <a:t> and Leaflet to visualize thousands of route coordinates seamlessly without browser lag.</a:t>
+            </a:r>
+          </a:p>
+        </p:txBody>
+      </p:sp>
     </p:spTree>
     <p:extLst>
       <p:ext uri="{BB962C8B-B14F-4D97-AF65-F5344CB8AC3E}">
-        <p14:creationId xmlns:p14="http://schemas.microsoft.com/office/powerpoint/2010/main" val="957423197"/>
+        <p14:creationId xmlns:p14="http://schemas.microsoft.com/office/powerpoint/2010/main" val="3992159755"/>
       </p:ext>
     </p:extLst>
   </p:cSld>
@@ -7670,7 +9907,7 @@
         <p:cNvPr id="1" name="">
           <a:extLst>
             <a:ext uri="{FF2B5EF4-FFF2-40B4-BE49-F238E27FC236}">
-              <a16:creationId xmlns="" xmlns:a16="http://schemas.microsoft.com/office/drawing/2014/main" id="{D0B33F2B-4274-D144-7093-B867F4CB379E}"/>
+              <a16:creationId xmlns:a16="http://schemas.microsoft.com/office/drawing/2014/main" id="{D0B33F2B-4274-D144-7093-B867F4CB379E}"/>
             </a:ext>
           </a:extLst>
         </p:cNvPr>
@@ -7690,7 +9927,7 @@
           <p:cNvPr id="4" name="Content Placeholder 3">
             <a:extLst>
               <a:ext uri="{FF2B5EF4-FFF2-40B4-BE49-F238E27FC236}">
-                <a16:creationId xmlns="" xmlns:a16="http://schemas.microsoft.com/office/drawing/2014/main" id="{A9527858-67DE-3DF8-FF01-8DB1846AEB19}"/>
+                <a16:creationId xmlns:a16="http://schemas.microsoft.com/office/drawing/2014/main" id="{A9527858-67DE-3DF8-FF01-8DB1846AEB19}"/>
               </a:ext>
             </a:extLst>
           </p:cNvPr>
@@ -7725,7 +9962,7 @@
           <p:cNvPr id="5" name="Rectangle 1">
             <a:extLst>
               <a:ext uri="{FF2B5EF4-FFF2-40B4-BE49-F238E27FC236}">
-                <a16:creationId xmlns="" xmlns:a16="http://schemas.microsoft.com/office/drawing/2014/main" id="{D2CBC630-DA86-8B5C-8CF1-BBD133225A5E}"/>
+                <a16:creationId xmlns:a16="http://schemas.microsoft.com/office/drawing/2014/main" id="{D2CBC630-DA86-8B5C-8CF1-BBD133225A5E}"/>
               </a:ext>
             </a:extLst>
           </p:cNvPr>
@@ -7808,7 +10045,7 @@
           <p:cNvPr id="7" name="Straight Connector 6">
             <a:extLst>
               <a:ext uri="{FF2B5EF4-FFF2-40B4-BE49-F238E27FC236}">
-                <a16:creationId xmlns="" xmlns:a16="http://schemas.microsoft.com/office/drawing/2014/main" id="{4FB5C432-E63F-6355-19A5-32B65372F4DD}"/>
+                <a16:creationId xmlns:a16="http://schemas.microsoft.com/office/drawing/2014/main" id="{4FB5C432-E63F-6355-19A5-32B65372F4DD}"/>
               </a:ext>
             </a:extLst>
           </p:cNvPr>
@@ -7849,7 +10086,7 @@
           <p:cNvPr id="9" name="Picture 8">
             <a:extLst>
               <a:ext uri="{FF2B5EF4-FFF2-40B4-BE49-F238E27FC236}">
-                <a16:creationId xmlns="" xmlns:a16="http://schemas.microsoft.com/office/drawing/2014/main" id="{A6D3DC83-45E5-89A4-957B-69C5B5063223}"/>
+                <a16:creationId xmlns:a16="http://schemas.microsoft.com/office/drawing/2014/main" id="{A6D3DC83-45E5-89A4-957B-69C5B5063223}"/>
               </a:ext>
             </a:extLst>
           </p:cNvPr>
@@ -7882,61 +10119,433 @@
       </p:pic>
       <p:sp>
         <p:nvSpPr>
-          <p:cNvPr id="6" name="TextBox 5">
+          <p:cNvPr id="2" name="Rectangle 1">
             <a:extLst>
               <a:ext uri="{FF2B5EF4-FFF2-40B4-BE49-F238E27FC236}">
-                <a16:creationId xmlns="" xmlns:a16="http://schemas.microsoft.com/office/drawing/2014/main" id="{2E6412DA-6D17-40E5-6A15-8B5AF801558C}"/>
+                <a16:creationId xmlns:a16="http://schemas.microsoft.com/office/drawing/2014/main" id="{F0497A04-3DEE-EEDE-1D14-C74CA4471513}"/>
               </a:ext>
             </a:extLst>
           </p:cNvPr>
-          <p:cNvSpPr txBox="1"/>
+          <p:cNvSpPr txBox="1">
+            <a:spLocks noChangeArrowheads="1"/>
+          </p:cNvSpPr>
           <p:nvPr/>
         </p:nvSpPr>
-        <p:spPr>
+        <p:spPr bwMode="auto">
           <a:xfrm>
-            <a:off x="179512" y="1293834"/>
-            <a:ext cx="8784976" cy="372794"/>
+            <a:off x="444624" y="1718436"/>
+            <a:ext cx="8291264" cy="4001095"/>
           </a:xfrm>
           <a:prstGeom prst="rect">
             <a:avLst/>
           </a:prstGeom>
           <a:noFill/>
+          <a:ln>
+            <a:noFill/>
+          </a:ln>
+          <a:effectLst/>
+          <a:extLst>
+            <a:ext uri="{909E8E84-426E-40DD-AFC4-6F175D3DCCD1}">
+              <a14:hiddenFill xmlns:a14="http://schemas.microsoft.com/office/drawing/2010/main">
+                <a:solidFill>
+                  <a:schemeClr val="accent1"/>
+                </a:solidFill>
+              </a14:hiddenFill>
+            </a:ext>
+            <a:ext uri="{91240B29-F687-4F45-9708-019B960494DF}">
+              <a14:hiddenLine xmlns:a14="http://schemas.microsoft.com/office/drawing/2010/main" w="9525">
+                <a:solidFill>
+                  <a:schemeClr val="tx1"/>
+                </a:solidFill>
+                <a:miter lim="800000"/>
+                <a:headEnd/>
+                <a:tailEnd/>
+              </a14:hiddenLine>
+            </a:ext>
+            <a:ext uri="{AF507438-7753-43E0-B8FC-AC1667EBCBE1}">
+              <a14:hiddenEffects xmlns:a14="http://schemas.microsoft.com/office/drawing/2010/main">
+                <a:effectLst>
+                  <a:outerShdw dist="35921" dir="2700000" algn="ctr" rotWithShape="0">
+                    <a:schemeClr val="bg2"/>
+                  </a:outerShdw>
+                </a:effectLst>
+              </a14:hiddenEffects>
+            </a:ext>
+          </a:extLst>
         </p:spPr>
         <p:txBody>
-          <a:bodyPr wrap="square">
+          <a:bodyPr vert="horz" wrap="square" lIns="91440" tIns="45720" rIns="91440" bIns="45720" numCol="1" rtlCol="0" anchor="ctr" anchorCtr="0" compatLnSpc="1">
+            <a:prstTxWarp prst="textNoShape">
+              <a:avLst/>
+            </a:prstTxWarp>
             <a:spAutoFit/>
           </a:bodyPr>
-          <a:lstStyle/>
-          <a:p>
-            <a:pPr marL="0" marR="0" algn="just" fontAlgn="base">
-              <a:lnSpc>
-                <a:spcPct val="107000"/>
-              </a:lnSpc>
+          <a:lstStyle>
+            <a:lvl1pPr marL="342900" indent="-342900" algn="l" defTabSz="914400" rtl="0" eaLnBrk="1" latinLnBrk="0" hangingPunct="1">
               <a:spcBef>
-                <a:spcPts val="0"/>
+                <a:spcPct val="20000"/>
+              </a:spcBef>
+              <a:buFont typeface="Arial" pitchFamily="34" charset="0"/>
+              <a:buChar char="•"/>
+              <a:defRPr sz="3200" kern="1200">
+                <a:solidFill>
+                  <a:schemeClr val="tx1"/>
+                </a:solidFill>
+                <a:latin typeface="+mn-lt"/>
+                <a:ea typeface="+mn-ea"/>
+                <a:cs typeface="+mn-cs"/>
+              </a:defRPr>
+            </a:lvl1pPr>
+            <a:lvl2pPr marL="742950" indent="-285750" algn="l" defTabSz="914400" rtl="0" eaLnBrk="1" latinLnBrk="0" hangingPunct="1">
+              <a:spcBef>
+                <a:spcPct val="20000"/>
+              </a:spcBef>
+              <a:buFont typeface="Arial" pitchFamily="34" charset="0"/>
+              <a:buChar char="–"/>
+              <a:defRPr sz="2800" kern="1200">
+                <a:solidFill>
+                  <a:schemeClr val="tx1"/>
+                </a:solidFill>
+                <a:latin typeface="+mn-lt"/>
+                <a:ea typeface="+mn-ea"/>
+                <a:cs typeface="+mn-cs"/>
+              </a:defRPr>
+            </a:lvl2pPr>
+            <a:lvl3pPr marL="1143000" indent="-228600" algn="l" defTabSz="914400" rtl="0" eaLnBrk="1" latinLnBrk="0" hangingPunct="1">
+              <a:spcBef>
+                <a:spcPct val="20000"/>
+              </a:spcBef>
+              <a:buFont typeface="Arial" pitchFamily="34" charset="0"/>
+              <a:buChar char="•"/>
+              <a:defRPr sz="2400" kern="1200">
+                <a:solidFill>
+                  <a:schemeClr val="tx1"/>
+                </a:solidFill>
+                <a:latin typeface="+mn-lt"/>
+                <a:ea typeface="+mn-ea"/>
+                <a:cs typeface="+mn-cs"/>
+              </a:defRPr>
+            </a:lvl3pPr>
+            <a:lvl4pPr marL="1600200" indent="-228600" algn="l" defTabSz="914400" rtl="0" eaLnBrk="1" latinLnBrk="0" hangingPunct="1">
+              <a:spcBef>
+                <a:spcPct val="20000"/>
+              </a:spcBef>
+              <a:buFont typeface="Arial" pitchFamily="34" charset="0"/>
+              <a:buChar char="–"/>
+              <a:defRPr sz="2000" kern="1200">
+                <a:solidFill>
+                  <a:schemeClr val="tx1"/>
+                </a:solidFill>
+                <a:latin typeface="+mn-lt"/>
+                <a:ea typeface="+mn-ea"/>
+                <a:cs typeface="+mn-cs"/>
+              </a:defRPr>
+            </a:lvl4pPr>
+            <a:lvl5pPr marL="2057400" indent="-228600" algn="l" defTabSz="914400" rtl="0" eaLnBrk="1" latinLnBrk="0" hangingPunct="1">
+              <a:spcBef>
+                <a:spcPct val="20000"/>
+              </a:spcBef>
+              <a:buFont typeface="Arial" pitchFamily="34" charset="0"/>
+              <a:buChar char="»"/>
+              <a:defRPr sz="2000" kern="1200">
+                <a:solidFill>
+                  <a:schemeClr val="tx1"/>
+                </a:solidFill>
+                <a:latin typeface="+mn-lt"/>
+                <a:ea typeface="+mn-ea"/>
+                <a:cs typeface="+mn-cs"/>
+              </a:defRPr>
+            </a:lvl5pPr>
+            <a:lvl6pPr marL="2514600" indent="-228600" algn="l" defTabSz="914400" rtl="0" eaLnBrk="1" latinLnBrk="0" hangingPunct="1">
+              <a:spcBef>
+                <a:spcPct val="20000"/>
+              </a:spcBef>
+              <a:buFont typeface="Arial" pitchFamily="34" charset="0"/>
+              <a:buChar char="•"/>
+              <a:defRPr sz="2000" kern="1200">
+                <a:solidFill>
+                  <a:schemeClr val="tx1"/>
+                </a:solidFill>
+                <a:latin typeface="+mn-lt"/>
+                <a:ea typeface="+mn-ea"/>
+                <a:cs typeface="+mn-cs"/>
+              </a:defRPr>
+            </a:lvl6pPr>
+            <a:lvl7pPr marL="2971800" indent="-228600" algn="l" defTabSz="914400" rtl="0" eaLnBrk="1" latinLnBrk="0" hangingPunct="1">
+              <a:spcBef>
+                <a:spcPct val="20000"/>
+              </a:spcBef>
+              <a:buFont typeface="Arial" pitchFamily="34" charset="0"/>
+              <a:buChar char="•"/>
+              <a:defRPr sz="2000" kern="1200">
+                <a:solidFill>
+                  <a:schemeClr val="tx1"/>
+                </a:solidFill>
+                <a:latin typeface="+mn-lt"/>
+                <a:ea typeface="+mn-ea"/>
+                <a:cs typeface="+mn-cs"/>
+              </a:defRPr>
+            </a:lvl7pPr>
+            <a:lvl8pPr marL="3429000" indent="-228600" algn="l" defTabSz="914400" rtl="0" eaLnBrk="1" latinLnBrk="0" hangingPunct="1">
+              <a:spcBef>
+                <a:spcPct val="20000"/>
+              </a:spcBef>
+              <a:buFont typeface="Arial" pitchFamily="34" charset="0"/>
+              <a:buChar char="•"/>
+              <a:defRPr sz="2000" kern="1200">
+                <a:solidFill>
+                  <a:schemeClr val="tx1"/>
+                </a:solidFill>
+                <a:latin typeface="+mn-lt"/>
+                <a:ea typeface="+mn-ea"/>
+                <a:cs typeface="+mn-cs"/>
+              </a:defRPr>
+            </a:lvl8pPr>
+            <a:lvl9pPr marL="3886200" indent="-228600" algn="l" defTabSz="914400" rtl="0" eaLnBrk="1" latinLnBrk="0" hangingPunct="1">
+              <a:spcBef>
+                <a:spcPct val="20000"/>
+              </a:spcBef>
+              <a:buFont typeface="Arial" pitchFamily="34" charset="0"/>
+              <a:buChar char="•"/>
+              <a:defRPr sz="2000" kern="1200">
+                <a:solidFill>
+                  <a:schemeClr val="tx1"/>
+                </a:solidFill>
+                <a:latin typeface="+mn-lt"/>
+                <a:ea typeface="+mn-ea"/>
+                <a:cs typeface="+mn-cs"/>
+              </a:defRPr>
+            </a:lvl9pPr>
+          </a:lstStyle>
+          <a:p>
+            <a:pPr marL="0" indent="0" eaLnBrk="0" fontAlgn="base" hangingPunct="0">
+              <a:spcBef>
+                <a:spcPct val="0"/>
               </a:spcBef>
               <a:spcAft>
-                <a:spcPts val="0"/>
+                <a:spcPct val="0"/>
               </a:spcAft>
+              <a:buFont typeface="Arial" pitchFamily="34" charset="0"/>
+              <a:buNone/>
             </a:pPr>
             <a:r>
-              <a:rPr lang="en-US" sz="1800" kern="100" dirty="0">
-                <a:solidFill>
-                  <a:srgbClr val="000000"/>
-                </a:solidFill>
-                <a:effectLst/>
-                <a:latin typeface="Verdana" panose="020B0604030504040204" pitchFamily="34" charset="0"/>
-                <a:ea typeface="Times New Roman" panose="02020603050405020304" pitchFamily="18" charset="0"/>
-                <a:cs typeface="Times New Roman" panose="02020603050405020304" pitchFamily="18" charset="0"/>
-              </a:rPr>
-              <a:t> </a:t>
-            </a:r>
-            <a:endParaRPr lang="en-US" sz="2800" kern="100" dirty="0">
-              <a:effectLst/>
-              <a:latin typeface="+mj-lt"/>
-              <a:ea typeface="Calibri" panose="020F0502020204030204" pitchFamily="34" charset="0"/>
-              <a:cs typeface="Times New Roman" panose="02020603050405020304" pitchFamily="18" charset="0"/>
+              <a:rPr lang="en-US" altLang="en-US" sz="1800" b="1" dirty="0">
+                <a:latin typeface="Verdana" panose="020B0604030504040204" pitchFamily="34" charset="0"/>
+                <a:ea typeface="Verdana" panose="020B0604030504040204" pitchFamily="34" charset="0"/>
+              </a:rPr>
+              <a:t>System Architecture (Completed):</a:t>
+            </a:r>
+            <a:endParaRPr lang="en-US" altLang="en-US" sz="1800" dirty="0">
+              <a:latin typeface="Verdana" panose="020B0604030504040204" pitchFamily="34" charset="0"/>
+              <a:ea typeface="Verdana" panose="020B0604030504040204" pitchFamily="34" charset="0"/>
             </a:endParaRPr>
+          </a:p>
+          <a:p>
+            <a:pPr marL="0" indent="0" eaLnBrk="0" fontAlgn="base" hangingPunct="0">
+              <a:spcBef>
+                <a:spcPct val="0"/>
+              </a:spcBef>
+              <a:spcAft>
+                <a:spcPct val="0"/>
+              </a:spcAft>
+              <a:buFont typeface="Arial" pitchFamily="34" charset="0"/>
+              <a:buNone/>
+            </a:pPr>
+            <a:r>
+              <a:rPr lang="en-US" altLang="en-US" sz="1600" dirty="0">
+                <a:latin typeface="Verdana" panose="020B0604030504040204" pitchFamily="34" charset="0"/>
+                <a:ea typeface="Verdana" panose="020B0604030504040204" pitchFamily="34" charset="0"/>
+              </a:rPr>
+              <a:t>Successfully decoupled Next.js frontend and FastAPI backend, communicating securely via REST.</a:t>
+            </a:r>
+          </a:p>
+          <a:p>
+            <a:pPr marL="0" indent="0" eaLnBrk="0" fontAlgn="base" hangingPunct="0">
+              <a:spcBef>
+                <a:spcPct val="0"/>
+              </a:spcBef>
+              <a:spcAft>
+                <a:spcPct val="0"/>
+              </a:spcAft>
+              <a:buFont typeface="Arial" pitchFamily="34" charset="0"/>
+              <a:buNone/>
+            </a:pPr>
+            <a:endParaRPr lang="en-US" altLang="en-US" sz="1800" b="1" dirty="0">
+              <a:latin typeface="Verdana" panose="020B0604030504040204" pitchFamily="34" charset="0"/>
+              <a:ea typeface="Verdana" panose="020B0604030504040204" pitchFamily="34" charset="0"/>
+            </a:endParaRPr>
+          </a:p>
+          <a:p>
+            <a:pPr marL="0" indent="0" eaLnBrk="0" fontAlgn="base" hangingPunct="0">
+              <a:spcBef>
+                <a:spcPct val="0"/>
+              </a:spcBef>
+              <a:spcAft>
+                <a:spcPct val="0"/>
+              </a:spcAft>
+              <a:buFont typeface="Arial" pitchFamily="34" charset="0"/>
+              <a:buNone/>
+            </a:pPr>
+            <a:r>
+              <a:rPr lang="en-US" altLang="en-US" sz="1800" b="1" dirty="0">
+                <a:latin typeface="Verdana" panose="020B0604030504040204" pitchFamily="34" charset="0"/>
+                <a:ea typeface="Verdana" panose="020B0604030504040204" pitchFamily="34" charset="0"/>
+              </a:rPr>
+              <a:t>Routing Engine (Live):</a:t>
+            </a:r>
+            <a:endParaRPr lang="en-US" altLang="en-US" sz="1800" dirty="0">
+              <a:latin typeface="Verdana" panose="020B0604030504040204" pitchFamily="34" charset="0"/>
+              <a:ea typeface="Verdana" panose="020B0604030504040204" pitchFamily="34" charset="0"/>
+            </a:endParaRPr>
+          </a:p>
+          <a:p>
+            <a:pPr marL="0" indent="0" eaLnBrk="0" fontAlgn="base" hangingPunct="0">
+              <a:spcBef>
+                <a:spcPct val="0"/>
+              </a:spcBef>
+              <a:spcAft>
+                <a:spcPct val="0"/>
+              </a:spcAft>
+              <a:buFont typeface="Arial" pitchFamily="34" charset="0"/>
+              <a:buNone/>
+            </a:pPr>
+            <a:r>
+              <a:rPr lang="en-US" altLang="en-US" sz="1600" dirty="0">
+                <a:latin typeface="Verdana" panose="020B0604030504040204" pitchFamily="34" charset="0"/>
+                <a:ea typeface="Verdana" panose="020B0604030504040204" pitchFamily="34" charset="0"/>
+              </a:rPr>
+              <a:t>Open Source Routing Machine (OSRM) fully self-hosted via docker with custom Extended NCR map data.</a:t>
+            </a:r>
+          </a:p>
+          <a:p>
+            <a:pPr marL="0" indent="0" eaLnBrk="0" fontAlgn="base" hangingPunct="0">
+              <a:spcBef>
+                <a:spcPct val="0"/>
+              </a:spcBef>
+              <a:spcAft>
+                <a:spcPct val="0"/>
+              </a:spcAft>
+              <a:buFont typeface="Arial" pitchFamily="34" charset="0"/>
+              <a:buNone/>
+            </a:pPr>
+            <a:endParaRPr lang="en-US" altLang="en-US" sz="1800" b="1" dirty="0">
+              <a:latin typeface="Verdana" panose="020B0604030504040204" pitchFamily="34" charset="0"/>
+              <a:ea typeface="Verdana" panose="020B0604030504040204" pitchFamily="34" charset="0"/>
+            </a:endParaRPr>
+          </a:p>
+          <a:p>
+            <a:pPr marL="0" indent="0" eaLnBrk="0" fontAlgn="base" hangingPunct="0">
+              <a:spcBef>
+                <a:spcPct val="0"/>
+              </a:spcBef>
+              <a:spcAft>
+                <a:spcPct val="0"/>
+              </a:spcAft>
+              <a:buFont typeface="Arial" pitchFamily="34" charset="0"/>
+              <a:buNone/>
+            </a:pPr>
+            <a:r>
+              <a:rPr lang="en-US" altLang="en-US" sz="1800" b="1" dirty="0">
+                <a:latin typeface="Verdana" panose="020B0604030504040204" pitchFamily="34" charset="0"/>
+                <a:ea typeface="Verdana" panose="020B0604030504040204" pitchFamily="34" charset="0"/>
+              </a:rPr>
+              <a:t>Algorithmic Optimization (Validated):</a:t>
+            </a:r>
+            <a:endParaRPr lang="en-US" altLang="en-US" sz="1800" dirty="0">
+              <a:latin typeface="Verdana" panose="020B0604030504040204" pitchFamily="34" charset="0"/>
+              <a:ea typeface="Verdana" panose="020B0604030504040204" pitchFamily="34" charset="0"/>
+            </a:endParaRPr>
+          </a:p>
+          <a:p>
+            <a:pPr marL="0" indent="0" eaLnBrk="0" fontAlgn="base" hangingPunct="0">
+              <a:spcBef>
+                <a:spcPct val="0"/>
+              </a:spcBef>
+              <a:spcAft>
+                <a:spcPct val="0"/>
+              </a:spcAft>
+              <a:buFont typeface="Arial" pitchFamily="34" charset="0"/>
+              <a:buNone/>
+            </a:pPr>
+            <a:r>
+              <a:rPr lang="en-US" altLang="en-US" sz="1600" dirty="0">
+                <a:latin typeface="Verdana" panose="020B0604030504040204" pitchFamily="34" charset="0"/>
+                <a:ea typeface="Verdana" panose="020B0604030504040204" pitchFamily="34" charset="0"/>
+              </a:rPr>
+              <a:t>Successfully modeled the MD-CVRPTW, processing datasets of 3000+ students and 100+ buses in minutes.</a:t>
+            </a:r>
+          </a:p>
+          <a:p>
+            <a:pPr marL="0" indent="0" eaLnBrk="0" fontAlgn="base" hangingPunct="0">
+              <a:spcBef>
+                <a:spcPct val="0"/>
+              </a:spcBef>
+              <a:spcAft>
+                <a:spcPct val="0"/>
+              </a:spcAft>
+              <a:buFont typeface="Arial" pitchFamily="34" charset="0"/>
+              <a:buNone/>
+            </a:pPr>
+            <a:endParaRPr lang="en-US" altLang="en-US" sz="1800" b="1" dirty="0">
+              <a:latin typeface="Verdana" panose="020B0604030504040204" pitchFamily="34" charset="0"/>
+              <a:ea typeface="Verdana" panose="020B0604030504040204" pitchFamily="34" charset="0"/>
+            </a:endParaRPr>
+          </a:p>
+          <a:p>
+            <a:pPr marL="0" indent="0" eaLnBrk="0" fontAlgn="base" hangingPunct="0">
+              <a:spcBef>
+                <a:spcPct val="0"/>
+              </a:spcBef>
+              <a:spcAft>
+                <a:spcPct val="0"/>
+              </a:spcAft>
+              <a:buFont typeface="Arial" pitchFamily="34" charset="0"/>
+              <a:buNone/>
+            </a:pPr>
+            <a:r>
+              <a:rPr lang="en-US" altLang="en-US" sz="1800" b="1" dirty="0">
+                <a:latin typeface="Verdana" panose="020B0604030504040204" pitchFamily="34" charset="0"/>
+                <a:ea typeface="Verdana" panose="020B0604030504040204" pitchFamily="34" charset="0"/>
+              </a:rPr>
+              <a:t>DevOps &amp; CI/CD (Deployed):</a:t>
+            </a:r>
+            <a:endParaRPr lang="en-US" altLang="en-US" sz="1800" dirty="0">
+              <a:latin typeface="Verdana" panose="020B0604030504040204" pitchFamily="34" charset="0"/>
+              <a:ea typeface="Verdana" panose="020B0604030504040204" pitchFamily="34" charset="0"/>
+            </a:endParaRPr>
+          </a:p>
+          <a:p>
+            <a:pPr marL="0" indent="0" eaLnBrk="0" fontAlgn="base" hangingPunct="0">
+              <a:spcBef>
+                <a:spcPct val="0"/>
+              </a:spcBef>
+              <a:spcAft>
+                <a:spcPct val="0"/>
+              </a:spcAft>
+              <a:buFont typeface="Arial" pitchFamily="34" charset="0"/>
+              <a:buNone/>
+            </a:pPr>
+            <a:r>
+              <a:rPr lang="en-US" altLang="en-US" sz="1600" dirty="0">
+                <a:latin typeface="Verdana" panose="020B0604030504040204" pitchFamily="34" charset="0"/>
+                <a:ea typeface="Verdana" panose="020B0604030504040204" pitchFamily="34" charset="0"/>
+              </a:rPr>
+              <a:t>Automated deployment pipeline established using </a:t>
+            </a:r>
+            <a:r>
+              <a:rPr lang="en-US" altLang="en-US" sz="1600" dirty="0" err="1">
+                <a:latin typeface="Verdana" panose="020B0604030504040204" pitchFamily="34" charset="0"/>
+                <a:ea typeface="Verdana" panose="020B0604030504040204" pitchFamily="34" charset="0"/>
+              </a:rPr>
+              <a:t>Github</a:t>
+            </a:r>
+            <a:r>
+              <a:rPr lang="en-US" altLang="en-US" sz="1600" dirty="0">
+                <a:latin typeface="Verdana" panose="020B0604030504040204" pitchFamily="34" charset="0"/>
+                <a:ea typeface="Verdana" panose="020B0604030504040204" pitchFamily="34" charset="0"/>
+              </a:rPr>
+              <a:t> Actions, Docker, and Nginx reverse proxies.</a:t>
+            </a:r>
           </a:p>
         </p:txBody>
       </p:sp>
@@ -7961,7 +10570,7 @@
         <p:cNvPr id="1" name="">
           <a:extLst>
             <a:ext uri="{FF2B5EF4-FFF2-40B4-BE49-F238E27FC236}">
-              <a16:creationId xmlns="" xmlns:a16="http://schemas.microsoft.com/office/drawing/2014/main" id="{F175C45B-C9D0-DBF5-811F-0F08DB7B929B}"/>
+              <a16:creationId xmlns:a16="http://schemas.microsoft.com/office/drawing/2014/main" id="{F175C45B-C9D0-DBF5-811F-0F08DB7B929B}"/>
             </a:ext>
           </a:extLst>
         </p:cNvPr>
@@ -7981,7 +10590,7 @@
           <p:cNvPr id="4" name="Content Placeholder 3">
             <a:extLst>
               <a:ext uri="{FF2B5EF4-FFF2-40B4-BE49-F238E27FC236}">
-                <a16:creationId xmlns="" xmlns:a16="http://schemas.microsoft.com/office/drawing/2014/main" id="{ACCAFCE0-31E7-9CED-BEF6-9C94A97D7C0B}"/>
+                <a16:creationId xmlns:a16="http://schemas.microsoft.com/office/drawing/2014/main" id="{ACCAFCE0-31E7-9CED-BEF6-9C94A97D7C0B}"/>
               </a:ext>
             </a:extLst>
           </p:cNvPr>
@@ -8016,7 +10625,7 @@
           <p:cNvPr id="5" name="Rectangle 1">
             <a:extLst>
               <a:ext uri="{FF2B5EF4-FFF2-40B4-BE49-F238E27FC236}">
-                <a16:creationId xmlns="" xmlns:a16="http://schemas.microsoft.com/office/drawing/2014/main" id="{EC8D1C93-2569-153C-C90B-6D82C35C195E}"/>
+                <a16:creationId xmlns:a16="http://schemas.microsoft.com/office/drawing/2014/main" id="{EC8D1C93-2569-153C-C90B-6D82C35C195E}"/>
               </a:ext>
             </a:extLst>
           </p:cNvPr>
@@ -8099,7 +10708,7 @@
           <p:cNvPr id="7" name="Straight Connector 6">
             <a:extLst>
               <a:ext uri="{FF2B5EF4-FFF2-40B4-BE49-F238E27FC236}">
-                <a16:creationId xmlns="" xmlns:a16="http://schemas.microsoft.com/office/drawing/2014/main" id="{D6161CDA-82E4-E4CE-AB8A-F7E4594878E9}"/>
+                <a16:creationId xmlns:a16="http://schemas.microsoft.com/office/drawing/2014/main" id="{D6161CDA-82E4-E4CE-AB8A-F7E4594878E9}"/>
               </a:ext>
             </a:extLst>
           </p:cNvPr>
@@ -8140,7 +10749,7 @@
           <p:cNvPr id="9" name="Picture 8">
             <a:extLst>
               <a:ext uri="{FF2B5EF4-FFF2-40B4-BE49-F238E27FC236}">
-                <a16:creationId xmlns="" xmlns:a16="http://schemas.microsoft.com/office/drawing/2014/main" id="{BFB65409-50C0-1C48-4C06-AA7695D3A296}"/>
+                <a16:creationId xmlns:a16="http://schemas.microsoft.com/office/drawing/2014/main" id="{BFB65409-50C0-1C48-4C06-AA7695D3A296}"/>
               </a:ext>
             </a:extLst>
           </p:cNvPr>
@@ -8171,6 +10780,452 @@
           </a:prstGeom>
         </p:spPr>
       </p:pic>
+      <p:sp>
+        <p:nvSpPr>
+          <p:cNvPr id="2" name="Rectangle 1">
+            <a:extLst>
+              <a:ext uri="{FF2B5EF4-FFF2-40B4-BE49-F238E27FC236}">
+                <a16:creationId xmlns:a16="http://schemas.microsoft.com/office/drawing/2014/main" id="{C8B334A1-6FD9-8F48-CC4C-A2E2B536ECC6}"/>
+              </a:ext>
+            </a:extLst>
+          </p:cNvPr>
+          <p:cNvSpPr txBox="1">
+            <a:spLocks noChangeArrowheads="1"/>
+          </p:cNvSpPr>
+          <p:nvPr/>
+        </p:nvSpPr>
+        <p:spPr bwMode="auto">
+          <a:xfrm>
+            <a:off x="444624" y="1349105"/>
+            <a:ext cx="8291264" cy="4739759"/>
+          </a:xfrm>
+          <a:prstGeom prst="rect">
+            <a:avLst/>
+          </a:prstGeom>
+          <a:noFill/>
+          <a:ln>
+            <a:noFill/>
+          </a:ln>
+          <a:effectLst/>
+          <a:extLst>
+            <a:ext uri="{909E8E84-426E-40DD-AFC4-6F175D3DCCD1}">
+              <a14:hiddenFill xmlns:a14="http://schemas.microsoft.com/office/drawing/2010/main">
+                <a:solidFill>
+                  <a:schemeClr val="accent1"/>
+                </a:solidFill>
+              </a14:hiddenFill>
+            </a:ext>
+            <a:ext uri="{91240B29-F687-4F45-9708-019B960494DF}">
+              <a14:hiddenLine xmlns:a14="http://schemas.microsoft.com/office/drawing/2010/main" w="9525">
+                <a:solidFill>
+                  <a:schemeClr val="tx1"/>
+                </a:solidFill>
+                <a:miter lim="800000"/>
+                <a:headEnd/>
+                <a:tailEnd/>
+              </a14:hiddenLine>
+            </a:ext>
+            <a:ext uri="{AF507438-7753-43E0-B8FC-AC1667EBCBE1}">
+              <a14:hiddenEffects xmlns:a14="http://schemas.microsoft.com/office/drawing/2010/main">
+                <a:effectLst>
+                  <a:outerShdw dist="35921" dir="2700000" algn="ctr" rotWithShape="0">
+                    <a:schemeClr val="bg2"/>
+                  </a:outerShdw>
+                </a:effectLst>
+              </a14:hiddenEffects>
+            </a:ext>
+          </a:extLst>
+        </p:spPr>
+        <p:txBody>
+          <a:bodyPr vert="horz" wrap="square" lIns="91440" tIns="45720" rIns="91440" bIns="45720" numCol="1" rtlCol="0" anchor="ctr" anchorCtr="0" compatLnSpc="1">
+            <a:prstTxWarp prst="textNoShape">
+              <a:avLst/>
+            </a:prstTxWarp>
+            <a:spAutoFit/>
+          </a:bodyPr>
+          <a:lstStyle>
+            <a:lvl1pPr marL="342900" indent="-342900" algn="l" defTabSz="914400" rtl="0" eaLnBrk="1" latinLnBrk="0" hangingPunct="1">
+              <a:spcBef>
+                <a:spcPct val="20000"/>
+              </a:spcBef>
+              <a:buFont typeface="Arial" pitchFamily="34" charset="0"/>
+              <a:buChar char="•"/>
+              <a:defRPr sz="3200" kern="1200">
+                <a:solidFill>
+                  <a:schemeClr val="tx1"/>
+                </a:solidFill>
+                <a:latin typeface="+mn-lt"/>
+                <a:ea typeface="+mn-ea"/>
+                <a:cs typeface="+mn-cs"/>
+              </a:defRPr>
+            </a:lvl1pPr>
+            <a:lvl2pPr marL="742950" indent="-285750" algn="l" defTabSz="914400" rtl="0" eaLnBrk="1" latinLnBrk="0" hangingPunct="1">
+              <a:spcBef>
+                <a:spcPct val="20000"/>
+              </a:spcBef>
+              <a:buFont typeface="Arial" pitchFamily="34" charset="0"/>
+              <a:buChar char="–"/>
+              <a:defRPr sz="2800" kern="1200">
+                <a:solidFill>
+                  <a:schemeClr val="tx1"/>
+                </a:solidFill>
+                <a:latin typeface="+mn-lt"/>
+                <a:ea typeface="+mn-ea"/>
+                <a:cs typeface="+mn-cs"/>
+              </a:defRPr>
+            </a:lvl2pPr>
+            <a:lvl3pPr marL="1143000" indent="-228600" algn="l" defTabSz="914400" rtl="0" eaLnBrk="1" latinLnBrk="0" hangingPunct="1">
+              <a:spcBef>
+                <a:spcPct val="20000"/>
+              </a:spcBef>
+              <a:buFont typeface="Arial" pitchFamily="34" charset="0"/>
+              <a:buChar char="•"/>
+              <a:defRPr sz="2400" kern="1200">
+                <a:solidFill>
+                  <a:schemeClr val="tx1"/>
+                </a:solidFill>
+                <a:latin typeface="+mn-lt"/>
+                <a:ea typeface="+mn-ea"/>
+                <a:cs typeface="+mn-cs"/>
+              </a:defRPr>
+            </a:lvl3pPr>
+            <a:lvl4pPr marL="1600200" indent="-228600" algn="l" defTabSz="914400" rtl="0" eaLnBrk="1" latinLnBrk="0" hangingPunct="1">
+              <a:spcBef>
+                <a:spcPct val="20000"/>
+              </a:spcBef>
+              <a:buFont typeface="Arial" pitchFamily="34" charset="0"/>
+              <a:buChar char="–"/>
+              <a:defRPr sz="2000" kern="1200">
+                <a:solidFill>
+                  <a:schemeClr val="tx1"/>
+                </a:solidFill>
+                <a:latin typeface="+mn-lt"/>
+                <a:ea typeface="+mn-ea"/>
+                <a:cs typeface="+mn-cs"/>
+              </a:defRPr>
+            </a:lvl4pPr>
+            <a:lvl5pPr marL="2057400" indent="-228600" algn="l" defTabSz="914400" rtl="0" eaLnBrk="1" latinLnBrk="0" hangingPunct="1">
+              <a:spcBef>
+                <a:spcPct val="20000"/>
+              </a:spcBef>
+              <a:buFont typeface="Arial" pitchFamily="34" charset="0"/>
+              <a:buChar char="»"/>
+              <a:defRPr sz="2000" kern="1200">
+                <a:solidFill>
+                  <a:schemeClr val="tx1"/>
+                </a:solidFill>
+                <a:latin typeface="+mn-lt"/>
+                <a:ea typeface="+mn-ea"/>
+                <a:cs typeface="+mn-cs"/>
+              </a:defRPr>
+            </a:lvl5pPr>
+            <a:lvl6pPr marL="2514600" indent="-228600" algn="l" defTabSz="914400" rtl="0" eaLnBrk="1" latinLnBrk="0" hangingPunct="1">
+              <a:spcBef>
+                <a:spcPct val="20000"/>
+              </a:spcBef>
+              <a:buFont typeface="Arial" pitchFamily="34" charset="0"/>
+              <a:buChar char="•"/>
+              <a:defRPr sz="2000" kern="1200">
+                <a:solidFill>
+                  <a:schemeClr val="tx1"/>
+                </a:solidFill>
+                <a:latin typeface="+mn-lt"/>
+                <a:ea typeface="+mn-ea"/>
+                <a:cs typeface="+mn-cs"/>
+              </a:defRPr>
+            </a:lvl6pPr>
+            <a:lvl7pPr marL="2971800" indent="-228600" algn="l" defTabSz="914400" rtl="0" eaLnBrk="1" latinLnBrk="0" hangingPunct="1">
+              <a:spcBef>
+                <a:spcPct val="20000"/>
+              </a:spcBef>
+              <a:buFont typeface="Arial" pitchFamily="34" charset="0"/>
+              <a:buChar char="•"/>
+              <a:defRPr sz="2000" kern="1200">
+                <a:solidFill>
+                  <a:schemeClr val="tx1"/>
+                </a:solidFill>
+                <a:latin typeface="+mn-lt"/>
+                <a:ea typeface="+mn-ea"/>
+                <a:cs typeface="+mn-cs"/>
+              </a:defRPr>
+            </a:lvl7pPr>
+            <a:lvl8pPr marL="3429000" indent="-228600" algn="l" defTabSz="914400" rtl="0" eaLnBrk="1" latinLnBrk="0" hangingPunct="1">
+              <a:spcBef>
+                <a:spcPct val="20000"/>
+              </a:spcBef>
+              <a:buFont typeface="Arial" pitchFamily="34" charset="0"/>
+              <a:buChar char="•"/>
+              <a:defRPr sz="2000" kern="1200">
+                <a:solidFill>
+                  <a:schemeClr val="tx1"/>
+                </a:solidFill>
+                <a:latin typeface="+mn-lt"/>
+                <a:ea typeface="+mn-ea"/>
+                <a:cs typeface="+mn-cs"/>
+              </a:defRPr>
+            </a:lvl8pPr>
+            <a:lvl9pPr marL="3886200" indent="-228600" algn="l" defTabSz="914400" rtl="0" eaLnBrk="1" latinLnBrk="0" hangingPunct="1">
+              <a:spcBef>
+                <a:spcPct val="20000"/>
+              </a:spcBef>
+              <a:buFont typeface="Arial" pitchFamily="34" charset="0"/>
+              <a:buChar char="•"/>
+              <a:defRPr sz="2000" kern="1200">
+                <a:solidFill>
+                  <a:schemeClr val="tx1"/>
+                </a:solidFill>
+                <a:latin typeface="+mn-lt"/>
+                <a:ea typeface="+mn-ea"/>
+                <a:cs typeface="+mn-cs"/>
+              </a:defRPr>
+            </a:lvl9pPr>
+          </a:lstStyle>
+          <a:p>
+            <a:pPr marL="0" indent="0" eaLnBrk="0" fontAlgn="base" hangingPunct="0">
+              <a:spcBef>
+                <a:spcPct val="0"/>
+              </a:spcBef>
+              <a:spcAft>
+                <a:spcPct val="0"/>
+              </a:spcAft>
+              <a:buFont typeface="Arial" pitchFamily="34" charset="0"/>
+              <a:buNone/>
+            </a:pPr>
+            <a:r>
+              <a:rPr lang="en-US" altLang="en-US" sz="1800" b="1" dirty="0">
+                <a:latin typeface="Verdana" panose="020B0604030504040204" pitchFamily="34" charset="0"/>
+                <a:ea typeface="Verdana" panose="020B0604030504040204" pitchFamily="34" charset="0"/>
+              </a:rPr>
+              <a:t>Phase 1 – Data &amp; Physics:</a:t>
+            </a:r>
+            <a:endParaRPr lang="en-US" altLang="en-US" sz="1800" dirty="0">
+              <a:latin typeface="Verdana" panose="020B0604030504040204" pitchFamily="34" charset="0"/>
+              <a:ea typeface="Verdana" panose="020B0604030504040204" pitchFamily="34" charset="0"/>
+            </a:endParaRPr>
+          </a:p>
+          <a:p>
+            <a:pPr marL="0" indent="0" eaLnBrk="0" fontAlgn="base" hangingPunct="0">
+              <a:spcBef>
+                <a:spcPct val="0"/>
+              </a:spcBef>
+              <a:spcAft>
+                <a:spcPct val="0"/>
+              </a:spcAft>
+              <a:buFont typeface="Arial" pitchFamily="34" charset="0"/>
+              <a:buNone/>
+            </a:pPr>
+            <a:r>
+              <a:rPr lang="en-US" altLang="en-US" sz="1600" dirty="0">
+                <a:latin typeface="Verdana" panose="020B0604030504040204" pitchFamily="34" charset="0"/>
+                <a:ea typeface="Verdana" panose="020B0604030504040204" pitchFamily="34" charset="0"/>
+              </a:rPr>
+              <a:t>Engineered a custom Lua profile for OSRM to ensure mathematically generated routes are actually drivable by heavy 12-meter vehicles.</a:t>
+            </a:r>
+          </a:p>
+          <a:p>
+            <a:pPr marL="0" indent="0" eaLnBrk="0" fontAlgn="base" hangingPunct="0">
+              <a:spcBef>
+                <a:spcPct val="0"/>
+              </a:spcBef>
+              <a:spcAft>
+                <a:spcPct val="0"/>
+              </a:spcAft>
+              <a:buFont typeface="Arial" pitchFamily="34" charset="0"/>
+              <a:buNone/>
+            </a:pPr>
+            <a:endParaRPr lang="en-US" altLang="en-US" sz="1800" b="1" dirty="0">
+              <a:latin typeface="Verdana" panose="020B0604030504040204" pitchFamily="34" charset="0"/>
+              <a:ea typeface="Verdana" panose="020B0604030504040204" pitchFamily="34" charset="0"/>
+            </a:endParaRPr>
+          </a:p>
+          <a:p>
+            <a:pPr marL="0" indent="0" eaLnBrk="0" fontAlgn="base" hangingPunct="0">
+              <a:spcBef>
+                <a:spcPct val="0"/>
+              </a:spcBef>
+              <a:spcAft>
+                <a:spcPct val="0"/>
+              </a:spcAft>
+              <a:buFont typeface="Arial" pitchFamily="34" charset="0"/>
+              <a:buNone/>
+            </a:pPr>
+            <a:r>
+              <a:rPr lang="en-US" altLang="en-US" sz="1800" b="1" dirty="0">
+                <a:latin typeface="Verdana" panose="020B0604030504040204" pitchFamily="34" charset="0"/>
+                <a:ea typeface="Verdana" panose="020B0604030504040204" pitchFamily="34" charset="0"/>
+              </a:rPr>
+              <a:t>Phase 2 – Algorithmic Tuning:</a:t>
+            </a:r>
+            <a:endParaRPr lang="en-US" altLang="en-US" sz="1800" dirty="0">
+              <a:latin typeface="Verdana" panose="020B0604030504040204" pitchFamily="34" charset="0"/>
+              <a:ea typeface="Verdana" panose="020B0604030504040204" pitchFamily="34" charset="0"/>
+            </a:endParaRPr>
+          </a:p>
+          <a:p>
+            <a:pPr marL="0" indent="0" eaLnBrk="0" fontAlgn="base" hangingPunct="0">
+              <a:spcBef>
+                <a:spcPct val="0"/>
+              </a:spcBef>
+              <a:spcAft>
+                <a:spcPct val="0"/>
+              </a:spcAft>
+              <a:buFont typeface="Arial" pitchFamily="34" charset="0"/>
+              <a:buNone/>
+            </a:pPr>
+            <a:r>
+              <a:rPr lang="en-US" altLang="en-US" sz="1600" dirty="0">
+                <a:latin typeface="Verdana" panose="020B0604030504040204" pitchFamily="34" charset="0"/>
+                <a:ea typeface="Verdana" panose="020B0604030504040204" pitchFamily="34" charset="0"/>
+              </a:rPr>
+              <a:t>Conducted exhaustive benchmarking of 30+ Or-Tools configurations. Identified that basic “Savings” heuristics got stuck in local minima, leading to massive inefficiencies.</a:t>
+            </a:r>
+          </a:p>
+          <a:p>
+            <a:pPr marL="0" indent="0" eaLnBrk="0" fontAlgn="base" hangingPunct="0">
+              <a:spcBef>
+                <a:spcPct val="0"/>
+              </a:spcBef>
+              <a:spcAft>
+                <a:spcPct val="0"/>
+              </a:spcAft>
+              <a:buFont typeface="Arial" pitchFamily="34" charset="0"/>
+              <a:buNone/>
+            </a:pPr>
+            <a:endParaRPr lang="en-US" altLang="en-US" sz="1800" b="1" dirty="0">
+              <a:latin typeface="Verdana" panose="020B0604030504040204" pitchFamily="34" charset="0"/>
+              <a:ea typeface="Verdana" panose="020B0604030504040204" pitchFamily="34" charset="0"/>
+            </a:endParaRPr>
+          </a:p>
+          <a:p>
+            <a:pPr marL="0" indent="0" eaLnBrk="0" fontAlgn="base" hangingPunct="0">
+              <a:spcBef>
+                <a:spcPct val="0"/>
+              </a:spcBef>
+              <a:spcAft>
+                <a:spcPct val="0"/>
+              </a:spcAft>
+              <a:buFont typeface="Arial" pitchFamily="34" charset="0"/>
+              <a:buNone/>
+            </a:pPr>
+            <a:r>
+              <a:rPr lang="en-US" altLang="en-US" sz="1800" b="1" dirty="0">
+                <a:latin typeface="Verdana" panose="020B0604030504040204" pitchFamily="34" charset="0"/>
+                <a:ea typeface="Verdana" panose="020B0604030504040204" pitchFamily="34" charset="0"/>
+              </a:rPr>
+              <a:t>Phase 3 – The Breakthrough:</a:t>
+            </a:r>
+            <a:endParaRPr lang="en-US" altLang="en-US" sz="1800" dirty="0">
+              <a:latin typeface="Verdana" panose="020B0604030504040204" pitchFamily="34" charset="0"/>
+              <a:ea typeface="Verdana" panose="020B0604030504040204" pitchFamily="34" charset="0"/>
+            </a:endParaRPr>
+          </a:p>
+          <a:p>
+            <a:pPr marL="0" indent="0" eaLnBrk="0" fontAlgn="base" hangingPunct="0">
+              <a:spcBef>
+                <a:spcPct val="0"/>
+              </a:spcBef>
+              <a:spcAft>
+                <a:spcPct val="0"/>
+              </a:spcAft>
+              <a:buFont typeface="Arial" pitchFamily="34" charset="0"/>
+              <a:buNone/>
+            </a:pPr>
+            <a:r>
+              <a:rPr lang="en-US" altLang="en-US" sz="1600" dirty="0">
+                <a:latin typeface="Verdana" panose="020B0604030504040204" pitchFamily="34" charset="0"/>
+                <a:ea typeface="Verdana" panose="020B0604030504040204" pitchFamily="34" charset="0"/>
+              </a:rPr>
+              <a:t>Discovered the optimal mathematical configuration: pairing the “</a:t>
+            </a:r>
+            <a:r>
+              <a:rPr lang="en-US" altLang="en-US" sz="1600" dirty="0" err="1">
+                <a:latin typeface="Verdana" panose="020B0604030504040204" pitchFamily="34" charset="0"/>
+                <a:ea typeface="Verdana" panose="020B0604030504040204" pitchFamily="34" charset="0"/>
+              </a:rPr>
+              <a:t>Christofides</a:t>
+            </a:r>
+            <a:r>
+              <a:rPr lang="en-US" altLang="en-US" sz="1600" dirty="0">
+                <a:latin typeface="Verdana" panose="020B0604030504040204" pitchFamily="34" charset="0"/>
+                <a:ea typeface="Verdana" panose="020B0604030504040204" pitchFamily="34" charset="0"/>
+              </a:rPr>
+              <a:t>” graph theory heuristic with a “Simulated Annealing” metaheuristic, reducing required fleet size significantly.</a:t>
+            </a:r>
+          </a:p>
+          <a:p>
+            <a:pPr marL="0" indent="0" eaLnBrk="0" fontAlgn="base" hangingPunct="0">
+              <a:spcBef>
+                <a:spcPct val="0"/>
+              </a:spcBef>
+              <a:spcAft>
+                <a:spcPct val="0"/>
+              </a:spcAft>
+              <a:buFont typeface="Arial" pitchFamily="34" charset="0"/>
+              <a:buNone/>
+            </a:pPr>
+            <a:endParaRPr lang="en-US" altLang="en-US" sz="1800" b="1" dirty="0">
+              <a:latin typeface="Verdana" panose="020B0604030504040204" pitchFamily="34" charset="0"/>
+              <a:ea typeface="Verdana" panose="020B0604030504040204" pitchFamily="34" charset="0"/>
+            </a:endParaRPr>
+          </a:p>
+          <a:p>
+            <a:pPr marL="0" indent="0" eaLnBrk="0" fontAlgn="base" hangingPunct="0">
+              <a:spcBef>
+                <a:spcPct val="0"/>
+              </a:spcBef>
+              <a:spcAft>
+                <a:spcPct val="0"/>
+              </a:spcAft>
+              <a:buFont typeface="Arial" pitchFamily="34" charset="0"/>
+              <a:buNone/>
+            </a:pPr>
+            <a:r>
+              <a:rPr lang="en-US" altLang="en-US" sz="1800" b="1" dirty="0">
+                <a:latin typeface="Verdana" panose="020B0604030504040204" pitchFamily="34" charset="0"/>
+                <a:ea typeface="Verdana" panose="020B0604030504040204" pitchFamily="34" charset="0"/>
+              </a:rPr>
+              <a:t>Phase 4 – Production Security:</a:t>
+            </a:r>
+            <a:endParaRPr lang="en-US" altLang="en-US" sz="1800" dirty="0">
+              <a:latin typeface="Verdana" panose="020B0604030504040204" pitchFamily="34" charset="0"/>
+              <a:ea typeface="Verdana" panose="020B0604030504040204" pitchFamily="34" charset="0"/>
+            </a:endParaRPr>
+          </a:p>
+          <a:p>
+            <a:pPr marL="0" indent="0" eaLnBrk="0" fontAlgn="base" hangingPunct="0">
+              <a:spcBef>
+                <a:spcPct val="0"/>
+              </a:spcBef>
+              <a:spcAft>
+                <a:spcPct val="0"/>
+              </a:spcAft>
+              <a:buFont typeface="Arial" pitchFamily="34" charset="0"/>
+              <a:buNone/>
+            </a:pPr>
+            <a:r>
+              <a:rPr lang="en-US" altLang="en-US" sz="1600" dirty="0">
+                <a:latin typeface="Verdana" panose="020B0604030504040204" pitchFamily="34" charset="0"/>
+                <a:ea typeface="Verdana" panose="020B0604030504040204" pitchFamily="34" charset="0"/>
+              </a:rPr>
+              <a:t>Overcame strict browser CORS policies and Next.js caching errors by engineering a reverse-proxy tunnel using </a:t>
+            </a:r>
+            <a:r>
+              <a:rPr lang="en-US" altLang="en-US" sz="1600" dirty="0" err="1">
+                <a:latin typeface="Verdana" panose="020B0604030504040204" pitchFamily="34" charset="0"/>
+                <a:ea typeface="Verdana" panose="020B0604030504040204" pitchFamily="34" charset="0"/>
+              </a:rPr>
+              <a:t>DuckDNS</a:t>
+            </a:r>
+            <a:r>
+              <a:rPr lang="en-US" altLang="en-US" sz="1600" dirty="0">
+                <a:latin typeface="Verdana" panose="020B0604030504040204" pitchFamily="34" charset="0"/>
+                <a:ea typeface="Verdana" panose="020B0604030504040204" pitchFamily="34" charset="0"/>
+              </a:rPr>
+              <a:t> and Let’s Encrypt SSL certificates.</a:t>
+            </a:r>
+          </a:p>
+        </p:txBody>
+      </p:sp>
     </p:spTree>
     <p:extLst>
       <p:ext uri="{BB962C8B-B14F-4D97-AF65-F5344CB8AC3E}">
@@ -8201,35 +11256,6 @@
           <a:chExt cx="0" cy="0"/>
         </a:xfrm>
       </p:grpSpPr>
-      <p:pic>
-        <p:nvPicPr>
-          <p:cNvPr id="4" name="Content Placeholder 3"/>
-          <p:cNvPicPr>
-            <a:picLocks noGrp="1" noChangeAspect="1"/>
-          </p:cNvPicPr>
-          <p:nvPr>
-            <p:ph idx="1"/>
-          </p:nvPr>
-        </p:nvPicPr>
-        <p:blipFill>
-          <a:blip r:embed="rId3" cstate="print">
-            <a:extLst>
-              <a:ext uri="{28A0092B-C50C-407E-A947-70E740481C1C}">
-                <a14:useLocalDpi xmlns:a14="http://schemas.microsoft.com/office/drawing/2010/main" val="0"/>
-              </a:ext>
-            </a:extLst>
-          </a:blip>
-          <a:stretch>
-            <a:fillRect/>
-          </a:stretch>
-        </p:blipFill>
-        <p:spPr>
-          <a:xfrm>
-            <a:off x="44047" y="0"/>
-            <a:ext cx="9180512" cy="6885384"/>
-          </a:xfrm>
-        </p:spPr>
-      </p:pic>
       <p:sp>
         <p:nvSpPr>
           <p:cNvPr id="5" name="Rectangle 1"/>
@@ -8355,7 +11381,7 @@
           <p:nvPr/>
         </p:nvPicPr>
         <p:blipFill>
-          <a:blip r:embed="rId4" cstate="print">
+          <a:blip r:embed="rId3" cstate="print">
             <a:extLst>
               <a:ext uri="{28A0092B-C50C-407E-A947-70E740481C1C}">
                 <a14:useLocalDpi xmlns:a14="http://schemas.microsoft.com/office/drawing/2010/main" val="0"/>
@@ -8381,7 +11407,7 @@
           <p:cNvPr id="6" name="TextBox 5">
             <a:extLst>
               <a:ext uri="{FF2B5EF4-FFF2-40B4-BE49-F238E27FC236}">
-                <a16:creationId xmlns="" xmlns:a16="http://schemas.microsoft.com/office/drawing/2014/main" id="{AE24D516-77C6-C96A-5F77-D099623448D8}"/>
+                <a16:creationId xmlns:a16="http://schemas.microsoft.com/office/drawing/2014/main" id="{AE24D516-77C6-C96A-5F77-D099623448D8}"/>
               </a:ext>
             </a:extLst>
           </p:cNvPr>
@@ -8436,10 +11462,705 @@
           </a:p>
         </p:txBody>
       </p:sp>
+      <p:sp>
+        <p:nvSpPr>
+          <p:cNvPr id="10" name="Rectangle 1">
+            <a:extLst>
+              <a:ext uri="{FF2B5EF4-FFF2-40B4-BE49-F238E27FC236}">
+                <a16:creationId xmlns:a16="http://schemas.microsoft.com/office/drawing/2014/main" id="{372C8601-DE05-D6CC-B9AB-1E9D7F9DD2C1}"/>
+              </a:ext>
+            </a:extLst>
+          </p:cNvPr>
+          <p:cNvSpPr>
+            <a:spLocks noGrp="1" noChangeArrowheads="1"/>
+          </p:cNvSpPr>
+          <p:nvPr>
+            <p:ph idx="1"/>
+          </p:nvPr>
+        </p:nvSpPr>
+        <p:spPr bwMode="auto">
+          <a:xfrm>
+            <a:off x="462372" y="1207194"/>
+            <a:ext cx="8219256" cy="5047536"/>
+          </a:xfrm>
+          <a:prstGeom prst="rect">
+            <a:avLst/>
+          </a:prstGeom>
+          <a:noFill/>
+          <a:ln>
+            <a:noFill/>
+          </a:ln>
+          <a:effectLst/>
+          <a:extLst>
+            <a:ext uri="{909E8E84-426E-40DD-AFC4-6F175D3DCCD1}">
+              <a14:hiddenFill xmlns:a14="http://schemas.microsoft.com/office/drawing/2010/main">
+                <a:solidFill>
+                  <a:schemeClr val="accent1"/>
+                </a:solidFill>
+              </a14:hiddenFill>
+            </a:ext>
+            <a:ext uri="{91240B29-F687-4F45-9708-019B960494DF}">
+              <a14:hiddenLine xmlns:a14="http://schemas.microsoft.com/office/drawing/2010/main" w="9525">
+                <a:solidFill>
+                  <a:schemeClr val="tx1"/>
+                </a:solidFill>
+                <a:miter lim="800000"/>
+                <a:headEnd/>
+                <a:tailEnd/>
+              </a14:hiddenLine>
+            </a:ext>
+            <a:ext uri="{AF507438-7753-43E0-B8FC-AC1667EBCBE1}">
+              <a14:hiddenEffects xmlns:a14="http://schemas.microsoft.com/office/drawing/2010/main">
+                <a:effectLst>
+                  <a:outerShdw dist="35921" dir="2700000" algn="ctr" rotWithShape="0">
+                    <a:schemeClr val="bg2"/>
+                  </a:outerShdw>
+                </a:effectLst>
+              </a14:hiddenEffects>
+            </a:ext>
+          </a:extLst>
+        </p:spPr>
+        <p:txBody>
+          <a:bodyPr vert="horz" wrap="square" lIns="91440" tIns="45720" rIns="91440" bIns="45720" numCol="1" anchor="ctr" anchorCtr="0" compatLnSpc="1">
+            <a:prstTxWarp prst="textNoShape">
+              <a:avLst/>
+            </a:prstTxWarp>
+            <a:spAutoFit/>
+          </a:bodyPr>
+          <a:lstStyle/>
+          <a:p>
+            <a:pPr marL="0" marR="0" lvl="0" indent="0" algn="l" defTabSz="914400" rtl="0" eaLnBrk="0" fontAlgn="base" latinLnBrk="0" hangingPunct="0">
+              <a:lnSpc>
+                <a:spcPct val="100000"/>
+              </a:lnSpc>
+              <a:spcBef>
+                <a:spcPct val="0"/>
+              </a:spcBef>
+              <a:spcAft>
+                <a:spcPct val="0"/>
+              </a:spcAft>
+              <a:buClrTx/>
+              <a:buSzTx/>
+              <a:buNone/>
+              <a:tabLst/>
+            </a:pPr>
+            <a:r>
+              <a:rPr kumimoji="0" lang="en-US" altLang="en-US" sz="1800" b="1" i="0" u="none" strike="noStrike" cap="none" normalizeH="0" baseline="0" dirty="0">
+                <a:ln>
+                  <a:noFill/>
+                </a:ln>
+                <a:solidFill>
+                  <a:schemeClr val="tx1"/>
+                </a:solidFill>
+                <a:effectLst/>
+                <a:latin typeface="Verdana" panose="020B0604030504040204" pitchFamily="34" charset="0"/>
+                <a:ea typeface="Verdana" panose="020B0604030504040204" pitchFamily="34" charset="0"/>
+              </a:rPr>
+              <a:t>Phase 1: Digitization:</a:t>
+            </a:r>
+            <a:r>
+              <a:rPr kumimoji="0" lang="en-US" altLang="en-US" sz="1800" b="0" i="0" u="none" strike="noStrike" cap="none" normalizeH="0" baseline="0" dirty="0">
+                <a:ln>
+                  <a:noFill/>
+                </a:ln>
+                <a:solidFill>
+                  <a:schemeClr val="tx1"/>
+                </a:solidFill>
+                <a:effectLst/>
+                <a:latin typeface="Verdana" panose="020B0604030504040204" pitchFamily="34" charset="0"/>
+                <a:ea typeface="Verdana" panose="020B0604030504040204" pitchFamily="34" charset="0"/>
+              </a:rPr>
+              <a:t> </a:t>
+            </a:r>
+            <a:r>
+              <a:rPr kumimoji="0" lang="en-US" altLang="en-US" sz="1600" b="0" i="0" u="none" strike="noStrike" cap="none" normalizeH="0" baseline="0" dirty="0">
+                <a:ln>
+                  <a:noFill/>
+                </a:ln>
+                <a:solidFill>
+                  <a:schemeClr val="tx1"/>
+                </a:solidFill>
+                <a:effectLst/>
+                <a:latin typeface="Verdana" panose="020B0604030504040204" pitchFamily="34" charset="0"/>
+                <a:ea typeface="Verdana" panose="020B0604030504040204" pitchFamily="34" charset="0"/>
+              </a:rPr>
+              <a:t>Converting Stops addresses into precise GPS coordinates.</a:t>
+            </a:r>
+          </a:p>
+          <a:p>
+            <a:pPr marL="0" marR="0" lvl="0" indent="0" algn="l" defTabSz="914400" rtl="0" eaLnBrk="0" fontAlgn="base" latinLnBrk="0" hangingPunct="0">
+              <a:lnSpc>
+                <a:spcPct val="100000"/>
+              </a:lnSpc>
+              <a:spcBef>
+                <a:spcPct val="0"/>
+              </a:spcBef>
+              <a:spcAft>
+                <a:spcPct val="0"/>
+              </a:spcAft>
+              <a:buClrTx/>
+              <a:buSzTx/>
+              <a:buNone/>
+              <a:tabLst/>
+            </a:pPr>
+            <a:endParaRPr kumimoji="0" lang="en-US" altLang="en-US" sz="1800" b="0" i="0" u="none" strike="noStrike" cap="none" normalizeH="0" baseline="0" dirty="0">
+              <a:ln>
+                <a:noFill/>
+              </a:ln>
+              <a:solidFill>
+                <a:schemeClr val="tx1"/>
+              </a:solidFill>
+              <a:effectLst/>
+              <a:latin typeface="Verdana" panose="020B0604030504040204" pitchFamily="34" charset="0"/>
+              <a:ea typeface="Verdana" panose="020B0604030504040204" pitchFamily="34" charset="0"/>
+            </a:endParaRPr>
+          </a:p>
+          <a:p>
+            <a:pPr marL="0" marR="0" lvl="0" indent="0" algn="l" defTabSz="914400" rtl="0" eaLnBrk="0" fontAlgn="base" latinLnBrk="0" hangingPunct="0">
+              <a:lnSpc>
+                <a:spcPct val="100000"/>
+              </a:lnSpc>
+              <a:spcBef>
+                <a:spcPct val="0"/>
+              </a:spcBef>
+              <a:spcAft>
+                <a:spcPct val="0"/>
+              </a:spcAft>
+              <a:buClrTx/>
+              <a:buSzTx/>
+              <a:buNone/>
+              <a:tabLst/>
+            </a:pPr>
+            <a:r>
+              <a:rPr kumimoji="0" lang="en-US" altLang="en-US" sz="1800" b="1" i="0" u="none" strike="noStrike" cap="none" normalizeH="0" baseline="0" dirty="0">
+                <a:ln>
+                  <a:noFill/>
+                </a:ln>
+                <a:solidFill>
+                  <a:schemeClr val="tx1"/>
+                </a:solidFill>
+                <a:effectLst/>
+                <a:latin typeface="Verdana" panose="020B0604030504040204" pitchFamily="34" charset="0"/>
+                <a:ea typeface="Verdana" panose="020B0604030504040204" pitchFamily="34" charset="0"/>
+              </a:rPr>
+              <a:t>Phase 2: Matrix Generation:</a:t>
+            </a:r>
+            <a:r>
+              <a:rPr kumimoji="0" lang="en-US" altLang="en-US" sz="1800" b="0" i="0" u="none" strike="noStrike" cap="none" normalizeH="0" baseline="0" dirty="0">
+                <a:ln>
+                  <a:noFill/>
+                </a:ln>
+                <a:solidFill>
+                  <a:schemeClr val="tx1"/>
+                </a:solidFill>
+                <a:effectLst/>
+                <a:latin typeface="Verdana" panose="020B0604030504040204" pitchFamily="34" charset="0"/>
+                <a:ea typeface="Verdana" panose="020B0604030504040204" pitchFamily="34" charset="0"/>
+              </a:rPr>
+              <a:t> </a:t>
+            </a:r>
+            <a:r>
+              <a:rPr kumimoji="0" lang="en-US" altLang="en-US" sz="1600" b="0" i="0" u="none" strike="noStrike" cap="none" normalizeH="0" baseline="0" dirty="0">
+                <a:ln>
+                  <a:noFill/>
+                </a:ln>
+                <a:solidFill>
+                  <a:schemeClr val="tx1"/>
+                </a:solidFill>
+                <a:effectLst/>
+                <a:latin typeface="Verdana" panose="020B0604030504040204" pitchFamily="34" charset="0"/>
+                <a:ea typeface="Verdana" panose="020B0604030504040204" pitchFamily="34" charset="0"/>
+              </a:rPr>
+              <a:t>Using self-hosted OSRM to calculate a massive "Cost Matrix" (Time/Distance) </a:t>
+            </a:r>
+            <a:r>
+              <a:rPr lang="en-US" altLang="en-US" sz="1600" dirty="0">
+                <a:latin typeface="Verdana" panose="020B0604030504040204" pitchFamily="34" charset="0"/>
+                <a:ea typeface="Verdana" panose="020B0604030504040204" pitchFamily="34" charset="0"/>
+              </a:rPr>
+              <a:t>connecting</a:t>
+            </a:r>
+            <a:r>
+              <a:rPr kumimoji="0" lang="en-US" altLang="en-US" sz="1600" b="0" i="0" u="none" strike="noStrike" cap="none" normalizeH="0" baseline="0" dirty="0">
+                <a:ln>
+                  <a:noFill/>
+                </a:ln>
+                <a:solidFill>
+                  <a:schemeClr val="tx1"/>
+                </a:solidFill>
+                <a:effectLst/>
+                <a:latin typeface="Verdana" panose="020B0604030504040204" pitchFamily="34" charset="0"/>
+                <a:ea typeface="Verdana" panose="020B0604030504040204" pitchFamily="34" charset="0"/>
+              </a:rPr>
+              <a:t> all stops, depots and the campus.</a:t>
+            </a:r>
+          </a:p>
+          <a:p>
+            <a:pPr marL="0" marR="0" lvl="0" indent="0" algn="l" defTabSz="914400" rtl="0" eaLnBrk="0" fontAlgn="base" latinLnBrk="0" hangingPunct="0">
+              <a:lnSpc>
+                <a:spcPct val="100000"/>
+              </a:lnSpc>
+              <a:spcBef>
+                <a:spcPct val="0"/>
+              </a:spcBef>
+              <a:spcAft>
+                <a:spcPct val="0"/>
+              </a:spcAft>
+              <a:buClrTx/>
+              <a:buSzTx/>
+              <a:buNone/>
+              <a:tabLst/>
+            </a:pPr>
+            <a:endParaRPr kumimoji="0" lang="en-US" altLang="en-US" sz="1800" b="0" i="0" u="none" strike="noStrike" cap="none" normalizeH="0" baseline="0" dirty="0">
+              <a:ln>
+                <a:noFill/>
+              </a:ln>
+              <a:solidFill>
+                <a:schemeClr val="tx1"/>
+              </a:solidFill>
+              <a:effectLst/>
+              <a:latin typeface="Verdana" panose="020B0604030504040204" pitchFamily="34" charset="0"/>
+              <a:ea typeface="Verdana" panose="020B0604030504040204" pitchFamily="34" charset="0"/>
+            </a:endParaRPr>
+          </a:p>
+          <a:p>
+            <a:pPr marL="0" marR="0" lvl="0" indent="0" algn="l" defTabSz="914400" rtl="0" eaLnBrk="0" fontAlgn="base" latinLnBrk="0" hangingPunct="0">
+              <a:lnSpc>
+                <a:spcPct val="100000"/>
+              </a:lnSpc>
+              <a:spcBef>
+                <a:spcPct val="0"/>
+              </a:spcBef>
+              <a:spcAft>
+                <a:spcPct val="0"/>
+              </a:spcAft>
+              <a:buClrTx/>
+              <a:buSzTx/>
+              <a:buNone/>
+              <a:tabLst/>
+            </a:pPr>
+            <a:r>
+              <a:rPr kumimoji="0" lang="en-US" altLang="en-US" sz="1800" b="1" i="0" u="none" strike="noStrike" cap="none" normalizeH="0" baseline="0" dirty="0">
+                <a:ln>
+                  <a:noFill/>
+                </a:ln>
+                <a:solidFill>
+                  <a:schemeClr val="tx1"/>
+                </a:solidFill>
+                <a:effectLst/>
+                <a:latin typeface="Verdana" panose="020B0604030504040204" pitchFamily="34" charset="0"/>
+                <a:ea typeface="Verdana" panose="020B0604030504040204" pitchFamily="34" charset="0"/>
+              </a:rPr>
+              <a:t>Phase 3: Optimization:</a:t>
+            </a:r>
+            <a:r>
+              <a:rPr kumimoji="0" lang="en-US" altLang="en-US" sz="1800" b="0" i="0" u="none" strike="noStrike" cap="none" normalizeH="0" baseline="0" dirty="0">
+                <a:ln>
+                  <a:noFill/>
+                </a:ln>
+                <a:solidFill>
+                  <a:schemeClr val="tx1"/>
+                </a:solidFill>
+                <a:effectLst/>
+                <a:latin typeface="Verdana" panose="020B0604030504040204" pitchFamily="34" charset="0"/>
+                <a:ea typeface="Verdana" panose="020B0604030504040204" pitchFamily="34" charset="0"/>
+              </a:rPr>
+              <a:t> </a:t>
+            </a:r>
+            <a:r>
+              <a:rPr kumimoji="0" lang="en-US" altLang="en-US" sz="1600" b="0" i="0" u="none" strike="noStrike" cap="none" normalizeH="0" baseline="0" dirty="0">
+                <a:ln>
+                  <a:noFill/>
+                </a:ln>
+                <a:solidFill>
+                  <a:schemeClr val="tx1"/>
+                </a:solidFill>
+                <a:effectLst/>
+                <a:latin typeface="Verdana" panose="020B0604030504040204" pitchFamily="34" charset="0"/>
+                <a:ea typeface="Verdana" panose="020B0604030504040204" pitchFamily="34" charset="0"/>
+              </a:rPr>
+              <a:t>Applying the “</a:t>
+            </a:r>
+            <a:r>
+              <a:rPr kumimoji="0" lang="en-US" altLang="en-US" sz="1600" b="0" i="0" u="none" strike="noStrike" cap="none" normalizeH="0" baseline="0" dirty="0" err="1">
+                <a:ln>
+                  <a:noFill/>
+                </a:ln>
+                <a:solidFill>
+                  <a:schemeClr val="tx1"/>
+                </a:solidFill>
+                <a:effectLst/>
+                <a:latin typeface="Verdana" panose="020B0604030504040204" pitchFamily="34" charset="0"/>
+                <a:ea typeface="Verdana" panose="020B0604030504040204" pitchFamily="34" charset="0"/>
+              </a:rPr>
+              <a:t>Christofides</a:t>
+            </a:r>
+            <a:r>
+              <a:rPr kumimoji="0" lang="en-US" altLang="en-US" sz="1600" b="0" i="0" u="none" strike="noStrike" cap="none" normalizeH="0" baseline="0" dirty="0">
+                <a:ln>
+                  <a:noFill/>
+                </a:ln>
+                <a:solidFill>
+                  <a:schemeClr val="tx1"/>
+                </a:solidFill>
+                <a:effectLst/>
+                <a:latin typeface="Verdana" panose="020B0604030504040204" pitchFamily="34" charset="0"/>
+                <a:ea typeface="Verdana" panose="020B0604030504040204" pitchFamily="34" charset="0"/>
+              </a:rPr>
+              <a:t>" heuristic for initial route generation, followed by “Simulated Annealing” local search to mathematically pack buses and minimizing distance.</a:t>
+            </a:r>
+          </a:p>
+          <a:p>
+            <a:pPr marL="0" marR="0" lvl="0" indent="0" algn="l" defTabSz="914400" rtl="0" eaLnBrk="0" fontAlgn="base" latinLnBrk="0" hangingPunct="0">
+              <a:lnSpc>
+                <a:spcPct val="100000"/>
+              </a:lnSpc>
+              <a:spcBef>
+                <a:spcPct val="0"/>
+              </a:spcBef>
+              <a:spcAft>
+                <a:spcPct val="0"/>
+              </a:spcAft>
+              <a:buClrTx/>
+              <a:buSzTx/>
+              <a:buNone/>
+              <a:tabLst/>
+            </a:pPr>
+            <a:endParaRPr kumimoji="0" lang="en-US" altLang="en-US" sz="1800" b="0" i="0" u="none" strike="noStrike" cap="none" normalizeH="0" baseline="0" dirty="0">
+              <a:ln>
+                <a:noFill/>
+              </a:ln>
+              <a:solidFill>
+                <a:schemeClr val="tx1"/>
+              </a:solidFill>
+              <a:effectLst/>
+              <a:latin typeface="Verdana" panose="020B0604030504040204" pitchFamily="34" charset="0"/>
+              <a:ea typeface="Verdana" panose="020B0604030504040204" pitchFamily="34" charset="0"/>
+            </a:endParaRPr>
+          </a:p>
+          <a:p>
+            <a:pPr marL="0" marR="0" lvl="0" indent="0" algn="l" defTabSz="914400" rtl="0" eaLnBrk="0" fontAlgn="base" latinLnBrk="0" hangingPunct="0">
+              <a:lnSpc>
+                <a:spcPct val="100000"/>
+              </a:lnSpc>
+              <a:spcBef>
+                <a:spcPct val="0"/>
+              </a:spcBef>
+              <a:spcAft>
+                <a:spcPct val="0"/>
+              </a:spcAft>
+              <a:buClrTx/>
+              <a:buSzTx/>
+              <a:buNone/>
+              <a:tabLst/>
+            </a:pPr>
+            <a:r>
+              <a:rPr kumimoji="0" lang="en-US" altLang="en-US" sz="1800" b="1" i="0" u="none" strike="noStrike" cap="none" normalizeH="0" baseline="0" dirty="0">
+                <a:ln>
+                  <a:noFill/>
+                </a:ln>
+                <a:solidFill>
+                  <a:schemeClr val="tx1"/>
+                </a:solidFill>
+                <a:effectLst/>
+                <a:latin typeface="Verdana" panose="020B0604030504040204" pitchFamily="34" charset="0"/>
+                <a:ea typeface="Verdana" panose="020B0604030504040204" pitchFamily="34" charset="0"/>
+              </a:rPr>
+              <a:t>Phase 4: Visualization:</a:t>
+            </a:r>
+            <a:r>
+              <a:rPr kumimoji="0" lang="en-US" altLang="en-US" sz="1800" b="0" i="0" u="none" strike="noStrike" cap="none" normalizeH="0" baseline="0" dirty="0">
+                <a:ln>
+                  <a:noFill/>
+                </a:ln>
+                <a:solidFill>
+                  <a:schemeClr val="tx1"/>
+                </a:solidFill>
+                <a:effectLst/>
+                <a:latin typeface="Verdana" panose="020B0604030504040204" pitchFamily="34" charset="0"/>
+                <a:ea typeface="Verdana" panose="020B0604030504040204" pitchFamily="34" charset="0"/>
+              </a:rPr>
+              <a:t> </a:t>
+            </a:r>
+            <a:r>
+              <a:rPr kumimoji="0" lang="en-US" altLang="en-US" sz="1600" b="0" i="0" u="none" strike="noStrike" cap="none" normalizeH="0" baseline="0" dirty="0">
+                <a:ln>
+                  <a:noFill/>
+                </a:ln>
+                <a:solidFill>
+                  <a:schemeClr val="tx1"/>
+                </a:solidFill>
+                <a:effectLst/>
+                <a:latin typeface="Verdana" panose="020B0604030504040204" pitchFamily="34" charset="0"/>
+                <a:ea typeface="Verdana" panose="020B0604030504040204" pitchFamily="34" charset="0"/>
+              </a:rPr>
+              <a:t>Rendering the final paths on the admin dashboard using edge-stored </a:t>
+            </a:r>
+            <a:r>
+              <a:rPr kumimoji="0" lang="en-US" altLang="en-US" sz="1600" b="0" i="0" u="none" strike="noStrike" cap="none" normalizeH="0" baseline="0" dirty="0" err="1">
+                <a:ln>
+                  <a:noFill/>
+                </a:ln>
+                <a:solidFill>
+                  <a:schemeClr val="tx1"/>
+                </a:solidFill>
+                <a:effectLst/>
+                <a:latin typeface="Verdana" panose="020B0604030504040204" pitchFamily="34" charset="0"/>
+                <a:ea typeface="Verdana" panose="020B0604030504040204" pitchFamily="34" charset="0"/>
+              </a:rPr>
+              <a:t>PMTiles</a:t>
+            </a:r>
+            <a:r>
+              <a:rPr kumimoji="0" lang="en-US" altLang="en-US" sz="1600" b="0" i="0" u="none" strike="noStrike" cap="none" normalizeH="0" baseline="0" dirty="0">
+                <a:ln>
+                  <a:noFill/>
+                </a:ln>
+                <a:solidFill>
+                  <a:schemeClr val="tx1"/>
+                </a:solidFill>
+                <a:effectLst/>
+                <a:latin typeface="Verdana" panose="020B0604030504040204" pitchFamily="34" charset="0"/>
+                <a:ea typeface="Verdana" panose="020B0604030504040204" pitchFamily="34" charset="0"/>
+              </a:rPr>
+              <a:t>.</a:t>
+            </a:r>
+          </a:p>
+          <a:p>
+            <a:pPr marL="0" marR="0" lvl="0" indent="0" algn="l" defTabSz="914400" rtl="0" eaLnBrk="0" fontAlgn="base" latinLnBrk="0" hangingPunct="0">
+              <a:lnSpc>
+                <a:spcPct val="100000"/>
+              </a:lnSpc>
+              <a:spcBef>
+                <a:spcPct val="0"/>
+              </a:spcBef>
+              <a:spcAft>
+                <a:spcPct val="0"/>
+              </a:spcAft>
+              <a:buClrTx/>
+              <a:buSzTx/>
+              <a:buNone/>
+              <a:tabLst/>
+            </a:pPr>
+            <a:endParaRPr kumimoji="0" lang="en-US" altLang="en-US" sz="1800" b="0" i="0" u="none" strike="noStrike" cap="none" normalizeH="0" baseline="0" dirty="0">
+              <a:ln>
+                <a:noFill/>
+              </a:ln>
+              <a:solidFill>
+                <a:schemeClr val="tx1"/>
+              </a:solidFill>
+              <a:effectLst/>
+              <a:latin typeface="Verdana" panose="020B0604030504040204" pitchFamily="34" charset="0"/>
+              <a:ea typeface="Verdana" panose="020B0604030504040204" pitchFamily="34" charset="0"/>
+            </a:endParaRPr>
+          </a:p>
+          <a:p>
+            <a:pPr marL="0" marR="0" lvl="0" indent="0" algn="l" defTabSz="914400" rtl="0" eaLnBrk="0" fontAlgn="base" latinLnBrk="0" hangingPunct="0">
+              <a:lnSpc>
+                <a:spcPct val="100000"/>
+              </a:lnSpc>
+              <a:spcBef>
+                <a:spcPct val="0"/>
+              </a:spcBef>
+              <a:spcAft>
+                <a:spcPct val="0"/>
+              </a:spcAft>
+              <a:buClrTx/>
+              <a:buSzTx/>
+              <a:buNone/>
+              <a:tabLst/>
+            </a:pPr>
+            <a:r>
+              <a:rPr kumimoji="0" lang="en-US" altLang="en-US" sz="1800" b="1" i="0" u="none" strike="noStrike" cap="none" normalizeH="0" baseline="0" dirty="0">
+                <a:ln>
+                  <a:noFill/>
+                </a:ln>
+                <a:solidFill>
+                  <a:schemeClr val="tx1"/>
+                </a:solidFill>
+                <a:effectLst/>
+                <a:latin typeface="Verdana" panose="020B0604030504040204" pitchFamily="34" charset="0"/>
+                <a:ea typeface="Verdana" panose="020B0604030504040204" pitchFamily="34" charset="0"/>
+              </a:rPr>
+              <a:t>Technologies Used:</a:t>
+            </a:r>
+            <a:endParaRPr kumimoji="0" lang="en-US" altLang="en-US" sz="1800" b="0" i="0" u="none" strike="noStrike" cap="none" normalizeH="0" baseline="0" dirty="0">
+              <a:ln>
+                <a:noFill/>
+              </a:ln>
+              <a:solidFill>
+                <a:schemeClr val="tx1"/>
+              </a:solidFill>
+              <a:effectLst/>
+              <a:latin typeface="Verdana" panose="020B0604030504040204" pitchFamily="34" charset="0"/>
+              <a:ea typeface="Verdana" panose="020B0604030504040204" pitchFamily="34" charset="0"/>
+            </a:endParaRPr>
+          </a:p>
+          <a:p>
+            <a:pPr marL="0" marR="0" lvl="0" indent="0" algn="l" defTabSz="914400" rtl="0" eaLnBrk="0" fontAlgn="base" latinLnBrk="0" hangingPunct="0">
+              <a:lnSpc>
+                <a:spcPct val="100000"/>
+              </a:lnSpc>
+              <a:spcBef>
+                <a:spcPct val="0"/>
+              </a:spcBef>
+              <a:spcAft>
+                <a:spcPct val="0"/>
+              </a:spcAft>
+              <a:buClrTx/>
+              <a:buSzTx/>
+              <a:buNone/>
+              <a:tabLst/>
+            </a:pPr>
+            <a:r>
+              <a:rPr kumimoji="0" lang="en-US" altLang="en-US" sz="1600" b="1" i="0" u="none" strike="noStrike" cap="none" normalizeH="0" baseline="0" dirty="0">
+                <a:ln>
+                  <a:noFill/>
+                </a:ln>
+                <a:solidFill>
+                  <a:schemeClr val="tx1"/>
+                </a:solidFill>
+                <a:effectLst/>
+                <a:latin typeface="Verdana" panose="020B0604030504040204" pitchFamily="34" charset="0"/>
+                <a:ea typeface="Verdana" panose="020B0604030504040204" pitchFamily="34" charset="0"/>
+              </a:rPr>
+              <a:t>Docker:</a:t>
+            </a:r>
+            <a:r>
+              <a:rPr kumimoji="0" lang="en-US" altLang="en-US" sz="1600" b="0" i="0" u="none" strike="noStrike" cap="none" normalizeH="0" baseline="0" dirty="0">
+                <a:ln>
+                  <a:noFill/>
+                </a:ln>
+                <a:solidFill>
+                  <a:schemeClr val="tx1"/>
+                </a:solidFill>
+                <a:effectLst/>
+                <a:latin typeface="Verdana" panose="020B0604030504040204" pitchFamily="34" charset="0"/>
+                <a:ea typeface="Verdana" panose="020B0604030504040204" pitchFamily="34" charset="0"/>
+              </a:rPr>
+              <a:t> For hosting the routing engine.</a:t>
+            </a:r>
+          </a:p>
+          <a:p>
+            <a:pPr marL="0" marR="0" lvl="0" indent="0" algn="l" defTabSz="914400" rtl="0" eaLnBrk="0" fontAlgn="base" latinLnBrk="0" hangingPunct="0">
+              <a:lnSpc>
+                <a:spcPct val="100000"/>
+              </a:lnSpc>
+              <a:spcBef>
+                <a:spcPct val="0"/>
+              </a:spcBef>
+              <a:spcAft>
+                <a:spcPct val="0"/>
+              </a:spcAft>
+              <a:buClrTx/>
+              <a:buSzTx/>
+              <a:buNone/>
+              <a:tabLst/>
+            </a:pPr>
+            <a:r>
+              <a:rPr kumimoji="0" lang="en-US" altLang="en-US" sz="1600" b="1" i="0" u="none" strike="noStrike" cap="none" normalizeH="0" baseline="0" dirty="0">
+                <a:ln>
+                  <a:noFill/>
+                </a:ln>
+                <a:solidFill>
+                  <a:schemeClr val="tx1"/>
+                </a:solidFill>
+                <a:effectLst/>
+                <a:latin typeface="Verdana" panose="020B0604030504040204" pitchFamily="34" charset="0"/>
+                <a:ea typeface="Verdana" panose="020B0604030504040204" pitchFamily="34" charset="0"/>
+              </a:rPr>
+              <a:t>PostgreSQL:</a:t>
+            </a:r>
+            <a:r>
+              <a:rPr kumimoji="0" lang="en-US" altLang="en-US" sz="1600" b="0" i="0" u="none" strike="noStrike" cap="none" normalizeH="0" baseline="0" dirty="0">
+                <a:ln>
+                  <a:noFill/>
+                </a:ln>
+                <a:solidFill>
+                  <a:schemeClr val="tx1"/>
+                </a:solidFill>
+                <a:effectLst/>
+                <a:latin typeface="Verdana" panose="020B0604030504040204" pitchFamily="34" charset="0"/>
+                <a:ea typeface="Verdana" panose="020B0604030504040204" pitchFamily="34" charset="0"/>
+              </a:rPr>
+              <a:t> For structured data storage.</a:t>
+            </a:r>
+          </a:p>
+          <a:p>
+            <a:pPr marL="0" marR="0" lvl="0" indent="0" algn="l" defTabSz="914400" rtl="0" eaLnBrk="0" fontAlgn="base" latinLnBrk="0" hangingPunct="0">
+              <a:lnSpc>
+                <a:spcPct val="100000"/>
+              </a:lnSpc>
+              <a:spcBef>
+                <a:spcPct val="0"/>
+              </a:spcBef>
+              <a:spcAft>
+                <a:spcPct val="0"/>
+              </a:spcAft>
+              <a:buClrTx/>
+              <a:buSzTx/>
+              <a:buNone/>
+              <a:tabLst/>
+            </a:pPr>
+            <a:r>
+              <a:rPr lang="en-US" altLang="en-US" sz="1600" b="1" dirty="0">
+                <a:latin typeface="Verdana" panose="020B0604030504040204" pitchFamily="34" charset="0"/>
+                <a:ea typeface="Verdana" panose="020B0604030504040204" pitchFamily="34" charset="0"/>
+              </a:rPr>
+              <a:t>Next.js:</a:t>
+            </a:r>
+            <a:r>
+              <a:rPr lang="en-US" altLang="en-US" sz="1600" dirty="0">
+                <a:latin typeface="Verdana" panose="020B0604030504040204" pitchFamily="34" charset="0"/>
+                <a:ea typeface="Verdana" panose="020B0604030504040204" pitchFamily="34" charset="0"/>
+              </a:rPr>
+              <a:t> For frontend</a:t>
+            </a:r>
+            <a:endParaRPr lang="en-US" altLang="en-US" sz="1600" b="1" dirty="0">
+              <a:latin typeface="Verdana" panose="020B0604030504040204" pitchFamily="34" charset="0"/>
+              <a:ea typeface="Verdana" panose="020B0604030504040204" pitchFamily="34" charset="0"/>
+            </a:endParaRPr>
+          </a:p>
+          <a:p>
+            <a:pPr marL="0" marR="0" lvl="0" indent="0" algn="l" defTabSz="914400" rtl="0" eaLnBrk="0" fontAlgn="base" latinLnBrk="0" hangingPunct="0">
+              <a:lnSpc>
+                <a:spcPct val="100000"/>
+              </a:lnSpc>
+              <a:spcBef>
+                <a:spcPct val="0"/>
+              </a:spcBef>
+              <a:spcAft>
+                <a:spcPct val="0"/>
+              </a:spcAft>
+              <a:buClrTx/>
+              <a:buSzTx/>
+              <a:buNone/>
+              <a:tabLst/>
+            </a:pPr>
+            <a:r>
+              <a:rPr lang="en-US" altLang="en-US" sz="1600" b="1" dirty="0">
+                <a:latin typeface="Verdana" panose="020B0604030504040204" pitchFamily="34" charset="0"/>
+                <a:ea typeface="Verdana" panose="020B0604030504040204" pitchFamily="34" charset="0"/>
+              </a:rPr>
+              <a:t>FastAPI:</a:t>
+            </a:r>
+            <a:r>
+              <a:rPr lang="en-US" altLang="en-US" sz="1600" dirty="0">
+                <a:latin typeface="Verdana" panose="020B0604030504040204" pitchFamily="34" charset="0"/>
+                <a:ea typeface="Verdana" panose="020B0604030504040204" pitchFamily="34" charset="0"/>
+              </a:rPr>
+              <a:t> For backend</a:t>
+            </a:r>
+            <a:endParaRPr lang="en-US" altLang="en-US" sz="1600" b="1" dirty="0">
+              <a:latin typeface="Verdana" panose="020B0604030504040204" pitchFamily="34" charset="0"/>
+              <a:ea typeface="Verdana" panose="020B0604030504040204" pitchFamily="34" charset="0"/>
+            </a:endParaRPr>
+          </a:p>
+        </p:txBody>
+      </p:sp>
     </p:spTree>
     <p:extLst>
       <p:ext uri="{BB962C8B-B14F-4D97-AF65-F5344CB8AC3E}">
-        <p14:creationId xmlns:p14="http://schemas.microsoft.com/office/powerpoint/2010/main" val="1099878333"/>
+        <p14:creationId xmlns:p14="http://schemas.microsoft.com/office/powerpoint/2010/main" val="1836312730"/>
       </p:ext>
     </p:extLst>
   </p:cSld>
@@ -8466,35 +12187,6 @@
           <a:chExt cx="0" cy="0"/>
         </a:xfrm>
       </p:grpSpPr>
-      <p:pic>
-        <p:nvPicPr>
-          <p:cNvPr id="4" name="Content Placeholder 3"/>
-          <p:cNvPicPr>
-            <a:picLocks noGrp="1" noChangeAspect="1"/>
-          </p:cNvPicPr>
-          <p:nvPr>
-            <p:ph idx="1"/>
-          </p:nvPr>
-        </p:nvPicPr>
-        <p:blipFill>
-          <a:blip r:embed="rId3" cstate="print">
-            <a:extLst>
-              <a:ext uri="{28A0092B-C50C-407E-A947-70E740481C1C}">
-                <a14:useLocalDpi xmlns:a14="http://schemas.microsoft.com/office/drawing/2010/main" val="0"/>
-              </a:ext>
-            </a:extLst>
-          </a:blip>
-          <a:stretch>
-            <a:fillRect/>
-          </a:stretch>
-        </p:blipFill>
-        <p:spPr>
-          <a:xfrm>
-            <a:off x="1" y="0"/>
-            <a:ext cx="9180512" cy="6885384"/>
-          </a:xfrm>
-        </p:spPr>
-      </p:pic>
       <p:sp>
         <p:nvSpPr>
           <p:cNvPr id="5" name="Rectangle 1"/>
@@ -8505,8 +12197,8 @@
         </p:nvSpPr>
         <p:spPr bwMode="auto">
           <a:xfrm>
-            <a:off x="177133" y="100424"/>
-            <a:ext cx="8280920" cy="1077218"/>
+            <a:off x="177133" y="346645"/>
+            <a:ext cx="8280920" cy="584775"/>
           </a:xfrm>
           <a:prstGeom prst="rect">
             <a:avLst/>
@@ -8564,7 +12256,7 @@
                 <a:ea typeface="Times New Roman" panose="02020603050405020304" pitchFamily="18" charset="0"/>
                 <a:cs typeface="Times New Roman" panose="02020603050405020304" pitchFamily="18" charset="0"/>
               </a:rPr>
-              <a:t>Prototype/Project Flow diagram/Architecture</a:t>
+              <a:t>Project Flow diagram</a:t>
             </a:r>
             <a:endParaRPr lang="en-IN" sz="3200" b="1" dirty="0">
               <a:solidFill>
@@ -8620,7 +12312,7 @@
           <p:nvPr/>
         </p:nvPicPr>
         <p:blipFill>
-          <a:blip r:embed="rId4" cstate="print">
+          <a:blip r:embed="rId3" cstate="print">
             <a:extLst>
               <a:ext uri="{28A0092B-C50C-407E-A947-70E740481C1C}">
                 <a14:useLocalDpi xmlns:a14="http://schemas.microsoft.com/office/drawing/2010/main" val="0"/>
@@ -8641,190 +12333,40 @@
           </a:prstGeom>
         </p:spPr>
       </p:pic>
-      <p:sp>
-        <p:nvSpPr>
-          <p:cNvPr id="6" name="TextBox 5">
+      <p:pic>
+        <p:nvPicPr>
+          <p:cNvPr id="11" name="Picture 10">
             <a:extLst>
               <a:ext uri="{FF2B5EF4-FFF2-40B4-BE49-F238E27FC236}">
-                <a16:creationId xmlns="" xmlns:a16="http://schemas.microsoft.com/office/drawing/2014/main" id="{AE24D516-77C6-C96A-5F77-D099623448D8}"/>
+                <a16:creationId xmlns:a16="http://schemas.microsoft.com/office/drawing/2014/main" id="{F799938D-2C1A-D620-C76B-CF08F07690A3}"/>
               </a:ext>
             </a:extLst>
           </p:cNvPr>
-          <p:cNvSpPr txBox="1"/>
+          <p:cNvPicPr>
+            <a:picLocks noChangeAspect="1"/>
+          </p:cNvPicPr>
           <p:nvPr/>
-        </p:nvSpPr>
+        </p:nvPicPr>
+        <p:blipFill>
+          <a:blip r:embed="rId4"/>
+          <a:stretch>
+            <a:fillRect/>
+          </a:stretch>
+        </p:blipFill>
         <p:spPr>
           <a:xfrm>
-            <a:off x="179512" y="1293834"/>
-            <a:ext cx="8784976" cy="372794"/>
+            <a:off x="323528" y="2060848"/>
+            <a:ext cx="8307397" cy="3363004"/>
           </a:xfrm>
           <a:prstGeom prst="rect">
             <a:avLst/>
           </a:prstGeom>
-          <a:noFill/>
         </p:spPr>
-        <p:txBody>
-          <a:bodyPr wrap="square">
-            <a:spAutoFit/>
-          </a:bodyPr>
-          <a:lstStyle/>
-          <a:p>
-            <a:pPr marL="0" marR="0" algn="just" fontAlgn="base">
-              <a:lnSpc>
-                <a:spcPct val="107000"/>
-              </a:lnSpc>
-              <a:spcBef>
-                <a:spcPts val="0"/>
-              </a:spcBef>
-              <a:spcAft>
-                <a:spcPts val="0"/>
-              </a:spcAft>
-            </a:pPr>
-            <a:r>
-              <a:rPr lang="en-US" sz="1800" kern="100" dirty="0">
-                <a:solidFill>
-                  <a:srgbClr val="000000"/>
-                </a:solidFill>
-                <a:effectLst/>
-                <a:latin typeface="Verdana" panose="020B0604030504040204" pitchFamily="34" charset="0"/>
-                <a:ea typeface="Times New Roman" panose="02020603050405020304" pitchFamily="18" charset="0"/>
-                <a:cs typeface="Times New Roman" panose="02020603050405020304" pitchFamily="18" charset="0"/>
-              </a:rPr>
-              <a:t> </a:t>
-            </a:r>
-            <a:endParaRPr lang="en-US" sz="2800" kern="100" dirty="0">
-              <a:effectLst/>
-              <a:latin typeface="+mj-lt"/>
-              <a:ea typeface="Calibri" panose="020F0502020204030204" pitchFamily="34" charset="0"/>
-              <a:cs typeface="Times New Roman" panose="02020603050405020304" pitchFamily="18" charset="0"/>
-            </a:endParaRPr>
-          </a:p>
-        </p:txBody>
-      </p:sp>
-      <p:sp>
-        <p:nvSpPr>
-          <p:cNvPr id="8" name="Rectangle 1">
-            <a:extLst>
-              <a:ext uri="{FF2B5EF4-FFF2-40B4-BE49-F238E27FC236}">
-                <a16:creationId xmlns="" xmlns:a16="http://schemas.microsoft.com/office/drawing/2014/main" id="{BB1AC4FE-9A4F-F464-CA8E-3B900C29746B}"/>
-              </a:ext>
-            </a:extLst>
-          </p:cNvPr>
-          <p:cNvSpPr>
-            <a:spLocks noChangeArrowheads="1"/>
-          </p:cNvSpPr>
-          <p:nvPr/>
-        </p:nvSpPr>
-        <p:spPr bwMode="auto">
-          <a:xfrm>
-            <a:off x="0" y="0"/>
-            <a:ext cx="9144000" cy="0"/>
-          </a:xfrm>
-          <a:prstGeom prst="rect">
-            <a:avLst/>
-          </a:prstGeom>
-          <a:noFill/>
-          <a:ln>
-            <a:noFill/>
-          </a:ln>
-          <a:effectLst/>
-          <a:extLst>
-            <a:ext uri="{909E8E84-426E-40DD-AFC4-6F175D3DCCD1}">
-              <a14:hiddenFill xmlns:a14="http://schemas.microsoft.com/office/drawing/2010/main">
-                <a:solidFill>
-                  <a:schemeClr val="accent1"/>
-                </a:solidFill>
-              </a14:hiddenFill>
-            </a:ext>
-            <a:ext uri="{91240B29-F687-4F45-9708-019B960494DF}">
-              <a14:hiddenLine xmlns:a14="http://schemas.microsoft.com/office/drawing/2010/main" w="9525">
-                <a:solidFill>
-                  <a:schemeClr val="tx1"/>
-                </a:solidFill>
-                <a:miter lim="800000"/>
-                <a:headEnd/>
-                <a:tailEnd/>
-              </a14:hiddenLine>
-            </a:ext>
-            <a:ext uri="{AF507438-7753-43E0-B8FC-AC1667EBCBE1}">
-              <a14:hiddenEffects xmlns:a14="http://schemas.microsoft.com/office/drawing/2010/main">
-                <a:effectLst>
-                  <a:outerShdw dist="35921" dir="2700000" algn="ctr" rotWithShape="0">
-                    <a:schemeClr val="bg2"/>
-                  </a:outerShdw>
-                </a:effectLst>
-              </a14:hiddenEffects>
-            </a:ext>
-          </a:extLst>
-        </p:spPr>
-        <p:txBody>
-          <a:bodyPr vert="horz" wrap="none" lIns="91440" tIns="45720" rIns="91440" bIns="45720" numCol="1" anchor="ctr" anchorCtr="0" compatLnSpc="1">
-            <a:prstTxWarp prst="textNoShape">
-              <a:avLst/>
-            </a:prstTxWarp>
-            <a:spAutoFit/>
-          </a:bodyPr>
-          <a:lstStyle/>
-          <a:p>
-            <a:endParaRPr lang="en-IN"/>
-          </a:p>
-        </p:txBody>
-      </p:sp>
-      <mc:AlternateContent xmlns:mc="http://schemas.openxmlformats.org/markup-compatibility/2006" xmlns:p14="http://schemas.microsoft.com/office/powerpoint/2010/main">
-        <mc:Choice Requires="p14">
-          <p:contentPart p14:bwMode="auto" r:id="rId5">
-            <p14:nvContentPartPr>
-              <p14:cNvPr id="14" name="Ink 13">
-                <a:extLst>
-                  <a:ext uri="{FF2B5EF4-FFF2-40B4-BE49-F238E27FC236}">
-                    <a16:creationId xmlns="" xmlns:a16="http://schemas.microsoft.com/office/drawing/2014/main" id="{72AEF02E-64A6-6432-1444-81368AF7F7EA}"/>
-                  </a:ext>
-                </a:extLst>
-              </p14:cNvPr>
-              <p14:cNvContentPartPr/>
-              <p14:nvPr/>
-            </p14:nvContentPartPr>
-            <p14:xfrm>
-              <a:off x="6087360" y="2475240"/>
-              <a:ext cx="646200" cy="333720"/>
-            </p14:xfrm>
-          </p:contentPart>
-        </mc:Choice>
-        <mc:Fallback xmlns="">
-          <p:pic>
-            <p:nvPicPr>
-              <p:cNvPr id="14" name="Ink 13">
-                <a:extLst>
-                  <a:ext uri="{FF2B5EF4-FFF2-40B4-BE49-F238E27FC236}">
-                    <a16:creationId xmlns:a16="http://schemas.microsoft.com/office/drawing/2014/main" id="{72AEF02E-64A6-6432-1444-81368AF7F7EA}"/>
-                  </a:ext>
-                </a:extLst>
-              </p:cNvPr>
-              <p:cNvPicPr/>
-              <p:nvPr/>
-            </p:nvPicPr>
-            <p:blipFill>
-              <a:blip r:embed="rId7"/>
-              <a:stretch>
-                <a:fillRect/>
-              </a:stretch>
-            </p:blipFill>
-            <p:spPr>
-              <a:xfrm>
-                <a:off x="6024360" y="2412240"/>
-                <a:ext cx="771840" cy="459360"/>
-              </a:xfrm>
-              <a:prstGeom prst="rect">
-                <a:avLst/>
-              </a:prstGeom>
-            </p:spPr>
-          </p:pic>
-        </mc:Fallback>
-      </mc:AlternateContent>
+      </p:pic>
     </p:spTree>
     <p:extLst>
       <p:ext uri="{BB962C8B-B14F-4D97-AF65-F5344CB8AC3E}">
-        <p14:creationId xmlns:p14="http://schemas.microsoft.com/office/powerpoint/2010/main" val="2093371696"/>
+        <p14:creationId xmlns:p14="http://schemas.microsoft.com/office/powerpoint/2010/main" val="1874413801"/>
       </p:ext>
     </p:extLst>
   </p:cSld>
